--- a/exports/pptx/lessons/middle-module-12-movement-of-sun/day-09-project-session-2.pptx
+++ b/exports/pptx/lessons/middle-module-12-movement-of-sun/day-09-project-session-2.pptx
@@ -3644,7 +3644,1131 @@
         </p:nvSpPr>
         <p:spPr>
           <a:xfrm>
-            <a:off x="406301" y="4695974"/>
+            <a:off x="406301" y="1160413"/>
+            <a:ext cx="8498026" cy="213271"/>
+          </a:xfrm>
+          <a:prstGeom prst="rect">
+            <a:avLst/>
+          </a:prstGeom>
+          <a:noFill/>
+          <a:ln/>
+        </p:spPr>
+        <p:txBody>
+          <a:bodyPr wrap="square" lIns="0" tIns="0" rIns="0" bIns="0" rtlCol="0" anchor="t"/>
+          <a:lstStyle/>
+          <a:p>
+            <a:pPr algn="l" indent="0" marL="0">
+              <a:lnSpc>
+                <a:spcPts val="1680"/>
+              </a:lnSpc>
+              <a:spcBef>
+                <a:spcPts val="300"/>
+              </a:spcBef>
+              <a:spcAft>
+                <a:spcPts val="300"/>
+              </a:spcAft>
+              <a:buNone/>
+            </a:pPr>
+            <a:r>
+              <a:rPr lang="en-US" sz="1200" i="1" dirty="0">
+                <a:solidFill>
+                  <a:srgbClr val="1C2833"/>
+                </a:solidFill>
+                <a:latin typeface="Arial" pitchFamily="34" charset="0"/>
+                <a:ea typeface="Arial" pitchFamily="34" charset="-122"/>
+                <a:cs typeface="Arial" pitchFamily="34" charset="-120"/>
+              </a:rPr>
+              <a:t>Each row: # · Sanskrit (Indian,</a:t>
+            </a:r>
+            <a:pPr algn="l" indent="0" marL="0">
+              <a:lnSpc>
+                <a:spcPts val="1680"/>
+              </a:lnSpc>
+              <a:spcBef>
+                <a:spcPts val="300"/>
+              </a:spcBef>
+              <a:spcAft>
+                <a:spcPts val="300"/>
+              </a:spcAft>
+              <a:buNone/>
+            </a:pPr>
+            <a:r>
+              <a:rPr lang="en-US" sz="1200" dirty="0">
+                <a:solidFill>
+                  <a:srgbClr val="1C2833"/>
+                </a:solidFill>
+                <a:latin typeface="Arial" pitchFamily="34" charset="0"/>
+                <a:ea typeface="Arial" pitchFamily="34" charset="-122"/>
+                <a:cs typeface="Arial" pitchFamily="34" charset="-120"/>
+              </a:rPr>
+              <a:t>rāśi</a:t>
+            </a:r>
+            <a:pPr algn="l" indent="0" marL="0">
+              <a:lnSpc>
+                <a:spcPts val="1680"/>
+              </a:lnSpc>
+              <a:spcBef>
+                <a:spcPts val="300"/>
+              </a:spcBef>
+              <a:spcAft>
+                <a:spcPts val="300"/>
+              </a:spcAft>
+              <a:buNone/>
+            </a:pPr>
+            <a:r>
+              <a:rPr lang="en-US" sz="1200" i="1" dirty="0">
+                <a:solidFill>
+                  <a:srgbClr val="1C2833"/>
+                </a:solidFill>
+                <a:latin typeface="Arial" pitchFamily="34" charset="0"/>
+                <a:ea typeface="Arial" pitchFamily="34" charset="-122"/>
+                <a:cs typeface="Arial" pitchFamily="34" charset="-120"/>
+              </a:rPr>
+              <a:t>) · Greek / English · Babylonian (~700 BCE origins).</a:t>
+            </a:r>
+            <a:endParaRPr lang="en-US" sz="1200" dirty="0"/>
+          </a:p>
+        </p:txBody>
+      </p:sp>
+      <p:sp>
+        <p:nvSpPr>
+          <p:cNvPr id="6" name="Text 4"/>
+          <p:cNvSpPr/>
+          <p:nvPr/>
+        </p:nvSpPr>
+        <p:spPr>
+          <a:xfrm>
+            <a:off x="634901" y="1462534"/>
+            <a:ext cx="8102798" cy="2963466"/>
+          </a:xfrm>
+          <a:prstGeom prst="rect">
+            <a:avLst/>
+          </a:prstGeom>
+          <a:noFill/>
+          <a:ln/>
+        </p:spPr>
+        <p:txBody>
+          <a:bodyPr wrap="square" lIns="0" tIns="0" rIns="0" bIns="0" rtlCol="0" anchor="t"/>
+          <a:lstStyle/>
+          <a:p>
+            <a:pPr algn="l" marL="342900" indent="-342900">
+              <a:lnSpc>
+                <a:spcPts val="1620"/>
+              </a:lnSpc>
+              <a:spcAft>
+                <a:spcPts val="300"/>
+              </a:spcAft>
+              <a:buSzPct val="100000"/>
+              <a:buChar char="•"/>
+            </a:pPr>
+            <a:r>
+              <a:rPr lang="en-US" sz="1200" b="1" dirty="0">
+                <a:solidFill>
+                  <a:srgbClr val="1C2833"/>
+                </a:solidFill>
+                <a:latin typeface="Arial" pitchFamily="34" charset="0"/>
+                <a:ea typeface="Arial" pitchFamily="34" charset="-122"/>
+                <a:cs typeface="Arial" pitchFamily="34" charset="-120"/>
+              </a:rPr>
+              <a:t>1</a:t>
+            </a:r>
+            <a:pPr algn="l" indent="0" marL="0">
+              <a:lnSpc>
+                <a:spcPts val="1620"/>
+              </a:lnSpc>
+              <a:spcAft>
+                <a:spcPts val="300"/>
+              </a:spcAft>
+              <a:buNone/>
+            </a:pPr>
+            <a:r>
+              <a:rPr lang="en-US" sz="1200" dirty="0">
+                <a:solidFill>
+                  <a:srgbClr val="1C2833"/>
+                </a:solidFill>
+                <a:latin typeface="Arial" pitchFamily="34" charset="0"/>
+                <a:ea typeface="Arial" pitchFamily="34" charset="-122"/>
+                <a:cs typeface="Arial" pitchFamily="34" charset="-120"/>
+              </a:rPr>
+              <a:t> — </a:t>
+            </a:r>
+            <a:pPr algn="l" indent="0" marL="0">
+              <a:lnSpc>
+                <a:spcPts val="1620"/>
+              </a:lnSpc>
+              <a:spcAft>
+                <a:spcPts val="300"/>
+              </a:spcAft>
+              <a:buNone/>
+            </a:pPr>
+            <a:r>
+              <a:rPr lang="en-US" sz="1200" i="1" dirty="0">
+                <a:solidFill>
+                  <a:srgbClr val="1C2833"/>
+                </a:solidFill>
+                <a:latin typeface="Arial" pitchFamily="34" charset="0"/>
+                <a:ea typeface="Arial" pitchFamily="34" charset="-122"/>
+                <a:cs typeface="Arial" pitchFamily="34" charset="-120"/>
+              </a:rPr>
+              <a:t>Meṣa</a:t>
+            </a:r>
+            <a:pPr algn="l" indent="0" marL="0">
+              <a:lnSpc>
+                <a:spcPts val="1620"/>
+              </a:lnSpc>
+              <a:spcAft>
+                <a:spcPts val="300"/>
+              </a:spcAft>
+              <a:buNone/>
+            </a:pPr>
+            <a:r>
+              <a:rPr lang="en-US" sz="1200" dirty="0">
+                <a:solidFill>
+                  <a:srgbClr val="1C2833"/>
+                </a:solidFill>
+                <a:latin typeface="Arial" pitchFamily="34" charset="0"/>
+                <a:ea typeface="Arial" pitchFamily="34" charset="-122"/>
+                <a:cs typeface="Arial" pitchFamily="34" charset="-120"/>
+              </a:rPr>
+              <a:t> (Ram) · Aries (Ram) · LU.ḪUN.GÁ (Hired Man)</a:t>
+            </a:r>
+            <a:endParaRPr lang="en-US" sz="1200" dirty="0"/>
+          </a:p>
+          <a:p>
+            <a:pPr algn="l" marL="342900" indent="-342900">
+              <a:lnSpc>
+                <a:spcPts val="1620"/>
+              </a:lnSpc>
+              <a:spcAft>
+                <a:spcPts val="300"/>
+              </a:spcAft>
+              <a:buSzPct val="100000"/>
+              <a:buChar char="•"/>
+            </a:pPr>
+            <a:r>
+              <a:rPr lang="en-US" sz="1200" b="1" dirty="0">
+                <a:solidFill>
+                  <a:srgbClr val="1C2833"/>
+                </a:solidFill>
+                <a:latin typeface="Arial" pitchFamily="34" charset="0"/>
+                <a:ea typeface="Arial" pitchFamily="34" charset="-122"/>
+                <a:cs typeface="Arial" pitchFamily="34" charset="-120"/>
+              </a:rPr>
+              <a:t>2</a:t>
+            </a:r>
+            <a:pPr algn="l" indent="0" marL="0">
+              <a:lnSpc>
+                <a:spcPts val="1620"/>
+              </a:lnSpc>
+              <a:spcAft>
+                <a:spcPts val="300"/>
+              </a:spcAft>
+              <a:buNone/>
+            </a:pPr>
+            <a:r>
+              <a:rPr lang="en-US" sz="1200" dirty="0">
+                <a:solidFill>
+                  <a:srgbClr val="1C2833"/>
+                </a:solidFill>
+                <a:latin typeface="Arial" pitchFamily="34" charset="0"/>
+                <a:ea typeface="Arial" pitchFamily="34" charset="-122"/>
+                <a:cs typeface="Arial" pitchFamily="34" charset="-120"/>
+              </a:rPr>
+              <a:t> — </a:t>
+            </a:r>
+            <a:pPr algn="l" indent="0" marL="0">
+              <a:lnSpc>
+                <a:spcPts val="1620"/>
+              </a:lnSpc>
+              <a:spcAft>
+                <a:spcPts val="300"/>
+              </a:spcAft>
+              <a:buNone/>
+            </a:pPr>
+            <a:r>
+              <a:rPr lang="en-US" sz="1200" i="1" dirty="0">
+                <a:solidFill>
+                  <a:srgbClr val="1C2833"/>
+                </a:solidFill>
+                <a:latin typeface="Arial" pitchFamily="34" charset="0"/>
+                <a:ea typeface="Arial" pitchFamily="34" charset="-122"/>
+                <a:cs typeface="Arial" pitchFamily="34" charset="-120"/>
+              </a:rPr>
+              <a:t>Vṛṣabha</a:t>
+            </a:r>
+            <a:pPr algn="l" indent="0" marL="0">
+              <a:lnSpc>
+                <a:spcPts val="1620"/>
+              </a:lnSpc>
+              <a:spcAft>
+                <a:spcPts val="300"/>
+              </a:spcAft>
+              <a:buNone/>
+            </a:pPr>
+            <a:r>
+              <a:rPr lang="en-US" sz="1200" dirty="0">
+                <a:solidFill>
+                  <a:srgbClr val="1C2833"/>
+                </a:solidFill>
+                <a:latin typeface="Arial" pitchFamily="34" charset="0"/>
+                <a:ea typeface="Arial" pitchFamily="34" charset="-122"/>
+                <a:cs typeface="Arial" pitchFamily="34" charset="-120"/>
+              </a:rPr>
+              <a:t> (Bull) · Taurus (Bull) · GU.AN.NA (Bull of Heaven)</a:t>
+            </a:r>
+            <a:endParaRPr lang="en-US" sz="1200" dirty="0"/>
+          </a:p>
+          <a:p>
+            <a:pPr algn="l" marL="342900" indent="-342900">
+              <a:lnSpc>
+                <a:spcPts val="1620"/>
+              </a:lnSpc>
+              <a:spcAft>
+                <a:spcPts val="300"/>
+              </a:spcAft>
+              <a:buSzPct val="100000"/>
+              <a:buChar char="•"/>
+            </a:pPr>
+            <a:r>
+              <a:rPr lang="en-US" sz="1200" b="1" dirty="0">
+                <a:solidFill>
+                  <a:srgbClr val="1C2833"/>
+                </a:solidFill>
+                <a:latin typeface="Arial" pitchFamily="34" charset="0"/>
+                <a:ea typeface="Arial" pitchFamily="34" charset="-122"/>
+                <a:cs typeface="Arial" pitchFamily="34" charset="-120"/>
+              </a:rPr>
+              <a:t>3</a:t>
+            </a:r>
+            <a:pPr algn="l" indent="0" marL="0">
+              <a:lnSpc>
+                <a:spcPts val="1620"/>
+              </a:lnSpc>
+              <a:spcAft>
+                <a:spcPts val="300"/>
+              </a:spcAft>
+              <a:buNone/>
+            </a:pPr>
+            <a:r>
+              <a:rPr lang="en-US" sz="1200" dirty="0">
+                <a:solidFill>
+                  <a:srgbClr val="1C2833"/>
+                </a:solidFill>
+                <a:latin typeface="Arial" pitchFamily="34" charset="0"/>
+                <a:ea typeface="Arial" pitchFamily="34" charset="-122"/>
+                <a:cs typeface="Arial" pitchFamily="34" charset="-120"/>
+              </a:rPr>
+              <a:t> — </a:t>
+            </a:r>
+            <a:pPr algn="l" indent="0" marL="0">
+              <a:lnSpc>
+                <a:spcPts val="1620"/>
+              </a:lnSpc>
+              <a:spcAft>
+                <a:spcPts val="300"/>
+              </a:spcAft>
+              <a:buNone/>
+            </a:pPr>
+            <a:r>
+              <a:rPr lang="en-US" sz="1200" i="1" dirty="0">
+                <a:solidFill>
+                  <a:srgbClr val="1C2833"/>
+                </a:solidFill>
+                <a:latin typeface="Arial" pitchFamily="34" charset="0"/>
+                <a:ea typeface="Arial" pitchFamily="34" charset="-122"/>
+                <a:cs typeface="Arial" pitchFamily="34" charset="-120"/>
+              </a:rPr>
+              <a:t>Mithuna</a:t>
+            </a:r>
+            <a:pPr algn="l" indent="0" marL="0">
+              <a:lnSpc>
+                <a:spcPts val="1620"/>
+              </a:lnSpc>
+              <a:spcAft>
+                <a:spcPts val="300"/>
+              </a:spcAft>
+              <a:buNone/>
+            </a:pPr>
+            <a:r>
+              <a:rPr lang="en-US" sz="1200" dirty="0">
+                <a:solidFill>
+                  <a:srgbClr val="1C2833"/>
+                </a:solidFill>
+                <a:latin typeface="Arial" pitchFamily="34" charset="0"/>
+                <a:ea typeface="Arial" pitchFamily="34" charset="-122"/>
+                <a:cs typeface="Arial" pitchFamily="34" charset="-120"/>
+              </a:rPr>
+              <a:t> (Twins) · Gemini (Twins) · MAŠ.TAB.BA (Great Twins)</a:t>
+            </a:r>
+            <a:endParaRPr lang="en-US" sz="1200" dirty="0"/>
+          </a:p>
+          <a:p>
+            <a:pPr algn="l" marL="342900" indent="-342900">
+              <a:lnSpc>
+                <a:spcPts val="1620"/>
+              </a:lnSpc>
+              <a:spcAft>
+                <a:spcPts val="300"/>
+              </a:spcAft>
+              <a:buSzPct val="100000"/>
+              <a:buChar char="•"/>
+            </a:pPr>
+            <a:r>
+              <a:rPr lang="en-US" sz="1200" b="1" dirty="0">
+                <a:solidFill>
+                  <a:srgbClr val="1C2833"/>
+                </a:solidFill>
+                <a:latin typeface="Arial" pitchFamily="34" charset="0"/>
+                <a:ea typeface="Arial" pitchFamily="34" charset="-122"/>
+                <a:cs typeface="Arial" pitchFamily="34" charset="-120"/>
+              </a:rPr>
+              <a:t>4</a:t>
+            </a:r>
+            <a:pPr algn="l" indent="0" marL="0">
+              <a:lnSpc>
+                <a:spcPts val="1620"/>
+              </a:lnSpc>
+              <a:spcAft>
+                <a:spcPts val="300"/>
+              </a:spcAft>
+              <a:buNone/>
+            </a:pPr>
+            <a:r>
+              <a:rPr lang="en-US" sz="1200" dirty="0">
+                <a:solidFill>
+                  <a:srgbClr val="1C2833"/>
+                </a:solidFill>
+                <a:latin typeface="Arial" pitchFamily="34" charset="0"/>
+                <a:ea typeface="Arial" pitchFamily="34" charset="-122"/>
+                <a:cs typeface="Arial" pitchFamily="34" charset="-120"/>
+              </a:rPr>
+              <a:t> — </a:t>
+            </a:r>
+            <a:pPr algn="l" indent="0" marL="0">
+              <a:lnSpc>
+                <a:spcPts val="1620"/>
+              </a:lnSpc>
+              <a:spcAft>
+                <a:spcPts val="300"/>
+              </a:spcAft>
+              <a:buNone/>
+            </a:pPr>
+            <a:r>
+              <a:rPr lang="en-US" sz="1200" i="1" dirty="0">
+                <a:solidFill>
+                  <a:srgbClr val="1C2833"/>
+                </a:solidFill>
+                <a:latin typeface="Arial" pitchFamily="34" charset="0"/>
+                <a:ea typeface="Arial" pitchFamily="34" charset="-122"/>
+                <a:cs typeface="Arial" pitchFamily="34" charset="-120"/>
+              </a:rPr>
+              <a:t>Karka</a:t>
+            </a:r>
+            <a:pPr algn="l" indent="0" marL="0">
+              <a:lnSpc>
+                <a:spcPts val="1620"/>
+              </a:lnSpc>
+              <a:spcAft>
+                <a:spcPts val="300"/>
+              </a:spcAft>
+              <a:buNone/>
+            </a:pPr>
+            <a:r>
+              <a:rPr lang="en-US" sz="1200" dirty="0">
+                <a:solidFill>
+                  <a:srgbClr val="1C2833"/>
+                </a:solidFill>
+                <a:latin typeface="Arial" pitchFamily="34" charset="0"/>
+                <a:ea typeface="Arial" pitchFamily="34" charset="-122"/>
+                <a:cs typeface="Arial" pitchFamily="34" charset="-120"/>
+              </a:rPr>
+              <a:t> (Crab) · Cancer (Crab) · AL.LUL (Crab)</a:t>
+            </a:r>
+            <a:endParaRPr lang="en-US" sz="1200" dirty="0"/>
+          </a:p>
+          <a:p>
+            <a:pPr algn="l" marL="342900" indent="-342900">
+              <a:lnSpc>
+                <a:spcPts val="1620"/>
+              </a:lnSpc>
+              <a:spcAft>
+                <a:spcPts val="300"/>
+              </a:spcAft>
+              <a:buSzPct val="100000"/>
+              <a:buChar char="•"/>
+            </a:pPr>
+            <a:r>
+              <a:rPr lang="en-US" sz="1200" b="1" dirty="0">
+                <a:solidFill>
+                  <a:srgbClr val="1C2833"/>
+                </a:solidFill>
+                <a:latin typeface="Arial" pitchFamily="34" charset="0"/>
+                <a:ea typeface="Arial" pitchFamily="34" charset="-122"/>
+                <a:cs typeface="Arial" pitchFamily="34" charset="-120"/>
+              </a:rPr>
+              <a:t>5</a:t>
+            </a:r>
+            <a:pPr algn="l" indent="0" marL="0">
+              <a:lnSpc>
+                <a:spcPts val="1620"/>
+              </a:lnSpc>
+              <a:spcAft>
+                <a:spcPts val="300"/>
+              </a:spcAft>
+              <a:buNone/>
+            </a:pPr>
+            <a:r>
+              <a:rPr lang="en-US" sz="1200" dirty="0">
+                <a:solidFill>
+                  <a:srgbClr val="1C2833"/>
+                </a:solidFill>
+                <a:latin typeface="Arial" pitchFamily="34" charset="0"/>
+                <a:ea typeface="Arial" pitchFamily="34" charset="-122"/>
+                <a:cs typeface="Arial" pitchFamily="34" charset="-120"/>
+              </a:rPr>
+              <a:t> — </a:t>
+            </a:r>
+            <a:pPr algn="l" indent="0" marL="0">
+              <a:lnSpc>
+                <a:spcPts val="1620"/>
+              </a:lnSpc>
+              <a:spcAft>
+                <a:spcPts val="300"/>
+              </a:spcAft>
+              <a:buNone/>
+            </a:pPr>
+            <a:r>
+              <a:rPr lang="en-US" sz="1200" i="1" dirty="0">
+                <a:solidFill>
+                  <a:srgbClr val="1C2833"/>
+                </a:solidFill>
+                <a:latin typeface="Arial" pitchFamily="34" charset="0"/>
+                <a:ea typeface="Arial" pitchFamily="34" charset="-122"/>
+                <a:cs typeface="Arial" pitchFamily="34" charset="-120"/>
+              </a:rPr>
+              <a:t>Siṁha</a:t>
+            </a:r>
+            <a:pPr algn="l" indent="0" marL="0">
+              <a:lnSpc>
+                <a:spcPts val="1620"/>
+              </a:lnSpc>
+              <a:spcAft>
+                <a:spcPts val="300"/>
+              </a:spcAft>
+              <a:buNone/>
+            </a:pPr>
+            <a:r>
+              <a:rPr lang="en-US" sz="1200" dirty="0">
+                <a:solidFill>
+                  <a:srgbClr val="1C2833"/>
+                </a:solidFill>
+                <a:latin typeface="Arial" pitchFamily="34" charset="0"/>
+                <a:ea typeface="Arial" pitchFamily="34" charset="-122"/>
+                <a:cs typeface="Arial" pitchFamily="34" charset="-120"/>
+              </a:rPr>
+              <a:t> (Lion) · Leo (Lion) · UR.GU.LA (Lion)</a:t>
+            </a:r>
+            <a:endParaRPr lang="en-US" sz="1200" dirty="0"/>
+          </a:p>
+          <a:p>
+            <a:pPr algn="l" marL="342900" indent="-342900">
+              <a:lnSpc>
+                <a:spcPts val="1620"/>
+              </a:lnSpc>
+              <a:spcAft>
+                <a:spcPts val="300"/>
+              </a:spcAft>
+              <a:buSzPct val="100000"/>
+              <a:buChar char="•"/>
+            </a:pPr>
+            <a:r>
+              <a:rPr lang="en-US" sz="1200" b="1" dirty="0">
+                <a:solidFill>
+                  <a:srgbClr val="1C2833"/>
+                </a:solidFill>
+                <a:latin typeface="Arial" pitchFamily="34" charset="0"/>
+                <a:ea typeface="Arial" pitchFamily="34" charset="-122"/>
+                <a:cs typeface="Arial" pitchFamily="34" charset="-120"/>
+              </a:rPr>
+              <a:t>6</a:t>
+            </a:r>
+            <a:pPr algn="l" indent="0" marL="0">
+              <a:lnSpc>
+                <a:spcPts val="1620"/>
+              </a:lnSpc>
+              <a:spcAft>
+                <a:spcPts val="300"/>
+              </a:spcAft>
+              <a:buNone/>
+            </a:pPr>
+            <a:r>
+              <a:rPr lang="en-US" sz="1200" dirty="0">
+                <a:solidFill>
+                  <a:srgbClr val="1C2833"/>
+                </a:solidFill>
+                <a:latin typeface="Arial" pitchFamily="34" charset="0"/>
+                <a:ea typeface="Arial" pitchFamily="34" charset="-122"/>
+                <a:cs typeface="Arial" pitchFamily="34" charset="-120"/>
+              </a:rPr>
+              <a:t> — </a:t>
+            </a:r>
+            <a:pPr algn="l" indent="0" marL="0">
+              <a:lnSpc>
+                <a:spcPts val="1620"/>
+              </a:lnSpc>
+              <a:spcAft>
+                <a:spcPts val="300"/>
+              </a:spcAft>
+              <a:buNone/>
+            </a:pPr>
+            <a:r>
+              <a:rPr lang="en-US" sz="1200" i="1" dirty="0">
+                <a:solidFill>
+                  <a:srgbClr val="1C2833"/>
+                </a:solidFill>
+                <a:latin typeface="Arial" pitchFamily="34" charset="0"/>
+                <a:ea typeface="Arial" pitchFamily="34" charset="-122"/>
+                <a:cs typeface="Arial" pitchFamily="34" charset="-120"/>
+              </a:rPr>
+              <a:t>Kanyā</a:t>
+            </a:r>
+            <a:pPr algn="l" indent="0" marL="0">
+              <a:lnSpc>
+                <a:spcPts val="1620"/>
+              </a:lnSpc>
+              <a:spcAft>
+                <a:spcPts val="300"/>
+              </a:spcAft>
+              <a:buNone/>
+            </a:pPr>
+            <a:r>
+              <a:rPr lang="en-US" sz="1200" dirty="0">
+                <a:solidFill>
+                  <a:srgbClr val="1C2833"/>
+                </a:solidFill>
+                <a:latin typeface="Arial" pitchFamily="34" charset="0"/>
+                <a:ea typeface="Arial" pitchFamily="34" charset="-122"/>
+                <a:cs typeface="Arial" pitchFamily="34" charset="-120"/>
+              </a:rPr>
+              <a:t> (Maiden) · Virgo (Maiden) · AB.SIN (Furrow / barley ear)</a:t>
+            </a:r>
+            <a:endParaRPr lang="en-US" sz="1200" dirty="0"/>
+          </a:p>
+          <a:p>
+            <a:pPr algn="l" marL="342900" indent="-342900">
+              <a:lnSpc>
+                <a:spcPts val="1620"/>
+              </a:lnSpc>
+              <a:spcAft>
+                <a:spcPts val="300"/>
+              </a:spcAft>
+              <a:buSzPct val="100000"/>
+              <a:buChar char="•"/>
+            </a:pPr>
+            <a:r>
+              <a:rPr lang="en-US" sz="1200" b="1" dirty="0">
+                <a:solidFill>
+                  <a:srgbClr val="1C2833"/>
+                </a:solidFill>
+                <a:latin typeface="Arial" pitchFamily="34" charset="0"/>
+                <a:ea typeface="Arial" pitchFamily="34" charset="-122"/>
+                <a:cs typeface="Arial" pitchFamily="34" charset="-120"/>
+              </a:rPr>
+              <a:t>7</a:t>
+            </a:r>
+            <a:pPr algn="l" indent="0" marL="0">
+              <a:lnSpc>
+                <a:spcPts val="1620"/>
+              </a:lnSpc>
+              <a:spcAft>
+                <a:spcPts val="300"/>
+              </a:spcAft>
+              <a:buNone/>
+            </a:pPr>
+            <a:r>
+              <a:rPr lang="en-US" sz="1200" dirty="0">
+                <a:solidFill>
+                  <a:srgbClr val="1C2833"/>
+                </a:solidFill>
+                <a:latin typeface="Arial" pitchFamily="34" charset="0"/>
+                <a:ea typeface="Arial" pitchFamily="34" charset="-122"/>
+                <a:cs typeface="Arial" pitchFamily="34" charset="-120"/>
+              </a:rPr>
+              <a:t> — </a:t>
+            </a:r>
+            <a:pPr algn="l" indent="0" marL="0">
+              <a:lnSpc>
+                <a:spcPts val="1620"/>
+              </a:lnSpc>
+              <a:spcAft>
+                <a:spcPts val="300"/>
+              </a:spcAft>
+              <a:buNone/>
+            </a:pPr>
+            <a:r>
+              <a:rPr lang="en-US" sz="1200" i="1" dirty="0">
+                <a:solidFill>
+                  <a:srgbClr val="1C2833"/>
+                </a:solidFill>
+                <a:latin typeface="Arial" pitchFamily="34" charset="0"/>
+                <a:ea typeface="Arial" pitchFamily="34" charset="-122"/>
+                <a:cs typeface="Arial" pitchFamily="34" charset="-120"/>
+              </a:rPr>
+              <a:t>Tulā</a:t>
+            </a:r>
+            <a:pPr algn="l" indent="0" marL="0">
+              <a:lnSpc>
+                <a:spcPts val="1620"/>
+              </a:lnSpc>
+              <a:spcAft>
+                <a:spcPts val="300"/>
+              </a:spcAft>
+              <a:buNone/>
+            </a:pPr>
+            <a:r>
+              <a:rPr lang="en-US" sz="1200" dirty="0">
+                <a:solidFill>
+                  <a:srgbClr val="1C2833"/>
+                </a:solidFill>
+                <a:latin typeface="Arial" pitchFamily="34" charset="0"/>
+                <a:ea typeface="Arial" pitchFamily="34" charset="-122"/>
+                <a:cs typeface="Arial" pitchFamily="34" charset="-120"/>
+              </a:rPr>
+              <a:t> (Scales) · Libra (Scales) · RIN (Balance)</a:t>
+            </a:r>
+            <a:endParaRPr lang="en-US" sz="1200" dirty="0"/>
+          </a:p>
+          <a:p>
+            <a:pPr algn="l" marL="342900" indent="-342900">
+              <a:lnSpc>
+                <a:spcPts val="1620"/>
+              </a:lnSpc>
+              <a:spcAft>
+                <a:spcPts val="300"/>
+              </a:spcAft>
+              <a:buSzPct val="100000"/>
+              <a:buChar char="•"/>
+            </a:pPr>
+            <a:r>
+              <a:rPr lang="en-US" sz="1200" b="1" dirty="0">
+                <a:solidFill>
+                  <a:srgbClr val="1C2833"/>
+                </a:solidFill>
+                <a:latin typeface="Arial" pitchFamily="34" charset="0"/>
+                <a:ea typeface="Arial" pitchFamily="34" charset="-122"/>
+                <a:cs typeface="Arial" pitchFamily="34" charset="-120"/>
+              </a:rPr>
+              <a:t>8</a:t>
+            </a:r>
+            <a:pPr algn="l" indent="0" marL="0">
+              <a:lnSpc>
+                <a:spcPts val="1620"/>
+              </a:lnSpc>
+              <a:spcAft>
+                <a:spcPts val="300"/>
+              </a:spcAft>
+              <a:buNone/>
+            </a:pPr>
+            <a:r>
+              <a:rPr lang="en-US" sz="1200" dirty="0">
+                <a:solidFill>
+                  <a:srgbClr val="1C2833"/>
+                </a:solidFill>
+                <a:latin typeface="Arial" pitchFamily="34" charset="0"/>
+                <a:ea typeface="Arial" pitchFamily="34" charset="-122"/>
+                <a:cs typeface="Arial" pitchFamily="34" charset="-120"/>
+              </a:rPr>
+              <a:t> — </a:t>
+            </a:r>
+            <a:pPr algn="l" indent="0" marL="0">
+              <a:lnSpc>
+                <a:spcPts val="1620"/>
+              </a:lnSpc>
+              <a:spcAft>
+                <a:spcPts val="300"/>
+              </a:spcAft>
+              <a:buNone/>
+            </a:pPr>
+            <a:r>
+              <a:rPr lang="en-US" sz="1200" i="1" dirty="0">
+                <a:solidFill>
+                  <a:srgbClr val="1C2833"/>
+                </a:solidFill>
+                <a:latin typeface="Arial" pitchFamily="34" charset="0"/>
+                <a:ea typeface="Arial" pitchFamily="34" charset="-122"/>
+                <a:cs typeface="Arial" pitchFamily="34" charset="-120"/>
+              </a:rPr>
+              <a:t>Vṛścika</a:t>
+            </a:r>
+            <a:pPr algn="l" indent="0" marL="0">
+              <a:lnSpc>
+                <a:spcPts val="1620"/>
+              </a:lnSpc>
+              <a:spcAft>
+                <a:spcPts val="300"/>
+              </a:spcAft>
+              <a:buNone/>
+            </a:pPr>
+            <a:r>
+              <a:rPr lang="en-US" sz="1200" dirty="0">
+                <a:solidFill>
+                  <a:srgbClr val="1C2833"/>
+                </a:solidFill>
+                <a:latin typeface="Arial" pitchFamily="34" charset="0"/>
+                <a:ea typeface="Arial" pitchFamily="34" charset="-122"/>
+                <a:cs typeface="Arial" pitchFamily="34" charset="-120"/>
+              </a:rPr>
+              <a:t> (Scorpion) · Scorpio (Scorpion) · GIR.TAB (Scorpion)</a:t>
+            </a:r>
+            <a:endParaRPr lang="en-US" sz="1200" dirty="0"/>
+          </a:p>
+          <a:p>
+            <a:pPr algn="l" marL="342900" indent="-342900">
+              <a:lnSpc>
+                <a:spcPts val="1620"/>
+              </a:lnSpc>
+              <a:spcAft>
+                <a:spcPts val="300"/>
+              </a:spcAft>
+              <a:buSzPct val="100000"/>
+              <a:buChar char="•"/>
+            </a:pPr>
+            <a:r>
+              <a:rPr lang="en-US" sz="1200" b="1" dirty="0">
+                <a:solidFill>
+                  <a:srgbClr val="1C2833"/>
+                </a:solidFill>
+                <a:latin typeface="Arial" pitchFamily="34" charset="0"/>
+                <a:ea typeface="Arial" pitchFamily="34" charset="-122"/>
+                <a:cs typeface="Arial" pitchFamily="34" charset="-120"/>
+              </a:rPr>
+              <a:t>9</a:t>
+            </a:r>
+            <a:pPr algn="l" indent="0" marL="0">
+              <a:lnSpc>
+                <a:spcPts val="1620"/>
+              </a:lnSpc>
+              <a:spcAft>
+                <a:spcPts val="300"/>
+              </a:spcAft>
+              <a:buNone/>
+            </a:pPr>
+            <a:r>
+              <a:rPr lang="en-US" sz="1200" dirty="0">
+                <a:solidFill>
+                  <a:srgbClr val="1C2833"/>
+                </a:solidFill>
+                <a:latin typeface="Arial" pitchFamily="34" charset="0"/>
+                <a:ea typeface="Arial" pitchFamily="34" charset="-122"/>
+                <a:cs typeface="Arial" pitchFamily="34" charset="-120"/>
+              </a:rPr>
+              <a:t> — </a:t>
+            </a:r>
+            <a:pPr algn="l" indent="0" marL="0">
+              <a:lnSpc>
+                <a:spcPts val="1620"/>
+              </a:lnSpc>
+              <a:spcAft>
+                <a:spcPts val="300"/>
+              </a:spcAft>
+              <a:buNone/>
+            </a:pPr>
+            <a:r>
+              <a:rPr lang="en-US" sz="1200" i="1" dirty="0">
+                <a:solidFill>
+                  <a:srgbClr val="1C2833"/>
+                </a:solidFill>
+                <a:latin typeface="Arial" pitchFamily="34" charset="0"/>
+                <a:ea typeface="Arial" pitchFamily="34" charset="-122"/>
+                <a:cs typeface="Arial" pitchFamily="34" charset="-120"/>
+              </a:rPr>
+              <a:t>Dhanus</a:t>
+            </a:r>
+            <a:pPr algn="l" indent="0" marL="0">
+              <a:lnSpc>
+                <a:spcPts val="1620"/>
+              </a:lnSpc>
+              <a:spcAft>
+                <a:spcPts val="300"/>
+              </a:spcAft>
+              <a:buNone/>
+            </a:pPr>
+            <a:r>
+              <a:rPr lang="en-US" sz="1200" dirty="0">
+                <a:solidFill>
+                  <a:srgbClr val="1C2833"/>
+                </a:solidFill>
+                <a:latin typeface="Arial" pitchFamily="34" charset="0"/>
+                <a:ea typeface="Arial" pitchFamily="34" charset="-122"/>
+                <a:cs typeface="Arial" pitchFamily="34" charset="-120"/>
+              </a:rPr>
+              <a:t> (Bow) · Sagittarius (Archer) · PA.BIL.SAG (Archer)</a:t>
+            </a:r>
+            <a:endParaRPr lang="en-US" sz="1200" dirty="0"/>
+          </a:p>
+          <a:p>
+            <a:pPr algn="l" marL="342900" indent="-342900">
+              <a:lnSpc>
+                <a:spcPts val="1620"/>
+              </a:lnSpc>
+              <a:spcAft>
+                <a:spcPts val="300"/>
+              </a:spcAft>
+              <a:buSzPct val="100000"/>
+              <a:buChar char="•"/>
+            </a:pPr>
+            <a:r>
+              <a:rPr lang="en-US" sz="1200" b="1" dirty="0">
+                <a:solidFill>
+                  <a:srgbClr val="1C2833"/>
+                </a:solidFill>
+                <a:latin typeface="Arial" pitchFamily="34" charset="0"/>
+                <a:ea typeface="Arial" pitchFamily="34" charset="-122"/>
+                <a:cs typeface="Arial" pitchFamily="34" charset="-120"/>
+              </a:rPr>
+              <a:t>10</a:t>
+            </a:r>
+            <a:pPr algn="l" indent="0" marL="0">
+              <a:lnSpc>
+                <a:spcPts val="1620"/>
+              </a:lnSpc>
+              <a:spcAft>
+                <a:spcPts val="300"/>
+              </a:spcAft>
+              <a:buNone/>
+            </a:pPr>
+            <a:r>
+              <a:rPr lang="en-US" sz="1200" dirty="0">
+                <a:solidFill>
+                  <a:srgbClr val="1C2833"/>
+                </a:solidFill>
+                <a:latin typeface="Arial" pitchFamily="34" charset="0"/>
+                <a:ea typeface="Arial" pitchFamily="34" charset="-122"/>
+                <a:cs typeface="Arial" pitchFamily="34" charset="-120"/>
+              </a:rPr>
+              <a:t> — </a:t>
+            </a:r>
+            <a:pPr algn="l" indent="0" marL="0">
+              <a:lnSpc>
+                <a:spcPts val="1620"/>
+              </a:lnSpc>
+              <a:spcAft>
+                <a:spcPts val="300"/>
+              </a:spcAft>
+              <a:buNone/>
+            </a:pPr>
+            <a:r>
+              <a:rPr lang="en-US" sz="1200" i="1" dirty="0">
+                <a:solidFill>
+                  <a:srgbClr val="1C2833"/>
+                </a:solidFill>
+                <a:latin typeface="Arial" pitchFamily="34" charset="0"/>
+                <a:ea typeface="Arial" pitchFamily="34" charset="-122"/>
+                <a:cs typeface="Arial" pitchFamily="34" charset="-120"/>
+              </a:rPr>
+              <a:t>Makara</a:t>
+            </a:r>
+            <a:pPr algn="l" indent="0" marL="0">
+              <a:lnSpc>
+                <a:spcPts val="1620"/>
+              </a:lnSpc>
+              <a:spcAft>
+                <a:spcPts val="300"/>
+              </a:spcAft>
+              <a:buNone/>
+            </a:pPr>
+            <a:r>
+              <a:rPr lang="en-US" sz="1200" dirty="0">
+                <a:solidFill>
+                  <a:srgbClr val="1C2833"/>
+                </a:solidFill>
+                <a:latin typeface="Arial" pitchFamily="34" charset="0"/>
+                <a:ea typeface="Arial" pitchFamily="34" charset="-122"/>
+                <a:cs typeface="Arial" pitchFamily="34" charset="-120"/>
+              </a:rPr>
+              <a:t> (Sea-goat) · Capricorn (Sea-goat) · SUḪUR.MAŠ (Goat-fish)</a:t>
+            </a:r>
+            <a:endParaRPr lang="en-US" sz="1200" dirty="0"/>
+          </a:p>
+          <a:p>
+            <a:pPr algn="l" marL="342900" indent="-342900">
+              <a:lnSpc>
+                <a:spcPts val="1620"/>
+              </a:lnSpc>
+              <a:spcAft>
+                <a:spcPts val="300"/>
+              </a:spcAft>
+              <a:buSzPct val="100000"/>
+              <a:buChar char="•"/>
+            </a:pPr>
+            <a:r>
+              <a:rPr lang="en-US" sz="1200" b="1" dirty="0">
+                <a:solidFill>
+                  <a:srgbClr val="1C2833"/>
+                </a:solidFill>
+                <a:latin typeface="Arial" pitchFamily="34" charset="0"/>
+                <a:ea typeface="Arial" pitchFamily="34" charset="-122"/>
+                <a:cs typeface="Arial" pitchFamily="34" charset="-120"/>
+              </a:rPr>
+              <a:t>11</a:t>
+            </a:r>
+            <a:pPr algn="l" indent="0" marL="0">
+              <a:lnSpc>
+                <a:spcPts val="1620"/>
+              </a:lnSpc>
+              <a:spcAft>
+                <a:spcPts val="300"/>
+              </a:spcAft>
+              <a:buNone/>
+            </a:pPr>
+            <a:r>
+              <a:rPr lang="en-US" sz="1200" dirty="0">
+                <a:solidFill>
+                  <a:srgbClr val="1C2833"/>
+                </a:solidFill>
+                <a:latin typeface="Arial" pitchFamily="34" charset="0"/>
+                <a:ea typeface="Arial" pitchFamily="34" charset="-122"/>
+                <a:cs typeface="Arial" pitchFamily="34" charset="-120"/>
+              </a:rPr>
+              <a:t> — </a:t>
+            </a:r>
+            <a:pPr algn="l" indent="0" marL="0">
+              <a:lnSpc>
+                <a:spcPts val="1620"/>
+              </a:lnSpc>
+              <a:spcAft>
+                <a:spcPts val="300"/>
+              </a:spcAft>
+              <a:buNone/>
+            </a:pPr>
+            <a:r>
+              <a:rPr lang="en-US" sz="1200" i="1" dirty="0">
+                <a:solidFill>
+                  <a:srgbClr val="1C2833"/>
+                </a:solidFill>
+                <a:latin typeface="Arial" pitchFamily="34" charset="0"/>
+                <a:ea typeface="Arial" pitchFamily="34" charset="-122"/>
+                <a:cs typeface="Arial" pitchFamily="34" charset="-120"/>
+              </a:rPr>
+              <a:t>Kumbha</a:t>
+            </a:r>
+            <a:pPr algn="l" indent="0" marL="0">
+              <a:lnSpc>
+                <a:spcPts val="1620"/>
+              </a:lnSpc>
+              <a:spcAft>
+                <a:spcPts val="300"/>
+              </a:spcAft>
+              <a:buNone/>
+            </a:pPr>
+            <a:r>
+              <a:rPr lang="en-US" sz="1200" dirty="0">
+                <a:solidFill>
+                  <a:srgbClr val="1C2833"/>
+                </a:solidFill>
+                <a:latin typeface="Arial" pitchFamily="34" charset="0"/>
+                <a:ea typeface="Arial" pitchFamily="34" charset="-122"/>
+                <a:cs typeface="Arial" pitchFamily="34" charset="-120"/>
+              </a:rPr>
+              <a:t> (Water-pot) · Aquarius (Water-bearer) · GU.LA (Great One / water-pourer)</a:t>
+            </a:r>
+            <a:endParaRPr lang="en-US" sz="1200" dirty="0"/>
+          </a:p>
+          <a:p>
+            <a:pPr algn="l" marL="342900" indent="-342900">
+              <a:lnSpc>
+                <a:spcPts val="1620"/>
+              </a:lnSpc>
+              <a:spcAft>
+                <a:spcPts val="300"/>
+              </a:spcAft>
+              <a:buSzPct val="100000"/>
+              <a:buChar char="•"/>
+            </a:pPr>
+            <a:r>
+              <a:rPr lang="en-US" sz="1200" b="1" dirty="0">
+                <a:solidFill>
+                  <a:srgbClr val="1C2833"/>
+                </a:solidFill>
+                <a:latin typeface="Arial" pitchFamily="34" charset="0"/>
+                <a:ea typeface="Arial" pitchFamily="34" charset="-122"/>
+                <a:cs typeface="Arial" pitchFamily="34" charset="-120"/>
+              </a:rPr>
+              <a:t>12</a:t>
+            </a:r>
+            <a:pPr algn="l" indent="0" marL="0">
+              <a:lnSpc>
+                <a:spcPts val="1620"/>
+              </a:lnSpc>
+              <a:spcAft>
+                <a:spcPts val="300"/>
+              </a:spcAft>
+              <a:buNone/>
+            </a:pPr>
+            <a:r>
+              <a:rPr lang="en-US" sz="1200" dirty="0">
+                <a:solidFill>
+                  <a:srgbClr val="1C2833"/>
+                </a:solidFill>
+                <a:latin typeface="Arial" pitchFamily="34" charset="0"/>
+                <a:ea typeface="Arial" pitchFamily="34" charset="-122"/>
+                <a:cs typeface="Arial" pitchFamily="34" charset="-120"/>
+              </a:rPr>
+              <a:t> — </a:t>
+            </a:r>
+            <a:pPr algn="l" indent="0" marL="0">
+              <a:lnSpc>
+                <a:spcPts val="1620"/>
+              </a:lnSpc>
+              <a:spcAft>
+                <a:spcPts val="300"/>
+              </a:spcAft>
+              <a:buNone/>
+            </a:pPr>
+            <a:r>
+              <a:rPr lang="en-US" sz="1200" i="1" dirty="0">
+                <a:solidFill>
+                  <a:srgbClr val="1C2833"/>
+                </a:solidFill>
+                <a:latin typeface="Arial" pitchFamily="34" charset="0"/>
+                <a:ea typeface="Arial" pitchFamily="34" charset="-122"/>
+                <a:cs typeface="Arial" pitchFamily="34" charset="-120"/>
+              </a:rPr>
+              <a:t>Mīna</a:t>
+            </a:r>
+            <a:pPr algn="l" indent="0" marL="0">
+              <a:lnSpc>
+                <a:spcPts val="1620"/>
+              </a:lnSpc>
+              <a:spcAft>
+                <a:spcPts val="300"/>
+              </a:spcAft>
+              <a:buNone/>
+            </a:pPr>
+            <a:r>
+              <a:rPr lang="en-US" sz="1200" dirty="0">
+                <a:solidFill>
+                  <a:srgbClr val="1C2833"/>
+                </a:solidFill>
+                <a:latin typeface="Arial" pitchFamily="34" charset="0"/>
+                <a:ea typeface="Arial" pitchFamily="34" charset="-122"/>
+                <a:cs typeface="Arial" pitchFamily="34" charset="-120"/>
+              </a:rPr>
+              <a:t> (Fishes) · Pisces (Fishes) · DU.NU.NU (Tails)</a:t>
+            </a:r>
+            <a:endParaRPr lang="en-US" sz="1200" dirty="0"/>
+          </a:p>
+        </p:txBody>
+      </p:sp>
+      <p:sp>
+        <p:nvSpPr>
+          <p:cNvPr id="7" name="Text 5"/>
+          <p:cNvSpPr/>
+          <p:nvPr/>
+        </p:nvSpPr>
+        <p:spPr>
+          <a:xfrm>
+            <a:off x="406301" y="4514850"/>
             <a:ext cx="8498026" cy="1066354"/>
           </a:xfrm>
           <a:prstGeom prst="rect">
@@ -3870,13 +4994,13 @@
       </p:sp>
       <p:sp>
         <p:nvSpPr>
-          <p:cNvPr id="6" name="Text 4"/>
+          <p:cNvPr id="8" name="Text 6"/>
           <p:cNvSpPr/>
           <p:nvPr/>
         </p:nvSpPr>
         <p:spPr>
           <a:xfrm>
-            <a:off x="406301" y="5838527"/>
+            <a:off x="406301" y="5657404"/>
             <a:ext cx="8498026" cy="213271"/>
           </a:xfrm>
           <a:prstGeom prst="rect">
@@ -4056,13 +5180,13 @@
       </p:sp>
       <p:sp>
         <p:nvSpPr>
-          <p:cNvPr id="7" name="Text 5"/>
+          <p:cNvPr id="9" name="Text 7"/>
           <p:cNvSpPr/>
           <p:nvPr/>
         </p:nvSpPr>
         <p:spPr>
           <a:xfrm>
-            <a:off x="406301" y="6204198"/>
+            <a:off x="406301" y="6023074"/>
             <a:ext cx="8498026" cy="213271"/>
           </a:xfrm>
           <a:prstGeom prst="rect">

--- a/exports/pptx/lessons/middle-module-12-movement-of-sun/day-09-project-session-2.pptx
+++ b/exports/pptx/lessons/middle-module-12-movement-of-sun/day-09-project-session-2.pptx
@@ -17,9 +17,15 @@
     <p:sldId id="265" r:id="rId11"/>
     <p:sldId id="266" r:id="rId12"/>
     <p:sldId id="267" r:id="rId13"/>
+    <p:sldId id="268" r:id="rId14"/>
+    <p:sldId id="269" r:id="rId15"/>
+    <p:sldId id="270" r:id="rId16"/>
+    <p:sldId id="271" r:id="rId17"/>
+    <p:sldId id="272" r:id="rId18"/>
+    <p:sldId id="273" r:id="rId19"/>
   </p:sldIdLst>
   <p:notesMasterIdLst>
-    <p:notesMasterId r:id="rId14"/>
+    <p:notesMasterId r:id="rId20"/>
   </p:notesMasterIdLst>
   <p:sldSz cx="9144000" cy="5143500"/>
   <p:notesSz cx="5143500" cy="9144000"/>
@@ -801,6 +807,534 @@
             <a:fld id="{F7021451-1387-4CA6-816F-3879F97B5CBC}" type="slidenum">
               <a:rPr lang="en-US"/>
               <a:t>12</a:t>
+            </a:fld>
+            <a:endParaRPr lang="en-US"/>
+          </a:p>
+        </p:txBody>
+      </p:sp>
+    </p:spTree>
+    <p:extLst>
+      <p:ext uri="{BB962C8B-B14F-4D97-AF65-F5344CB8AC3E}">
+        <p14:creationId xmlns:p14="http://schemas.microsoft.com/office/powerpoint/2010/main" val="1024086991"/>
+      </p:ext>
+    </p:extLst>
+  </p:cSld>
+  <p:clrMapOvr>
+    <a:masterClrMapping/>
+  </p:clrMapOvr>
+</p:notes>
+</file>
+
+<file path=ppt/notesSlides/notesSlide13.xml><?xml version="1.0" encoding="utf-8"?>
+<p:notes xmlns:a="http://schemas.openxmlformats.org/drawingml/2006/main" xmlns:r="http://schemas.openxmlformats.org/officeDocument/2006/relationships" xmlns:p="http://schemas.openxmlformats.org/presentationml/2006/main">
+  <p:cSld>
+    <p:spTree>
+      <p:nvGrpSpPr>
+        <p:cNvPr id="1" name=""/>
+        <p:cNvGrpSpPr/>
+        <p:nvPr/>
+      </p:nvGrpSpPr>
+      <p:grpSpPr>
+        <a:xfrm>
+          <a:off x="0" y="0"/>
+          <a:ext cx="0" cy="0"/>
+          <a:chOff x="0" y="0"/>
+          <a:chExt cx="0" cy="0"/>
+        </a:xfrm>
+      </p:grpSpPr>
+      <p:sp>
+        <p:nvSpPr>
+          <p:cNvPr id="2" name="Slide Image Placeholder 1"/>
+          <p:cNvSpPr>
+            <a:spLocks noGrp="1" noRot="1" noChangeAspect="1"/>
+          </p:cNvSpPr>
+          <p:nvPr>
+            <p:ph type="sldImg"/>
+          </p:nvPr>
+        </p:nvSpPr>
+        <p:spPr/>
+      </p:sp>
+      <p:sp>
+        <p:nvSpPr>
+          <p:cNvPr id="3" name="Notes Placeholder 2"/>
+          <p:cNvSpPr>
+            <a:spLocks noGrp="1"/>
+          </p:cNvSpPr>
+          <p:nvPr>
+            <p:ph type="body" idx="1"/>
+          </p:nvPr>
+        </p:nvSpPr>
+        <p:spPr/>
+        <p:txBody>
+          <a:bodyPr/>
+          <a:lstStyle/>
+          <a:p>
+            <a:r>
+              <a:rPr lang="en-US" dirty="0"/>
+              <a:t/>
+            </a:r>
+            <a:endParaRPr lang="en-US" dirty="0"/>
+          </a:p>
+        </p:txBody>
+      </p:sp>
+      <p:sp>
+        <p:nvSpPr>
+          <p:cNvPr id="4" name="Slide Number Placeholder 3"/>
+          <p:cNvSpPr>
+            <a:spLocks noGrp="1"/>
+          </p:cNvSpPr>
+          <p:nvPr>
+            <p:ph type="sldNum" sz="quarter" idx="10"/>
+          </p:nvPr>
+        </p:nvSpPr>
+        <p:spPr/>
+        <p:txBody>
+          <a:bodyPr/>
+          <a:lstStyle/>
+          <a:p>
+            <a:fld id="{F7021451-1387-4CA6-816F-3879F97B5CBC}" type="slidenum">
+              <a:rPr lang="en-US"/>
+              <a:t>13</a:t>
+            </a:fld>
+            <a:endParaRPr lang="en-US"/>
+          </a:p>
+        </p:txBody>
+      </p:sp>
+    </p:spTree>
+    <p:extLst>
+      <p:ext uri="{BB962C8B-B14F-4D97-AF65-F5344CB8AC3E}">
+        <p14:creationId xmlns:p14="http://schemas.microsoft.com/office/powerpoint/2010/main" val="1024086991"/>
+      </p:ext>
+    </p:extLst>
+  </p:cSld>
+  <p:clrMapOvr>
+    <a:masterClrMapping/>
+  </p:clrMapOvr>
+</p:notes>
+</file>
+
+<file path=ppt/notesSlides/notesSlide14.xml><?xml version="1.0" encoding="utf-8"?>
+<p:notes xmlns:a="http://schemas.openxmlformats.org/drawingml/2006/main" xmlns:r="http://schemas.openxmlformats.org/officeDocument/2006/relationships" xmlns:p="http://schemas.openxmlformats.org/presentationml/2006/main">
+  <p:cSld>
+    <p:spTree>
+      <p:nvGrpSpPr>
+        <p:cNvPr id="1" name=""/>
+        <p:cNvGrpSpPr/>
+        <p:nvPr/>
+      </p:nvGrpSpPr>
+      <p:grpSpPr>
+        <a:xfrm>
+          <a:off x="0" y="0"/>
+          <a:ext cx="0" cy="0"/>
+          <a:chOff x="0" y="0"/>
+          <a:chExt cx="0" cy="0"/>
+        </a:xfrm>
+      </p:grpSpPr>
+      <p:sp>
+        <p:nvSpPr>
+          <p:cNvPr id="2" name="Slide Image Placeholder 1"/>
+          <p:cNvSpPr>
+            <a:spLocks noGrp="1" noRot="1" noChangeAspect="1"/>
+          </p:cNvSpPr>
+          <p:nvPr>
+            <p:ph type="sldImg"/>
+          </p:nvPr>
+        </p:nvSpPr>
+        <p:spPr/>
+      </p:sp>
+      <p:sp>
+        <p:nvSpPr>
+          <p:cNvPr id="3" name="Notes Placeholder 2"/>
+          <p:cNvSpPr>
+            <a:spLocks noGrp="1"/>
+          </p:cNvSpPr>
+          <p:nvPr>
+            <p:ph type="body" idx="1"/>
+          </p:nvPr>
+        </p:nvSpPr>
+        <p:spPr/>
+        <p:txBody>
+          <a:bodyPr/>
+          <a:lstStyle/>
+          <a:p>
+            <a:r>
+              <a:rPr lang="en-US" dirty="0"/>
+              <a:t/>
+            </a:r>
+            <a:endParaRPr lang="en-US" dirty="0"/>
+          </a:p>
+        </p:txBody>
+      </p:sp>
+      <p:sp>
+        <p:nvSpPr>
+          <p:cNvPr id="4" name="Slide Number Placeholder 3"/>
+          <p:cNvSpPr>
+            <a:spLocks noGrp="1"/>
+          </p:cNvSpPr>
+          <p:nvPr>
+            <p:ph type="sldNum" sz="quarter" idx="10"/>
+          </p:nvPr>
+        </p:nvSpPr>
+        <p:spPr/>
+        <p:txBody>
+          <a:bodyPr/>
+          <a:lstStyle/>
+          <a:p>
+            <a:fld id="{F7021451-1387-4CA6-816F-3879F97B5CBC}" type="slidenum">
+              <a:rPr lang="en-US"/>
+              <a:t>14</a:t>
+            </a:fld>
+            <a:endParaRPr lang="en-US"/>
+          </a:p>
+        </p:txBody>
+      </p:sp>
+    </p:spTree>
+    <p:extLst>
+      <p:ext uri="{BB962C8B-B14F-4D97-AF65-F5344CB8AC3E}">
+        <p14:creationId xmlns:p14="http://schemas.microsoft.com/office/powerpoint/2010/main" val="1024086991"/>
+      </p:ext>
+    </p:extLst>
+  </p:cSld>
+  <p:clrMapOvr>
+    <a:masterClrMapping/>
+  </p:clrMapOvr>
+</p:notes>
+</file>
+
+<file path=ppt/notesSlides/notesSlide15.xml><?xml version="1.0" encoding="utf-8"?>
+<p:notes xmlns:a="http://schemas.openxmlformats.org/drawingml/2006/main" xmlns:r="http://schemas.openxmlformats.org/officeDocument/2006/relationships" xmlns:p="http://schemas.openxmlformats.org/presentationml/2006/main">
+  <p:cSld>
+    <p:spTree>
+      <p:nvGrpSpPr>
+        <p:cNvPr id="1" name=""/>
+        <p:cNvGrpSpPr/>
+        <p:nvPr/>
+      </p:nvGrpSpPr>
+      <p:grpSpPr>
+        <a:xfrm>
+          <a:off x="0" y="0"/>
+          <a:ext cx="0" cy="0"/>
+          <a:chOff x="0" y="0"/>
+          <a:chExt cx="0" cy="0"/>
+        </a:xfrm>
+      </p:grpSpPr>
+      <p:sp>
+        <p:nvSpPr>
+          <p:cNvPr id="2" name="Slide Image Placeholder 1"/>
+          <p:cNvSpPr>
+            <a:spLocks noGrp="1" noRot="1" noChangeAspect="1"/>
+          </p:cNvSpPr>
+          <p:nvPr>
+            <p:ph type="sldImg"/>
+          </p:nvPr>
+        </p:nvSpPr>
+        <p:spPr/>
+      </p:sp>
+      <p:sp>
+        <p:nvSpPr>
+          <p:cNvPr id="3" name="Notes Placeholder 2"/>
+          <p:cNvSpPr>
+            <a:spLocks noGrp="1"/>
+          </p:cNvSpPr>
+          <p:nvPr>
+            <p:ph type="body" idx="1"/>
+          </p:nvPr>
+        </p:nvSpPr>
+        <p:spPr/>
+        <p:txBody>
+          <a:bodyPr/>
+          <a:lstStyle/>
+          <a:p>
+            <a:r>
+              <a:rPr lang="en-US" dirty="0"/>
+              <a:t/>
+            </a:r>
+            <a:endParaRPr lang="en-US" dirty="0"/>
+          </a:p>
+        </p:txBody>
+      </p:sp>
+      <p:sp>
+        <p:nvSpPr>
+          <p:cNvPr id="4" name="Slide Number Placeholder 3"/>
+          <p:cNvSpPr>
+            <a:spLocks noGrp="1"/>
+          </p:cNvSpPr>
+          <p:nvPr>
+            <p:ph type="sldNum" sz="quarter" idx="10"/>
+          </p:nvPr>
+        </p:nvSpPr>
+        <p:spPr/>
+        <p:txBody>
+          <a:bodyPr/>
+          <a:lstStyle/>
+          <a:p>
+            <a:fld id="{F7021451-1387-4CA6-816F-3879F97B5CBC}" type="slidenum">
+              <a:rPr lang="en-US"/>
+              <a:t>15</a:t>
+            </a:fld>
+            <a:endParaRPr lang="en-US"/>
+          </a:p>
+        </p:txBody>
+      </p:sp>
+    </p:spTree>
+    <p:extLst>
+      <p:ext uri="{BB962C8B-B14F-4D97-AF65-F5344CB8AC3E}">
+        <p14:creationId xmlns:p14="http://schemas.microsoft.com/office/powerpoint/2010/main" val="1024086991"/>
+      </p:ext>
+    </p:extLst>
+  </p:cSld>
+  <p:clrMapOvr>
+    <a:masterClrMapping/>
+  </p:clrMapOvr>
+</p:notes>
+</file>
+
+<file path=ppt/notesSlides/notesSlide16.xml><?xml version="1.0" encoding="utf-8"?>
+<p:notes xmlns:a="http://schemas.openxmlformats.org/drawingml/2006/main" xmlns:r="http://schemas.openxmlformats.org/officeDocument/2006/relationships" xmlns:p="http://schemas.openxmlformats.org/presentationml/2006/main">
+  <p:cSld>
+    <p:spTree>
+      <p:nvGrpSpPr>
+        <p:cNvPr id="1" name=""/>
+        <p:cNvGrpSpPr/>
+        <p:nvPr/>
+      </p:nvGrpSpPr>
+      <p:grpSpPr>
+        <a:xfrm>
+          <a:off x="0" y="0"/>
+          <a:ext cx="0" cy="0"/>
+          <a:chOff x="0" y="0"/>
+          <a:chExt cx="0" cy="0"/>
+        </a:xfrm>
+      </p:grpSpPr>
+      <p:sp>
+        <p:nvSpPr>
+          <p:cNvPr id="2" name="Slide Image Placeholder 1"/>
+          <p:cNvSpPr>
+            <a:spLocks noGrp="1" noRot="1" noChangeAspect="1"/>
+          </p:cNvSpPr>
+          <p:nvPr>
+            <p:ph type="sldImg"/>
+          </p:nvPr>
+        </p:nvSpPr>
+        <p:spPr/>
+      </p:sp>
+      <p:sp>
+        <p:nvSpPr>
+          <p:cNvPr id="3" name="Notes Placeholder 2"/>
+          <p:cNvSpPr>
+            <a:spLocks noGrp="1"/>
+          </p:cNvSpPr>
+          <p:nvPr>
+            <p:ph type="body" idx="1"/>
+          </p:nvPr>
+        </p:nvSpPr>
+        <p:spPr/>
+        <p:txBody>
+          <a:bodyPr/>
+          <a:lstStyle/>
+          <a:p>
+            <a:r>
+              <a:rPr lang="en-US" dirty="0"/>
+              <a:t/>
+            </a:r>
+            <a:endParaRPr lang="en-US" dirty="0"/>
+          </a:p>
+        </p:txBody>
+      </p:sp>
+      <p:sp>
+        <p:nvSpPr>
+          <p:cNvPr id="4" name="Slide Number Placeholder 3"/>
+          <p:cNvSpPr>
+            <a:spLocks noGrp="1"/>
+          </p:cNvSpPr>
+          <p:nvPr>
+            <p:ph type="sldNum" sz="quarter" idx="10"/>
+          </p:nvPr>
+        </p:nvSpPr>
+        <p:spPr/>
+        <p:txBody>
+          <a:bodyPr/>
+          <a:lstStyle/>
+          <a:p>
+            <a:fld id="{F7021451-1387-4CA6-816F-3879F97B5CBC}" type="slidenum">
+              <a:rPr lang="en-US"/>
+              <a:t>16</a:t>
+            </a:fld>
+            <a:endParaRPr lang="en-US"/>
+          </a:p>
+        </p:txBody>
+      </p:sp>
+    </p:spTree>
+    <p:extLst>
+      <p:ext uri="{BB962C8B-B14F-4D97-AF65-F5344CB8AC3E}">
+        <p14:creationId xmlns:p14="http://schemas.microsoft.com/office/powerpoint/2010/main" val="1024086991"/>
+      </p:ext>
+    </p:extLst>
+  </p:cSld>
+  <p:clrMapOvr>
+    <a:masterClrMapping/>
+  </p:clrMapOvr>
+</p:notes>
+</file>
+
+<file path=ppt/notesSlides/notesSlide17.xml><?xml version="1.0" encoding="utf-8"?>
+<p:notes xmlns:a="http://schemas.openxmlformats.org/drawingml/2006/main" xmlns:r="http://schemas.openxmlformats.org/officeDocument/2006/relationships" xmlns:p="http://schemas.openxmlformats.org/presentationml/2006/main">
+  <p:cSld>
+    <p:spTree>
+      <p:nvGrpSpPr>
+        <p:cNvPr id="1" name=""/>
+        <p:cNvGrpSpPr/>
+        <p:nvPr/>
+      </p:nvGrpSpPr>
+      <p:grpSpPr>
+        <a:xfrm>
+          <a:off x="0" y="0"/>
+          <a:ext cx="0" cy="0"/>
+          <a:chOff x="0" y="0"/>
+          <a:chExt cx="0" cy="0"/>
+        </a:xfrm>
+      </p:grpSpPr>
+      <p:sp>
+        <p:nvSpPr>
+          <p:cNvPr id="2" name="Slide Image Placeholder 1"/>
+          <p:cNvSpPr>
+            <a:spLocks noGrp="1" noRot="1" noChangeAspect="1"/>
+          </p:cNvSpPr>
+          <p:nvPr>
+            <p:ph type="sldImg"/>
+          </p:nvPr>
+        </p:nvSpPr>
+        <p:spPr/>
+      </p:sp>
+      <p:sp>
+        <p:nvSpPr>
+          <p:cNvPr id="3" name="Notes Placeholder 2"/>
+          <p:cNvSpPr>
+            <a:spLocks noGrp="1"/>
+          </p:cNvSpPr>
+          <p:nvPr>
+            <p:ph type="body" idx="1"/>
+          </p:nvPr>
+        </p:nvSpPr>
+        <p:spPr/>
+        <p:txBody>
+          <a:bodyPr/>
+          <a:lstStyle/>
+          <a:p>
+            <a:r>
+              <a:rPr lang="en-US" dirty="0"/>
+              <a:t/>
+            </a:r>
+            <a:endParaRPr lang="en-US" dirty="0"/>
+          </a:p>
+        </p:txBody>
+      </p:sp>
+      <p:sp>
+        <p:nvSpPr>
+          <p:cNvPr id="4" name="Slide Number Placeholder 3"/>
+          <p:cNvSpPr>
+            <a:spLocks noGrp="1"/>
+          </p:cNvSpPr>
+          <p:nvPr>
+            <p:ph type="sldNum" sz="quarter" idx="10"/>
+          </p:nvPr>
+        </p:nvSpPr>
+        <p:spPr/>
+        <p:txBody>
+          <a:bodyPr/>
+          <a:lstStyle/>
+          <a:p>
+            <a:fld id="{F7021451-1387-4CA6-816F-3879F97B5CBC}" type="slidenum">
+              <a:rPr lang="en-US"/>
+              <a:t>17</a:t>
+            </a:fld>
+            <a:endParaRPr lang="en-US"/>
+          </a:p>
+        </p:txBody>
+      </p:sp>
+    </p:spTree>
+    <p:extLst>
+      <p:ext uri="{BB962C8B-B14F-4D97-AF65-F5344CB8AC3E}">
+        <p14:creationId xmlns:p14="http://schemas.microsoft.com/office/powerpoint/2010/main" val="1024086991"/>
+      </p:ext>
+    </p:extLst>
+  </p:cSld>
+  <p:clrMapOvr>
+    <a:masterClrMapping/>
+  </p:clrMapOvr>
+</p:notes>
+</file>
+
+<file path=ppt/notesSlides/notesSlide18.xml><?xml version="1.0" encoding="utf-8"?>
+<p:notes xmlns:a="http://schemas.openxmlformats.org/drawingml/2006/main" xmlns:r="http://schemas.openxmlformats.org/officeDocument/2006/relationships" xmlns:p="http://schemas.openxmlformats.org/presentationml/2006/main">
+  <p:cSld>
+    <p:spTree>
+      <p:nvGrpSpPr>
+        <p:cNvPr id="1" name=""/>
+        <p:cNvGrpSpPr/>
+        <p:nvPr/>
+      </p:nvGrpSpPr>
+      <p:grpSpPr>
+        <a:xfrm>
+          <a:off x="0" y="0"/>
+          <a:ext cx="0" cy="0"/>
+          <a:chOff x="0" y="0"/>
+          <a:chExt cx="0" cy="0"/>
+        </a:xfrm>
+      </p:grpSpPr>
+      <p:sp>
+        <p:nvSpPr>
+          <p:cNvPr id="2" name="Slide Image Placeholder 1"/>
+          <p:cNvSpPr>
+            <a:spLocks noGrp="1" noRot="1" noChangeAspect="1"/>
+          </p:cNvSpPr>
+          <p:nvPr>
+            <p:ph type="sldImg"/>
+          </p:nvPr>
+        </p:nvSpPr>
+        <p:spPr/>
+      </p:sp>
+      <p:sp>
+        <p:nvSpPr>
+          <p:cNvPr id="3" name="Notes Placeholder 2"/>
+          <p:cNvSpPr>
+            <a:spLocks noGrp="1"/>
+          </p:cNvSpPr>
+          <p:nvPr>
+            <p:ph type="body" idx="1"/>
+          </p:nvPr>
+        </p:nvSpPr>
+        <p:spPr/>
+        <p:txBody>
+          <a:bodyPr/>
+          <a:lstStyle/>
+          <a:p>
+            <a:r>
+              <a:rPr lang="en-US" dirty="0"/>
+              <a:t/>
+            </a:r>
+            <a:endParaRPr lang="en-US" dirty="0"/>
+          </a:p>
+        </p:txBody>
+      </p:sp>
+      <p:sp>
+        <p:nvSpPr>
+          <p:cNvPr id="4" name="Slide Number Placeholder 3"/>
+          <p:cNvSpPr>
+            <a:spLocks noGrp="1"/>
+          </p:cNvSpPr>
+          <p:nvPr>
+            <p:ph type="sldNum" sz="quarter" idx="10"/>
+          </p:nvPr>
+        </p:nvSpPr>
+        <p:spPr/>
+        <p:txBody>
+          <a:bodyPr/>
+          <a:lstStyle/>
+          <a:p>
+            <a:fld id="{F7021451-1387-4CA6-816F-3879F97B5CBC}" type="slidenum">
+              <a:rPr lang="en-US"/>
+              <a:t>18</a:t>
             </a:fld>
             <a:endParaRPr lang="en-US"/>
           </a:p>
@@ -2100,148 +2634,6 @@
         </p:nvSpPr>
         <p:spPr>
           <a:xfrm>
-            <a:off x="406301" y="1574453"/>
-            <a:ext cx="8498026" cy="274290"/>
-          </a:xfrm>
-          <a:prstGeom prst="rect">
-            <a:avLst/>
-          </a:prstGeom>
-          <a:noFill/>
-          <a:ln/>
-        </p:spPr>
-        <p:txBody>
-          <a:bodyPr wrap="square" lIns="0" tIns="0" rIns="0" bIns="0" rtlCol="0" anchor="t"/>
-          <a:lstStyle/>
-          <a:p>
-            <a:pPr algn="l" indent="0" marL="0">
-              <a:lnSpc>
-                <a:spcPts val="2160"/>
-              </a:lnSpc>
-              <a:spcBef>
-                <a:spcPts val="600"/>
-              </a:spcBef>
-              <a:spcAft>
-                <a:spcPts val="800"/>
-              </a:spcAft>
-              <a:buNone/>
-            </a:pPr>
-            <a:r>
-              <a:rPr lang="en-US" sz="1800" b="1" dirty="0">
-                <a:solidFill>
-                  <a:srgbClr val="FE4447"/>
-                </a:solidFill>
-                <a:latin typeface="Georgia" pitchFamily="34" charset="0"/>
-                <a:ea typeface="Georgia" pitchFamily="34" charset="-122"/>
-                <a:cs typeface="Georgia" pitchFamily="34" charset="-120"/>
-              </a:rPr>
-              <a:t>Learning objective</a:t>
-            </a:r>
-            <a:endParaRPr lang="en-US" sz="1800" dirty="0"/>
-          </a:p>
-        </p:txBody>
-      </p:sp>
-      <p:sp>
-        <p:nvSpPr>
-          <p:cNvPr id="6" name="Text 4"/>
-          <p:cNvSpPr/>
-          <p:nvPr/>
-        </p:nvSpPr>
-        <p:spPr>
-          <a:xfrm>
-            <a:off x="406301" y="1988344"/>
-            <a:ext cx="8498026" cy="426541"/>
-          </a:xfrm>
-          <a:prstGeom prst="rect">
-            <a:avLst/>
-          </a:prstGeom>
-          <a:noFill/>
-          <a:ln/>
-        </p:spPr>
-        <p:txBody>
-          <a:bodyPr wrap="square" lIns="0" tIns="0" rIns="0" bIns="0" rtlCol="0" anchor="t"/>
-          <a:lstStyle/>
-          <a:p>
-            <a:pPr algn="l" indent="0" marL="0">
-              <a:lnSpc>
-                <a:spcPts val="1680"/>
-              </a:lnSpc>
-              <a:spcBef>
-                <a:spcPts val="300"/>
-              </a:spcBef>
-              <a:spcAft>
-                <a:spcPts val="300"/>
-              </a:spcAft>
-              <a:buNone/>
-            </a:pPr>
-            <a:r>
-              <a:rPr lang="en-US" sz="1200" dirty="0">
-                <a:solidFill>
-                  <a:srgbClr val="1C2833"/>
-                </a:solidFill>
-                <a:latin typeface="Arial" pitchFamily="34" charset="0"/>
-                <a:ea typeface="Arial" pitchFamily="34" charset="-122"/>
-                <a:cs typeface="Arial" pitchFamily="34" charset="-120"/>
-              </a:rPr>
-              <a:t>By the end of this session, every pair has a presentation-ready </a:t>
-            </a:r>
-            <a:pPr algn="l" indent="0" marL="0">
-              <a:lnSpc>
-                <a:spcPts val="1680"/>
-              </a:lnSpc>
-              <a:spcBef>
-                <a:spcPts val="300"/>
-              </a:spcBef>
-              <a:spcAft>
-                <a:spcPts val="300"/>
-              </a:spcAft>
-              <a:buNone/>
-            </a:pPr>
-            <a:r>
-              <a:rPr lang="en-US" sz="1200" i="1" dirty="0">
-                <a:solidFill>
-                  <a:srgbClr val="1C2833"/>
-                </a:solidFill>
-                <a:latin typeface="Arial" pitchFamily="34" charset="0"/>
-                <a:ea typeface="Arial" pitchFamily="34" charset="-122"/>
-                <a:cs typeface="Arial" pitchFamily="34" charset="-120"/>
-              </a:rPr>
-              <a:t>rāśi</a:t>
-            </a:r>
-            <a:pPr algn="l" indent="0" marL="0">
-              <a:lnSpc>
-                <a:spcPts val="1680"/>
-              </a:lnSpc>
-              <a:spcBef>
-                <a:spcPts val="300"/>
-              </a:spcBef>
-              <a:spcAft>
-                <a:spcPts val="300"/>
-              </a:spcAft>
-              <a:buNone/>
-            </a:pPr>
-            <a:r>
-              <a:rPr lang="en-US" sz="1200" dirty="0">
-                <a:solidFill>
-                  <a:srgbClr val="1C2833"/>
-                </a:solidFill>
-                <a:latin typeface="Arial" pitchFamily="34" charset="0"/>
-                <a:ea typeface="Arial" pitchFamily="34" charset="-122"/>
-                <a:cs typeface="Arial" pitchFamily="34" charset="-120"/>
-              </a:rPr>
-              <a:t>-wheel including a cross-cultural comparison element (Greek / Babylonian / Gregorian) and a rehearsed 3-minute presentation script.</a:t>
-            </a:r>
-            <a:endParaRPr lang="en-US" sz="1200" dirty="0"/>
-          </a:p>
-        </p:txBody>
-      </p:sp>
-      <p:sp>
-        <p:nvSpPr>
-          <p:cNvPr id="7" name="Text 5"/>
-          <p:cNvSpPr/>
-          <p:nvPr/>
-        </p:nvSpPr>
-        <p:spPr>
-          <a:xfrm>
             <a:off x="406301" y="4434929"/>
             <a:ext cx="8498026" cy="213271"/>
           </a:xfrm>
@@ -2386,7 +2778,7 @@
                 <a:ea typeface="Georgia" pitchFamily="34" charset="-122"/>
                 <a:cs typeface="Georgia" pitchFamily="34" charset="-120"/>
               </a:rPr>
-              <a:t>Differentiation</a:t>
+              <a:t>Warm-up (5 min)</a:t>
             </a:r>
             <a:endParaRPr lang="en-US" sz="1800" dirty="0"/>
           </a:p>
@@ -2401,7 +2793,7 @@
         <p:spPr>
           <a:xfrm>
             <a:off x="634901" y="883593"/>
-            <a:ext cx="8102798" cy="1142702"/>
+            <a:ext cx="8102798" cy="975122"/>
           </a:xfrm>
           <a:prstGeom prst="rect">
             <a:avLst/>
@@ -2424,115 +2816,15 @@
               <a:buChar char="•"/>
             </a:pPr>
             <a:r>
-              <a:rPr lang="en-US" sz="1200" b="1" dirty="0">
-                <a:solidFill>
-                  <a:srgbClr val="1C2833"/>
-                </a:solidFill>
-                <a:latin typeface="Arial" pitchFamily="34" charset="0"/>
-                <a:ea typeface="Arial" pitchFamily="34" charset="-122"/>
-                <a:cs typeface="Arial" pitchFamily="34" charset="-120"/>
-              </a:rPr>
-              <a:t>One tier up:</a:t>
-            </a:r>
-            <a:pPr algn="l" indent="0" marL="0">
-              <a:lnSpc>
-                <a:spcPts val="1620"/>
-              </a:lnSpc>
-              <a:spcAft>
-                <a:spcPts val="300"/>
-              </a:spcAft>
-              <a:buNone/>
-            </a:pPr>
-            <a:r>
-              <a:rPr lang="en-US" sz="1200" dirty="0">
-                <a:solidFill>
-                  <a:srgbClr val="1C2833"/>
-                </a:solidFill>
-                <a:latin typeface="Arial" pitchFamily="34" charset="0"/>
-                <a:ea typeface="Arial" pitchFamily="34" charset="-122"/>
-                <a:cs typeface="Arial" pitchFamily="34" charset="-120"/>
-              </a:rPr>
-              <a:t> Each pair preparing a "stretch" closer: a 30-second factoid the audience will remember (e.g. "Precession means in ~13,000 years, the December solstice will be in </a:t>
-            </a:r>
-            <a:pPr algn="l" indent="0" marL="0">
-              <a:lnSpc>
-                <a:spcPts val="1620"/>
-              </a:lnSpc>
-              <a:spcAft>
-                <a:spcPts val="300"/>
-              </a:spcAft>
-              <a:buNone/>
-            </a:pPr>
-            <a:r>
-              <a:rPr lang="en-US" sz="1200" i="1" dirty="0">
-                <a:solidFill>
-                  <a:srgbClr val="1C2833"/>
-                </a:solidFill>
-                <a:latin typeface="Arial" pitchFamily="34" charset="0"/>
-                <a:ea typeface="Arial" pitchFamily="34" charset="-122"/>
-                <a:cs typeface="Arial" pitchFamily="34" charset="-120"/>
-              </a:rPr>
-              <a:t>Karka</a:t>
-            </a:r>
-            <a:pPr algn="l" indent="0" marL="0">
-              <a:lnSpc>
-                <a:spcPts val="1620"/>
-              </a:lnSpc>
-              <a:spcAft>
-                <a:spcPts val="300"/>
-              </a:spcAft>
-              <a:buNone/>
-            </a:pPr>
-            <a:r>
-              <a:rPr lang="en-US" sz="1200" dirty="0">
-                <a:solidFill>
-                  <a:srgbClr val="1C2833"/>
-                </a:solidFill>
-                <a:latin typeface="Arial" pitchFamily="34" charset="0"/>
-                <a:ea typeface="Arial" pitchFamily="34" charset="-122"/>
-                <a:cs typeface="Arial" pitchFamily="34" charset="-120"/>
-              </a:rPr>
-              <a:t>, not </a:t>
-            </a:r>
-            <a:pPr algn="l" indent="0" marL="0">
-              <a:lnSpc>
-                <a:spcPts val="1620"/>
-              </a:lnSpc>
-              <a:spcAft>
-                <a:spcPts val="300"/>
-              </a:spcAft>
-              <a:buNone/>
-            </a:pPr>
-            <a:r>
-              <a:rPr lang="en-US" sz="1200" i="1" dirty="0">
-                <a:solidFill>
-                  <a:srgbClr val="1C2833"/>
-                </a:solidFill>
-                <a:latin typeface="Arial" pitchFamily="34" charset="0"/>
-                <a:ea typeface="Arial" pitchFamily="34" charset="-122"/>
-                <a:cs typeface="Arial" pitchFamily="34" charset="-120"/>
-              </a:rPr>
-              <a:t>Makara</a:t>
-            </a:r>
-            <a:pPr algn="l" indent="0" marL="0">
-              <a:lnSpc>
-                <a:spcPts val="1620"/>
-              </a:lnSpc>
-              <a:spcAft>
-                <a:spcPts val="300"/>
-              </a:spcAft>
-              <a:buNone/>
-            </a:pPr>
-            <a:r>
-              <a:rPr lang="en-US" sz="1200" dirty="0">
-                <a:solidFill>
-                  <a:srgbClr val="1C2833"/>
-                </a:solidFill>
-                <a:latin typeface="Arial" pitchFamily="34" charset="0"/>
-                <a:ea typeface="Arial" pitchFamily="34" charset="-122"/>
-                <a:cs typeface="Arial" pitchFamily="34" charset="-120"/>
-              </a:rPr>
-              <a:t>"). Confirm the factoid is astronomically accurate before they include it.</a:t>
+              <a:rPr lang="en-US" sz="1200" dirty="0">
+                <a:solidFill>
+                  <a:srgbClr val="1C2833"/>
+                </a:solidFill>
+                <a:latin typeface="Arial" pitchFamily="34" charset="0"/>
+                <a:ea typeface="Arial" pitchFamily="34" charset="-122"/>
+                <a:cs typeface="Arial" pitchFamily="34" charset="-120"/>
+              </a:rPr>
+              <a:t>Project the cross-cultural table on the board. Take 30 seconds to let students absorb.</a:t>
             </a:r>
             <a:endParaRPr lang="en-US" sz="1200" dirty="0"/>
           </a:p>
@@ -2548,35 +2840,79 @@
               <a:buChar char="•"/>
             </a:pPr>
             <a:r>
-              <a:rPr lang="en-US" sz="1200" b="1" dirty="0">
-                <a:solidFill>
-                  <a:srgbClr val="1C2833"/>
-                </a:solidFill>
-                <a:latin typeface="Arial" pitchFamily="34" charset="0"/>
-                <a:ea typeface="Arial" pitchFamily="34" charset="-122"/>
-                <a:cs typeface="Arial" pitchFamily="34" charset="-120"/>
-              </a:rPr>
-              <a:t>One tier down:</a:t>
-            </a:r>
-            <a:pPr algn="l" indent="0" marL="0">
-              <a:lnSpc>
-                <a:spcPts val="1620"/>
-              </a:lnSpc>
-              <a:spcAft>
-                <a:spcPts val="300"/>
-              </a:spcAft>
-              <a:buNone/>
-            </a:pPr>
-            <a:r>
-              <a:rPr lang="en-US" sz="1200" dirty="0">
-                <a:solidFill>
-                  <a:srgbClr val="1C2833"/>
-                </a:solidFill>
-                <a:latin typeface="Arial" pitchFamily="34" charset="0"/>
-                <a:ea typeface="Arial" pitchFamily="34" charset="-122"/>
-                <a:cs typeface="Arial" pitchFamily="34" charset="-120"/>
-              </a:rPr>
-              <a:t> Skip the Babylonian table; just mention "the zodiac is shared between India, Greece, and the older Babylonian tradition." That's enough for a "Meets" presentation.</a:t>
+              <a:rPr lang="en-US" sz="1200" dirty="0">
+                <a:solidFill>
+                  <a:srgbClr val="1C2833"/>
+                </a:solidFill>
+                <a:latin typeface="Arial" pitchFamily="34" charset="0"/>
+                <a:ea typeface="Arial" pitchFamily="34" charset="-122"/>
+                <a:cs typeface="Arial" pitchFamily="34" charset="-120"/>
+              </a:rPr>
+              <a:t>Prompt: </a:t>
+            </a:r>
+            <a:pPr algn="l" indent="0" marL="0">
+              <a:lnSpc>
+                <a:spcPts val="1620"/>
+              </a:lnSpc>
+              <a:spcAft>
+                <a:spcPts val="300"/>
+              </a:spcAft>
+              <a:buNone/>
+            </a:pPr>
+            <a:r>
+              <a:rPr lang="en-US" sz="1200" i="1" dirty="0">
+                <a:solidFill>
+                  <a:srgbClr val="1C2833"/>
+                </a:solidFill>
+                <a:latin typeface="Arial" pitchFamily="34" charset="0"/>
+                <a:ea typeface="Arial" pitchFamily="34" charset="-122"/>
+                <a:cs typeface="Arial" pitchFamily="34" charset="-120"/>
+              </a:rPr>
+              <a:t>"What patterns do you see?"</a:t>
+            </a:r>
+            <a:pPr algn="l" indent="0" marL="0">
+              <a:lnSpc>
+                <a:spcPts val="1620"/>
+              </a:lnSpc>
+              <a:spcAft>
+                <a:spcPts val="300"/>
+              </a:spcAft>
+              <a:buNone/>
+            </a:pPr>
+            <a:r>
+              <a:rPr lang="en-US" sz="1200" dirty="0">
+                <a:solidFill>
+                  <a:srgbClr val="1C2833"/>
+                </a:solidFill>
+                <a:latin typeface="Arial" pitchFamily="34" charset="0"/>
+                <a:ea typeface="Arial" pitchFamily="34" charset="-122"/>
+                <a:cs typeface="Arial" pitchFamily="34" charset="-120"/>
+              </a:rPr>
+              <a:t> — collect 2 observations.</a:t>
+            </a:r>
+            <a:endParaRPr lang="en-US" sz="1200" dirty="0"/>
+          </a:p>
+          <a:p>
+            <a:pPr algn="l" marL="342900" indent="-342900">
+              <a:lnSpc>
+                <a:spcPts val="1620"/>
+              </a:lnSpc>
+              <a:spcAft>
+                <a:spcPts val="300"/>
+              </a:spcAft>
+              <a:buSzPct val="100000"/>
+              <a:buChar char="•"/>
+            </a:pPr>
+            <a:r>
+              <a:rPr lang="en-US" sz="1200" dirty="0">
+                <a:solidFill>
+                  <a:srgbClr val="1C2833"/>
+                </a:solidFill>
+                <a:latin typeface="Arial" pitchFamily="34" charset="0"/>
+                <a:ea typeface="Arial" pitchFamily="34" charset="-122"/>
+                <a:cs typeface="Arial" pitchFamily="34" charset="-120"/>
+              </a:rPr>
+              <a:t>Likely observation: "they're all about the same animals." Confirm: yes — and this is a real historical clue about cultural exchange.</a:t>
             </a:r>
             <a:endParaRPr lang="en-US" sz="1200" dirty="0"/>
           </a:p>
@@ -2734,7 +3070,7 @@
                 <a:ea typeface="Georgia" pitchFamily="34" charset="-122"/>
                 <a:cs typeface="Georgia" pitchFamily="34" charset="-120"/>
               </a:rPr>
-              <a:t>Teacher notes</a:t>
+              <a:t>Core (5 min)</a:t>
             </a:r>
             <a:endParaRPr lang="en-US" sz="1800" dirty="0"/>
           </a:p>
@@ -2748,8 +3084,8 @@
         </p:nvSpPr>
         <p:spPr>
           <a:xfrm>
-            <a:off x="406301" y="870942"/>
-            <a:ext cx="8498026" cy="1066354"/>
+            <a:off x="634901" y="883593"/>
+            <a:ext cx="8102798" cy="1874044"/>
           </a:xfrm>
           <a:prstGeom prst="rect">
             <a:avLst/>
@@ -2761,28 +3097,362 @@
           <a:bodyPr wrap="square" lIns="0" tIns="0" rIns="0" bIns="0" rtlCol="0" anchor="t"/>
           <a:lstStyle/>
           <a:p>
-            <a:pPr algn="l" indent="0" marL="0">
-              <a:lnSpc>
-                <a:spcPts val="1680"/>
-              </a:lnSpc>
-              <a:spcBef>
-                <a:spcPts val="300"/>
-              </a:spcBef>
-              <a:spcAft>
-                <a:spcPts val="300"/>
-              </a:spcAft>
-              <a:buNone/>
-            </a:pPr>
-            <a:r>
-              <a:rPr lang="en-US" sz="1200" dirty="0">
-                <a:solidFill>
-                  <a:srgbClr val="1C2833"/>
-                </a:solidFill>
-                <a:latin typeface="Arial" pitchFamily="34" charset="0"/>
-                <a:ea typeface="Arial" pitchFamily="34" charset="-122"/>
-                <a:cs typeface="Arial" pitchFamily="34" charset="-120"/>
-              </a:rPr>
-              <a:t>– A small but real risk: a pair invents a Sanskrit etymology to "explain" a Greek name. Catch this — don't let invented etymology into a presentation. – The Babylonian names contain Akkadian / Sumerian cuneiform transliterations (LU.ḪUN.GÁ, etc.). Don't drill these — they're for visual comparison, not memorisation. – Lateness on the wheel is acceptable as long as the presentation is rehearsed. Better an unfinished but well-explained wheel than a beautiful unstructured one.</a:t>
+            <a:pPr algn="l" marL="342900" indent="-342900">
+              <a:lnSpc>
+                <a:spcPts val="1620"/>
+              </a:lnSpc>
+              <a:spcAft>
+                <a:spcPts val="300"/>
+              </a:spcAft>
+              <a:buSzPct val="100000"/>
+              <a:buChar char="•"/>
+            </a:pPr>
+            <a:r>
+              <a:rPr lang="en-US" sz="1200" dirty="0">
+                <a:solidFill>
+                  <a:srgbClr val="1C2833"/>
+                </a:solidFill>
+                <a:latin typeface="Arial" pitchFamily="34" charset="0"/>
+                <a:ea typeface="Arial" pitchFamily="34" charset="-122"/>
+                <a:cs typeface="Arial" pitchFamily="34" charset="-120"/>
+              </a:rPr>
+              <a:t>One-paragraph summary on the board:</a:t>
+            </a:r>
+            <a:endParaRPr lang="en-US" sz="1200" dirty="0"/>
+          </a:p>
+          <a:p>
+            <a:pPr algn="l" marL="342900" indent="-342900">
+              <a:lnSpc>
+                <a:spcPts val="1620"/>
+              </a:lnSpc>
+              <a:spcAft>
+                <a:spcPts val="300"/>
+              </a:spcAft>
+              <a:buSzPct val="100000"/>
+              <a:buChar char="•"/>
+            </a:pPr>
+            <a:r>
+              <a:rPr lang="en-US" sz="1200" dirty="0">
+                <a:solidFill>
+                  <a:srgbClr val="1C2833"/>
+                </a:solidFill>
+                <a:latin typeface="Arial" pitchFamily="34" charset="0"/>
+                <a:ea typeface="Arial" pitchFamily="34" charset="-122"/>
+                <a:cs typeface="Arial" pitchFamily="34" charset="-120"/>
+              </a:rPr>
+              <a:t>The 12-fold zodiac is a shared inheritance across Babylon, Greece, and India.</a:t>
+            </a:r>
+            <a:endParaRPr lang="en-US" sz="1200" dirty="0"/>
+          </a:p>
+          <a:p>
+            <a:pPr algn="l" marL="342900" indent="-342900">
+              <a:lnSpc>
+                <a:spcPts val="1620"/>
+              </a:lnSpc>
+              <a:spcAft>
+                <a:spcPts val="300"/>
+              </a:spcAft>
+              <a:buSzPct val="100000"/>
+              <a:buChar char="•"/>
+            </a:pPr>
+            <a:r>
+              <a:rPr lang="en-US" sz="1200" dirty="0">
+                <a:solidFill>
+                  <a:srgbClr val="1C2833"/>
+                </a:solidFill>
+                <a:latin typeface="Arial" pitchFamily="34" charset="0"/>
+                <a:ea typeface="Arial" pitchFamily="34" charset="-122"/>
+                <a:cs typeface="Arial" pitchFamily="34" charset="-120"/>
+              </a:rPr>
+              <a:t>Indian </a:t>
+            </a:r>
+            <a:pPr algn="l" indent="0" marL="0">
+              <a:lnSpc>
+                <a:spcPts val="1620"/>
+              </a:lnSpc>
+              <a:spcAft>
+                <a:spcPts val="300"/>
+              </a:spcAft>
+              <a:buNone/>
+            </a:pPr>
+            <a:r>
+              <a:rPr lang="en-US" sz="1200" i="1" dirty="0">
+                <a:solidFill>
+                  <a:srgbClr val="1C2833"/>
+                </a:solidFill>
+                <a:latin typeface="Arial" pitchFamily="34" charset="0"/>
+                <a:ea typeface="Arial" pitchFamily="34" charset="-122"/>
+                <a:cs typeface="Arial" pitchFamily="34" charset="-120"/>
+              </a:rPr>
+              <a:t>jyotiṣa</a:t>
+            </a:r>
+            <a:pPr algn="l" indent="0" marL="0">
+              <a:lnSpc>
+                <a:spcPts val="1620"/>
+              </a:lnSpc>
+              <a:spcAft>
+                <a:spcPts val="300"/>
+              </a:spcAft>
+              <a:buNone/>
+            </a:pPr>
+            <a:r>
+              <a:rPr lang="en-US" sz="1200" dirty="0">
+                <a:solidFill>
+                  <a:srgbClr val="1C2833"/>
+                </a:solidFill>
+                <a:latin typeface="Arial" pitchFamily="34" charset="0"/>
+                <a:ea typeface="Arial" pitchFamily="34" charset="-122"/>
+                <a:cs typeface="Arial" pitchFamily="34" charset="-120"/>
+              </a:rPr>
+              <a:t> layered this on top of the older 27-</a:t>
+            </a:r>
+            <a:pPr algn="l" indent="0" marL="0">
+              <a:lnSpc>
+                <a:spcPts val="1620"/>
+              </a:lnSpc>
+              <a:spcAft>
+                <a:spcPts val="300"/>
+              </a:spcAft>
+              <a:buNone/>
+            </a:pPr>
+            <a:r>
+              <a:rPr lang="en-US" sz="1200" i="1" dirty="0">
+                <a:solidFill>
+                  <a:srgbClr val="1C2833"/>
+                </a:solidFill>
+                <a:latin typeface="Arial" pitchFamily="34" charset="0"/>
+                <a:ea typeface="Arial" pitchFamily="34" charset="-122"/>
+                <a:cs typeface="Arial" pitchFamily="34" charset="-120"/>
+              </a:rPr>
+              <a:t>nakṣatra</a:t>
+            </a:r>
+            <a:pPr algn="l" indent="0" marL="0">
+              <a:lnSpc>
+                <a:spcPts val="1620"/>
+              </a:lnSpc>
+              <a:spcAft>
+                <a:spcPts val="300"/>
+              </a:spcAft>
+              <a:buNone/>
+            </a:pPr>
+            <a:r>
+              <a:rPr lang="en-US" sz="1200" dirty="0">
+                <a:solidFill>
+                  <a:srgbClr val="1C2833"/>
+                </a:solidFill>
+                <a:latin typeface="Arial" pitchFamily="34" charset="0"/>
+                <a:ea typeface="Arial" pitchFamily="34" charset="-122"/>
+                <a:cs typeface="Arial" pitchFamily="34" charset="-120"/>
+              </a:rPr>
+              <a:t> system.</a:t>
+            </a:r>
+            <a:endParaRPr lang="en-US" sz="1200" dirty="0"/>
+          </a:p>
+          <a:p>
+            <a:pPr algn="l" marL="342900" indent="-342900">
+              <a:lnSpc>
+                <a:spcPts val="1620"/>
+              </a:lnSpc>
+              <a:spcAft>
+                <a:spcPts val="300"/>
+              </a:spcAft>
+              <a:buSzPct val="100000"/>
+              <a:buChar char="•"/>
+            </a:pPr>
+            <a:r>
+              <a:rPr lang="en-US" sz="1200" dirty="0">
+                <a:solidFill>
+                  <a:srgbClr val="1C2833"/>
+                </a:solidFill>
+                <a:latin typeface="Arial" pitchFamily="34" charset="0"/>
+                <a:ea typeface="Arial" pitchFamily="34" charset="-122"/>
+                <a:cs typeface="Arial" pitchFamily="34" charset="-120"/>
+              </a:rPr>
+              <a:t>This means: when you study the </a:t>
+            </a:r>
+            <a:pPr algn="l" indent="0" marL="0">
+              <a:lnSpc>
+                <a:spcPts val="1620"/>
+              </a:lnSpc>
+              <a:spcAft>
+                <a:spcPts val="300"/>
+              </a:spcAft>
+              <a:buNone/>
+            </a:pPr>
+            <a:r>
+              <a:rPr lang="en-US" sz="1200" i="1" dirty="0">
+                <a:solidFill>
+                  <a:srgbClr val="1C2833"/>
+                </a:solidFill>
+                <a:latin typeface="Arial" pitchFamily="34" charset="0"/>
+                <a:ea typeface="Arial" pitchFamily="34" charset="-122"/>
+                <a:cs typeface="Arial" pitchFamily="34" charset="-120"/>
+              </a:rPr>
+              <a:t>rāśis</a:t>
+            </a:r>
+            <a:pPr algn="l" indent="0" marL="0">
+              <a:lnSpc>
+                <a:spcPts val="1620"/>
+              </a:lnSpc>
+              <a:spcAft>
+                <a:spcPts val="300"/>
+              </a:spcAft>
+              <a:buNone/>
+            </a:pPr>
+            <a:r>
+              <a:rPr lang="en-US" sz="1200" dirty="0">
+                <a:solidFill>
+                  <a:srgbClr val="1C2833"/>
+                </a:solidFill>
+                <a:latin typeface="Arial" pitchFamily="34" charset="0"/>
+                <a:ea typeface="Arial" pitchFamily="34" charset="-122"/>
+                <a:cs typeface="Arial" pitchFamily="34" charset="-120"/>
+              </a:rPr>
+              <a:t>, you are studying a 2700-year-old transcontinental mathematical-astronomical inheritance, not a purely Indian invention.</a:t>
+            </a:r>
+            <a:endParaRPr lang="en-US" sz="1200" dirty="0"/>
+          </a:p>
+          <a:p>
+            <a:pPr algn="l" marL="342900" indent="-342900">
+              <a:lnSpc>
+                <a:spcPts val="1620"/>
+              </a:lnSpc>
+              <a:spcAft>
+                <a:spcPts val="300"/>
+              </a:spcAft>
+              <a:buSzPct val="100000"/>
+              <a:buChar char="•"/>
+            </a:pPr>
+            <a:r>
+              <a:rPr lang="en-US" sz="1200" dirty="0">
+                <a:solidFill>
+                  <a:srgbClr val="1C2833"/>
+                </a:solidFill>
+                <a:latin typeface="Arial" pitchFamily="34" charset="0"/>
+                <a:ea typeface="Arial" pitchFamily="34" charset="-122"/>
+                <a:cs typeface="Arial" pitchFamily="34" charset="-120"/>
+              </a:rPr>
+              <a:t>This is </a:t>
+            </a:r>
+            <a:pPr algn="l" indent="0" marL="0">
+              <a:lnSpc>
+                <a:spcPts val="1620"/>
+              </a:lnSpc>
+              <a:spcAft>
+                <a:spcPts val="300"/>
+              </a:spcAft>
+              <a:buNone/>
+            </a:pPr>
+            <a:r>
+              <a:rPr lang="en-US" sz="1200" b="1" dirty="0">
+                <a:solidFill>
+                  <a:srgbClr val="1C2833"/>
+                </a:solidFill>
+                <a:latin typeface="Arial" pitchFamily="34" charset="0"/>
+                <a:ea typeface="Arial" pitchFamily="34" charset="-122"/>
+                <a:cs typeface="Arial" pitchFamily="34" charset="-120"/>
+              </a:rPr>
+              <a:t>not</a:t>
+            </a:r>
+            <a:pPr algn="l" indent="0" marL="0">
+              <a:lnSpc>
+                <a:spcPts val="1620"/>
+              </a:lnSpc>
+              <a:spcAft>
+                <a:spcPts val="300"/>
+              </a:spcAft>
+              <a:buNone/>
+            </a:pPr>
+            <a:r>
+              <a:rPr lang="en-US" sz="1200" dirty="0">
+                <a:solidFill>
+                  <a:srgbClr val="1C2833"/>
+                </a:solidFill>
+                <a:latin typeface="Arial" pitchFamily="34" charset="0"/>
+                <a:ea typeface="Arial" pitchFamily="34" charset="-122"/>
+                <a:cs typeface="Arial" pitchFamily="34" charset="-120"/>
+              </a:rPr>
+              <a:t> "Indians borrowed from the West" — Babylonian astronomy reached India before it reached Greece in some respects, and the Indian elaboration (the </a:t>
+            </a:r>
+            <a:pPr algn="l" indent="0" marL="0">
+              <a:lnSpc>
+                <a:spcPts val="1620"/>
+              </a:lnSpc>
+              <a:spcAft>
+                <a:spcPts val="300"/>
+              </a:spcAft>
+              <a:buNone/>
+            </a:pPr>
+            <a:r>
+              <a:rPr lang="en-US" sz="1200" i="1" dirty="0">
+                <a:solidFill>
+                  <a:srgbClr val="1C2833"/>
+                </a:solidFill>
+                <a:latin typeface="Arial" pitchFamily="34" charset="0"/>
+                <a:ea typeface="Arial" pitchFamily="34" charset="-122"/>
+                <a:cs typeface="Arial" pitchFamily="34" charset="-120"/>
+              </a:rPr>
+              <a:t>nirayana</a:t>
+            </a:r>
+            <a:pPr algn="l" indent="0" marL="0">
+              <a:lnSpc>
+                <a:spcPts val="1620"/>
+              </a:lnSpc>
+              <a:spcAft>
+                <a:spcPts val="300"/>
+              </a:spcAft>
+              <a:buNone/>
+            </a:pPr>
+            <a:r>
+              <a:rPr lang="en-US" sz="1200" dirty="0">
+                <a:solidFill>
+                  <a:srgbClr val="1C2833"/>
+                </a:solidFill>
+                <a:latin typeface="Arial" pitchFamily="34" charset="0"/>
+                <a:ea typeface="Arial" pitchFamily="34" charset="-122"/>
+                <a:cs typeface="Arial" pitchFamily="34" charset="-120"/>
+              </a:rPr>
+              <a:t> convention, the </a:t>
+            </a:r>
+            <a:pPr algn="l" indent="0" marL="0">
+              <a:lnSpc>
+                <a:spcPts val="1620"/>
+              </a:lnSpc>
+              <a:spcAft>
+                <a:spcPts val="300"/>
+              </a:spcAft>
+              <a:buNone/>
+            </a:pPr>
+            <a:r>
+              <a:rPr lang="en-US" sz="1200" i="1" dirty="0">
+                <a:solidFill>
+                  <a:srgbClr val="1C2833"/>
+                </a:solidFill>
+                <a:latin typeface="Arial" pitchFamily="34" charset="0"/>
+                <a:ea typeface="Arial" pitchFamily="34" charset="-122"/>
+                <a:cs typeface="Arial" pitchFamily="34" charset="-120"/>
+              </a:rPr>
+              <a:t>ayanāṁśa</a:t>
+            </a:r>
+            <a:pPr algn="l" indent="0" marL="0">
+              <a:lnSpc>
+                <a:spcPts val="1620"/>
+              </a:lnSpc>
+              <a:spcAft>
+                <a:spcPts val="300"/>
+              </a:spcAft>
+              <a:buNone/>
+            </a:pPr>
+            <a:r>
+              <a:rPr lang="en-US" sz="1200" dirty="0">
+                <a:solidFill>
+                  <a:srgbClr val="1C2833"/>
+                </a:solidFill>
+                <a:latin typeface="Arial" pitchFamily="34" charset="0"/>
+                <a:ea typeface="Arial" pitchFamily="34" charset="-122"/>
+                <a:cs typeface="Arial" pitchFamily="34" charset="-120"/>
+              </a:rPr>
+              <a:t> corrections) is a real intellectual contribution.</a:t>
             </a:r>
             <a:endParaRPr lang="en-US" sz="1200" dirty="0"/>
           </a:p>
@@ -2940,7 +3610,7 @@
                 <a:ea typeface="Georgia" pitchFamily="34" charset="-122"/>
                 <a:cs typeface="Georgia" pitchFamily="34" charset="-120"/>
               </a:rPr>
-              <a:t>Homework</a:t>
+              <a:t>Refinement work (25 min)</a:t>
             </a:r>
             <a:endParaRPr lang="en-US" sz="1800" dirty="0"/>
           </a:p>
@@ -2955,7 +3625,7 @@
         <p:spPr>
           <a:xfrm>
             <a:off x="406301" y="870942"/>
-            <a:ext cx="8498026" cy="639812"/>
+            <a:ext cx="8498026" cy="213271"/>
           </a:xfrm>
           <a:prstGeom prst="rect">
             <a:avLst/>
@@ -2988,8 +3658,33 @@
                 <a:ea typeface="Arial" pitchFamily="34" charset="-122"/>
                 <a:cs typeface="Arial" pitchFamily="34" charset="-120"/>
               </a:rPr>
-              <a:t>– Final touches. By tomorrow morning, the wheel should be: - [ ] Labelled in Sanskrit and English / Greek - [ ] Coloured legibly - [ ] Showing all four turning-points with dual </a:t>
-            </a:r>
+              <a:t>Pairs refine their wheel:</a:t>
+            </a:r>
+            <a:endParaRPr lang="en-US" sz="1200" dirty="0"/>
+          </a:p>
+        </p:txBody>
+      </p:sp>
+      <p:sp>
+        <p:nvSpPr>
+          <p:cNvPr id="5" name="Text 3"/>
+          <p:cNvSpPr/>
+          <p:nvPr/>
+        </p:nvSpPr>
+        <p:spPr>
+          <a:xfrm>
+            <a:off x="406301" y="4434929"/>
+            <a:ext cx="8498026" cy="213271"/>
+          </a:xfrm>
+          <a:prstGeom prst="rect">
+            <a:avLst/>
+          </a:prstGeom>
+          <a:noFill/>
+          <a:ln/>
+        </p:spPr>
+        <p:txBody>
+          <a:bodyPr wrap="square" lIns="0" tIns="0" rIns="0" bIns="0" rtlCol="0" anchor="t"/>
+          <a:lstStyle/>
+          <a:p>
             <a:pPr algn="l" indent="0" marL="0">
               <a:lnSpc>
                 <a:spcPts val="1680"/>
@@ -3003,6 +3698,206 @@
               <a:buNone/>
             </a:pPr>
             <a:r>
+              <a:rPr lang="en-US" sz="1200" dirty="0">
+                <a:solidFill>
+                  <a:srgbClr val="1C2833"/>
+                </a:solidFill>
+                <a:latin typeface="Arial" pitchFamily="34" charset="0"/>
+                <a:ea typeface="Arial" pitchFamily="34" charset="-122"/>
+                <a:cs typeface="Arial" pitchFamily="34" charset="-120"/>
+              </a:rPr>
+              <a:t>Middle ·  · IKS Curriculum</a:t>
+            </a:r>
+            <a:endParaRPr lang="en-US" sz="1200" dirty="0"/>
+          </a:p>
+        </p:txBody>
+      </p:sp>
+    </p:spTree>
+  </p:cSld>
+  <p:clrMapOvr>
+    <a:masterClrMapping/>
+  </p:clrMapOvr>
+</p:sld>
+</file>
+
+<file path=ppt/slides/slide13.xml><?xml version="1.0" encoding="utf-8"?>
+<p:sld xmlns:a="http://schemas.openxmlformats.org/drawingml/2006/main" xmlns:r="http://schemas.openxmlformats.org/officeDocument/2006/relationships" xmlns:p="http://schemas.openxmlformats.org/presentationml/2006/main">
+  <p:cSld name="Slide 13">
+    <p:bg>
+      <p:bgPr>
+        <a:solidFill>
+          <a:srgbClr val="FFFFFF"/>
+        </a:solidFill>
+      </p:bgPr>
+    </p:bg>
+    <p:spTree>
+      <p:nvGrpSpPr>
+        <p:cNvPr id="1" name=""/>
+        <p:cNvGrpSpPr/>
+        <p:nvPr/>
+      </p:nvGrpSpPr>
+      <p:grpSpPr>
+        <a:xfrm>
+          <a:off x="0" y="0"/>
+          <a:ext cx="0" cy="0"/>
+          <a:chOff x="0" y="0"/>
+          <a:chExt cx="0" cy="0"/>
+        </a:xfrm>
+      </p:grpSpPr>
+      <p:sp>
+        <p:nvSpPr>
+          <p:cNvPr id="2" name="Text 0"/>
+          <p:cNvSpPr/>
+          <p:nvPr/>
+        </p:nvSpPr>
+        <p:spPr>
+          <a:xfrm>
+            <a:off x="0" y="0"/>
+            <a:ext cx="9144000" cy="101501"/>
+          </a:xfrm>
+          <a:prstGeom prst="rect">
+            <a:avLst/>
+          </a:prstGeom>
+          <a:solidFill>
+            <a:srgbClr val="277884"/>
+          </a:solidFill>
+          <a:ln/>
+        </p:spPr>
+        <p:txBody>
+          <a:bodyPr wrap="square" rtlCol="0" anchor="ctr"/>
+          <a:lstStyle/>
+          <a:p>
+            <a:pPr indent="0" marL="0">
+              <a:buNone/>
+            </a:pPr>
+            <a:endParaRPr lang="en-US" dirty="0"/>
+          </a:p>
+        </p:txBody>
+      </p:sp>
+      <p:sp>
+        <p:nvSpPr>
+          <p:cNvPr id="3" name="Text 1"/>
+          <p:cNvSpPr/>
+          <p:nvPr/>
+        </p:nvSpPr>
+        <p:spPr>
+          <a:xfrm>
+            <a:off x="406301" y="457051"/>
+            <a:ext cx="8498026" cy="274290"/>
+          </a:xfrm>
+          <a:prstGeom prst="rect">
+            <a:avLst/>
+          </a:prstGeom>
+          <a:noFill/>
+          <a:ln/>
+        </p:spPr>
+        <p:txBody>
+          <a:bodyPr wrap="square" lIns="0" tIns="0" rIns="0" bIns="0" rtlCol="0" anchor="t"/>
+          <a:lstStyle/>
+          <a:p>
+            <a:pPr algn="l" indent="0" marL="0">
+              <a:lnSpc>
+                <a:spcPts val="2160"/>
+              </a:lnSpc>
+              <a:spcBef>
+                <a:spcPts val="600"/>
+              </a:spcBef>
+              <a:spcAft>
+                <a:spcPts val="800"/>
+              </a:spcAft>
+              <a:buNone/>
+            </a:pPr>
+            <a:r>
+              <a:rPr lang="en-US" sz="1800" b="1" dirty="0">
+                <a:solidFill>
+                  <a:srgbClr val="FE4447"/>
+                </a:solidFill>
+                <a:latin typeface="Georgia" pitchFamily="34" charset="0"/>
+                <a:ea typeface="Georgia" pitchFamily="34" charset="-122"/>
+                <a:cs typeface="Georgia" pitchFamily="34" charset="-120"/>
+              </a:rPr>
+              <a:t>Refinement work (25 min) (cont.)</a:t>
+            </a:r>
+            <a:endParaRPr lang="en-US" sz="1800" dirty="0"/>
+          </a:p>
+        </p:txBody>
+      </p:sp>
+      <p:sp>
+        <p:nvSpPr>
+          <p:cNvPr id="4" name="Text 2"/>
+          <p:cNvSpPr/>
+          <p:nvPr/>
+        </p:nvSpPr>
+        <p:spPr>
+          <a:xfrm>
+            <a:off x="634901" y="883593"/>
+            <a:ext cx="8102798" cy="1912144"/>
+          </a:xfrm>
+          <a:prstGeom prst="rect">
+            <a:avLst/>
+          </a:prstGeom>
+          <a:noFill/>
+          <a:ln/>
+        </p:spPr>
+        <p:txBody>
+          <a:bodyPr wrap="square" lIns="0" tIns="0" rIns="0" bIns="0" rtlCol="0" anchor="t"/>
+          <a:lstStyle/>
+          <a:p>
+            <a:pPr algn="l" marL="342900" indent="-342900">
+              <a:lnSpc>
+                <a:spcPts val="1620"/>
+              </a:lnSpc>
+              <a:spcAft>
+                <a:spcPts val="300"/>
+              </a:spcAft>
+              <a:buSzPct val="100000"/>
+              <a:buChar char="•"/>
+            </a:pPr>
+            <a:r>
+              <a:rPr lang="en-US" sz="1200" dirty="0">
+                <a:solidFill>
+                  <a:srgbClr val="1C2833"/>
+                </a:solidFill>
+                <a:latin typeface="Arial" pitchFamily="34" charset="0"/>
+                <a:ea typeface="Arial" pitchFamily="34" charset="-122"/>
+                <a:cs typeface="Arial" pitchFamily="34" charset="-120"/>
+              </a:rPr>
+              <a:t>Add the cross-cultural element. Options:</a:t>
+            </a:r>
+            <a:endParaRPr lang="en-US" sz="1200" dirty="0"/>
+          </a:p>
+          <a:p>
+            <a:pPr algn="l" marL="342900" indent="-342900">
+              <a:lnSpc>
+                <a:spcPts val="1620"/>
+              </a:lnSpc>
+              <a:spcAft>
+                <a:spcPts val="300"/>
+              </a:spcAft>
+              <a:buSzPct val="100000"/>
+              <a:buChar char="•"/>
+            </a:pPr>
+            <a:r>
+              <a:rPr lang="en-US" sz="1200" dirty="0">
+                <a:solidFill>
+                  <a:srgbClr val="1C2833"/>
+                </a:solidFill>
+                <a:latin typeface="Arial" pitchFamily="34" charset="0"/>
+                <a:ea typeface="Arial" pitchFamily="34" charset="-122"/>
+                <a:cs typeface="Arial" pitchFamily="34" charset="-120"/>
+              </a:rPr>
+              <a:t>A small inset showing the Babylonian name for ONE </a:t>
+            </a:r>
+            <a:pPr algn="l" indent="0" marL="0">
+              <a:lnSpc>
+                <a:spcPts val="1620"/>
+              </a:lnSpc>
+              <a:spcAft>
+                <a:spcPts val="300"/>
+              </a:spcAft>
+              <a:buNone/>
+            </a:pPr>
+            <a:r>
               <a:rPr lang="en-US" sz="1200" i="1" dirty="0">
                 <a:solidFill>
                   <a:srgbClr val="1C2833"/>
@@ -3011,10 +3906,271 @@
                 <a:ea typeface="Arial" pitchFamily="34" charset="-122"/>
                 <a:cs typeface="Arial" pitchFamily="34" charset="-120"/>
               </a:rPr>
+              <a:t>rāśi</a:t>
+            </a:r>
+            <a:pPr algn="l" indent="0" marL="0">
+              <a:lnSpc>
+                <a:spcPts val="1620"/>
+              </a:lnSpc>
+              <a:spcAft>
+                <a:spcPts val="300"/>
+              </a:spcAft>
+              <a:buNone/>
+            </a:pPr>
+            <a:r>
+              <a:rPr lang="en-US" sz="1200" dirty="0">
+                <a:solidFill>
+                  <a:srgbClr val="1C2833"/>
+                </a:solidFill>
+                <a:latin typeface="Arial" pitchFamily="34" charset="0"/>
+                <a:ea typeface="Arial" pitchFamily="34" charset="-122"/>
+                <a:cs typeface="Arial" pitchFamily="34" charset="-120"/>
+              </a:rPr>
+              <a:t> alongside the Sanskrit and Greek.</a:t>
+            </a:r>
+            <a:endParaRPr lang="en-US" sz="1200" dirty="0"/>
+          </a:p>
+          <a:p>
+            <a:pPr algn="l" marL="342900" indent="-342900">
+              <a:lnSpc>
+                <a:spcPts val="1620"/>
+              </a:lnSpc>
+              <a:spcAft>
+                <a:spcPts val="300"/>
+              </a:spcAft>
+              <a:buSzPct val="100000"/>
+              <a:buChar char="•"/>
+            </a:pPr>
+            <a:r>
+              <a:rPr lang="en-US" sz="1200" dirty="0">
+                <a:solidFill>
+                  <a:srgbClr val="1C2833"/>
+                </a:solidFill>
+                <a:latin typeface="Arial" pitchFamily="34" charset="0"/>
+                <a:ea typeface="Arial" pitchFamily="34" charset="-122"/>
+                <a:cs typeface="Arial" pitchFamily="34" charset="-120"/>
+              </a:rPr>
+              <a:t>A single sentence on the wheel: "These 12 signs appear in similar form in Babylonian, Greek, and Indian astronomy — a 2700-year inheritance."</a:t>
+            </a:r>
+            <a:endParaRPr lang="en-US" sz="1200" dirty="0"/>
+          </a:p>
+          <a:p>
+            <a:pPr algn="l" marL="342900" indent="-342900">
+              <a:lnSpc>
+                <a:spcPts val="1620"/>
+              </a:lnSpc>
+              <a:spcAft>
+                <a:spcPts val="300"/>
+              </a:spcAft>
+              <a:buSzPct val="100000"/>
+              <a:buChar char="•"/>
+            </a:pPr>
+            <a:r>
+              <a:rPr lang="en-US" sz="1200" dirty="0">
+                <a:solidFill>
+                  <a:srgbClr val="1C2833"/>
+                </a:solidFill>
+                <a:latin typeface="Arial" pitchFamily="34" charset="0"/>
+                <a:ea typeface="Arial" pitchFamily="34" charset="-122"/>
+                <a:cs typeface="Arial" pitchFamily="34" charset="-120"/>
+              </a:rPr>
+              <a:t>A short comparative note on Cancer / Karka with a footnote on the Babylonian name.</a:t>
+            </a:r>
+            <a:endParaRPr lang="en-US" sz="1200" dirty="0"/>
+          </a:p>
+          <a:p>
+            <a:pPr algn="l" marL="342900" indent="-342900">
+              <a:lnSpc>
+                <a:spcPts val="1620"/>
+              </a:lnSpc>
+              <a:spcAft>
+                <a:spcPts val="300"/>
+              </a:spcAft>
+              <a:buSzPct val="100000"/>
+              <a:buChar char="•"/>
+            </a:pPr>
+            <a:r>
+              <a:rPr lang="en-US" sz="1200" dirty="0">
+                <a:solidFill>
+                  <a:srgbClr val="1C2833"/>
+                </a:solidFill>
+                <a:latin typeface="Arial" pitchFamily="34" charset="0"/>
+                <a:ea typeface="Arial" pitchFamily="34" charset="-122"/>
+                <a:cs typeface="Arial" pitchFamily="34" charset="-120"/>
+              </a:rPr>
+              <a:t>Finalise the written explanation paragraph (4–6 sentences) covering: axial tilt, the two </a:t>
+            </a:r>
+            <a:pPr algn="l" indent="0" marL="0">
+              <a:lnSpc>
+                <a:spcPts val="1620"/>
+              </a:lnSpc>
+              <a:spcAft>
+                <a:spcPts val="300"/>
+              </a:spcAft>
+              <a:buNone/>
+            </a:pPr>
+            <a:r>
+              <a:rPr lang="en-US" sz="1200" i="1" dirty="0">
+                <a:solidFill>
+                  <a:srgbClr val="1C2833"/>
+                </a:solidFill>
+                <a:latin typeface="Arial" pitchFamily="34" charset="0"/>
+                <a:ea typeface="Arial" pitchFamily="34" charset="-122"/>
+                <a:cs typeface="Arial" pitchFamily="34" charset="-120"/>
+              </a:rPr>
+              <a:t>ayanas</a:t>
+            </a:r>
+            <a:pPr algn="l" indent="0" marL="0">
+              <a:lnSpc>
+                <a:spcPts val="1620"/>
+              </a:lnSpc>
+              <a:spcAft>
+                <a:spcPts val="300"/>
+              </a:spcAft>
+              <a:buNone/>
+            </a:pPr>
+            <a:r>
+              <a:rPr lang="en-US" sz="1200" dirty="0">
+                <a:solidFill>
+                  <a:srgbClr val="1C2833"/>
+                </a:solidFill>
+                <a:latin typeface="Arial" pitchFamily="34" charset="0"/>
+                <a:ea typeface="Arial" pitchFamily="34" charset="-122"/>
+                <a:cs typeface="Arial" pitchFamily="34" charset="-120"/>
+              </a:rPr>
+              <a:t>, the four turning-points, the </a:t>
+            </a:r>
+            <a:pPr algn="l" indent="0" marL="0">
+              <a:lnSpc>
+                <a:spcPts val="1620"/>
+              </a:lnSpc>
+              <a:spcAft>
+                <a:spcPts val="300"/>
+              </a:spcAft>
+              <a:buNone/>
+            </a:pPr>
+            <a:r>
+              <a:rPr lang="en-US" sz="1200" i="1" dirty="0">
+                <a:solidFill>
+                  <a:srgbClr val="1C2833"/>
+                </a:solidFill>
+                <a:latin typeface="Arial" pitchFamily="34" charset="0"/>
+                <a:ea typeface="Arial" pitchFamily="34" charset="-122"/>
+                <a:cs typeface="Arial" pitchFamily="34" charset="-120"/>
+              </a:rPr>
               <a:t>sāyana</a:t>
             </a:r>
             <a:pPr algn="l" indent="0" marL="0">
               <a:lnSpc>
+                <a:spcPts val="1620"/>
+              </a:lnSpc>
+              <a:spcAft>
+                <a:spcPts val="300"/>
+              </a:spcAft>
+              <a:buNone/>
+            </a:pPr>
+            <a:r>
+              <a:rPr lang="en-US" sz="1200" dirty="0">
+                <a:solidFill>
+                  <a:srgbClr val="1C2833"/>
+                </a:solidFill>
+                <a:latin typeface="Arial" pitchFamily="34" charset="0"/>
+                <a:ea typeface="Arial" pitchFamily="34" charset="-122"/>
+                <a:cs typeface="Arial" pitchFamily="34" charset="-120"/>
+              </a:rPr>
+              <a:t> / </a:t>
+            </a:r>
+            <a:pPr algn="l" indent="0" marL="0">
+              <a:lnSpc>
+                <a:spcPts val="1620"/>
+              </a:lnSpc>
+              <a:spcAft>
+                <a:spcPts val="300"/>
+              </a:spcAft>
+              <a:buNone/>
+            </a:pPr>
+            <a:r>
+              <a:rPr lang="en-US" sz="1200" i="1" dirty="0">
+                <a:solidFill>
+                  <a:srgbClr val="1C2833"/>
+                </a:solidFill>
+                <a:latin typeface="Arial" pitchFamily="34" charset="0"/>
+                <a:ea typeface="Arial" pitchFamily="34" charset="-122"/>
+                <a:cs typeface="Arial" pitchFamily="34" charset="-120"/>
+              </a:rPr>
+              <a:t>nirayana</a:t>
+            </a:r>
+            <a:pPr algn="l" indent="0" marL="0">
+              <a:lnSpc>
+                <a:spcPts val="1620"/>
+              </a:lnSpc>
+              <a:spcAft>
+                <a:spcPts val="300"/>
+              </a:spcAft>
+              <a:buNone/>
+            </a:pPr>
+            <a:r>
+              <a:rPr lang="en-US" sz="1200" dirty="0">
+                <a:solidFill>
+                  <a:srgbClr val="1C2833"/>
+                </a:solidFill>
+                <a:latin typeface="Arial" pitchFamily="34" charset="0"/>
+                <a:ea typeface="Arial" pitchFamily="34" charset="-122"/>
+                <a:cs typeface="Arial" pitchFamily="34" charset="-120"/>
+              </a:rPr>
+              <a:t> distinction, and one citation.</a:t>
+            </a:r>
+            <a:endParaRPr lang="en-US" sz="1200" dirty="0"/>
+          </a:p>
+          <a:p>
+            <a:pPr algn="l" marL="342900" indent="-342900">
+              <a:lnSpc>
+                <a:spcPts val="1620"/>
+              </a:lnSpc>
+              <a:spcAft>
+                <a:spcPts val="300"/>
+              </a:spcAft>
+              <a:buSzPct val="100000"/>
+              <a:buChar char="•"/>
+            </a:pPr>
+            <a:r>
+              <a:rPr lang="en-US" sz="1200" dirty="0">
+                <a:solidFill>
+                  <a:srgbClr val="1C2833"/>
+                </a:solidFill>
+                <a:latin typeface="Arial" pitchFamily="34" charset="0"/>
+                <a:ea typeface="Arial" pitchFamily="34" charset="-122"/>
+                <a:cs typeface="Arial" pitchFamily="34" charset="-120"/>
+              </a:rPr>
+              <a:t>Decide who-says-what in the 3-minute presentation.</a:t>
+            </a:r>
+            <a:endParaRPr lang="en-US" sz="1200" dirty="0"/>
+          </a:p>
+        </p:txBody>
+      </p:sp>
+      <p:sp>
+        <p:nvSpPr>
+          <p:cNvPr id="5" name="Text 3"/>
+          <p:cNvSpPr/>
+          <p:nvPr/>
+        </p:nvSpPr>
+        <p:spPr>
+          <a:xfrm>
+            <a:off x="406301" y="4434929"/>
+            <a:ext cx="8498026" cy="213271"/>
+          </a:xfrm>
+          <a:prstGeom prst="rect">
+            <a:avLst/>
+          </a:prstGeom>
+          <a:noFill/>
+          <a:ln/>
+        </p:spPr>
+        <p:txBody>
+          <a:bodyPr wrap="square" lIns="0" tIns="0" rIns="0" bIns="0" rtlCol="0" anchor="t"/>
+          <a:lstStyle/>
+          <a:p>
+            <a:pPr algn="l" indent="0" marL="0">
+              <a:lnSpc>
                 <a:spcPts val="1680"/>
               </a:lnSpc>
               <a:spcBef>
@@ -3034,15 +4190,1480 @@
                 <a:ea typeface="Arial" pitchFamily="34" charset="-122"/>
                 <a:cs typeface="Arial" pitchFamily="34" charset="-120"/>
               </a:rPr>
+              <a:t>Middle ·  · IKS Curriculum</a:t>
+            </a:r>
+            <a:endParaRPr lang="en-US" sz="1200" dirty="0"/>
+          </a:p>
+        </p:txBody>
+      </p:sp>
+    </p:spTree>
+  </p:cSld>
+  <p:clrMapOvr>
+    <a:masterClrMapping/>
+  </p:clrMapOvr>
+</p:sld>
+</file>
+
+<file path=ppt/slides/slide14.xml><?xml version="1.0" encoding="utf-8"?>
+<p:sld xmlns:a="http://schemas.openxmlformats.org/drawingml/2006/main" xmlns:r="http://schemas.openxmlformats.org/officeDocument/2006/relationships" xmlns:p="http://schemas.openxmlformats.org/presentationml/2006/main">
+  <p:cSld name="Slide 14">
+    <p:bg>
+      <p:bgPr>
+        <a:solidFill>
+          <a:srgbClr val="FFFFFF"/>
+        </a:solidFill>
+      </p:bgPr>
+    </p:bg>
+    <p:spTree>
+      <p:nvGrpSpPr>
+        <p:cNvPr id="1" name=""/>
+        <p:cNvGrpSpPr/>
+        <p:nvPr/>
+      </p:nvGrpSpPr>
+      <p:grpSpPr>
+        <a:xfrm>
+          <a:off x="0" y="0"/>
+          <a:ext cx="0" cy="0"/>
+          <a:chOff x="0" y="0"/>
+          <a:chExt cx="0" cy="0"/>
+        </a:xfrm>
+      </p:grpSpPr>
+      <p:sp>
+        <p:nvSpPr>
+          <p:cNvPr id="2" name="Text 0"/>
+          <p:cNvSpPr/>
+          <p:nvPr/>
+        </p:nvSpPr>
+        <p:spPr>
+          <a:xfrm>
+            <a:off x="0" y="0"/>
+            <a:ext cx="9144000" cy="101501"/>
+          </a:xfrm>
+          <a:prstGeom prst="rect">
+            <a:avLst/>
+          </a:prstGeom>
+          <a:solidFill>
+            <a:srgbClr val="277884"/>
+          </a:solidFill>
+          <a:ln/>
+        </p:spPr>
+        <p:txBody>
+          <a:bodyPr wrap="square" rtlCol="0" anchor="ctr"/>
+          <a:lstStyle/>
+          <a:p>
+            <a:pPr indent="0" marL="0">
+              <a:buNone/>
+            </a:pPr>
+            <a:endParaRPr lang="en-US" dirty="0"/>
+          </a:p>
+        </p:txBody>
+      </p:sp>
+      <p:sp>
+        <p:nvSpPr>
+          <p:cNvPr id="3" name="Text 1"/>
+          <p:cNvSpPr/>
+          <p:nvPr/>
+        </p:nvSpPr>
+        <p:spPr>
+          <a:xfrm>
+            <a:off x="406301" y="457051"/>
+            <a:ext cx="8498026" cy="274290"/>
+          </a:xfrm>
+          <a:prstGeom prst="rect">
+            <a:avLst/>
+          </a:prstGeom>
+          <a:noFill/>
+          <a:ln/>
+        </p:spPr>
+        <p:txBody>
+          <a:bodyPr wrap="square" lIns="0" tIns="0" rIns="0" bIns="0" rtlCol="0" anchor="t"/>
+          <a:lstStyle/>
+          <a:p>
+            <a:pPr algn="l" indent="0" marL="0">
+              <a:lnSpc>
+                <a:spcPts val="2160"/>
+              </a:lnSpc>
+              <a:spcBef>
+                <a:spcPts val="600"/>
+              </a:spcBef>
+              <a:spcAft>
+                <a:spcPts val="800"/>
+              </a:spcAft>
+              <a:buNone/>
+            </a:pPr>
+            <a:r>
+              <a:rPr lang="en-US" sz="1800" b="1" dirty="0">
+                <a:solidFill>
+                  <a:srgbClr val="FE4447"/>
+                </a:solidFill>
+                <a:latin typeface="Georgia" pitchFamily="34" charset="0"/>
+                <a:ea typeface="Georgia" pitchFamily="34" charset="-122"/>
+                <a:cs typeface="Georgia" pitchFamily="34" charset="-120"/>
+              </a:rPr>
+              <a:t>Rehearsal (8 min)</a:t>
+            </a:r>
+            <a:endParaRPr lang="en-US" sz="1800" dirty="0"/>
+          </a:p>
+        </p:txBody>
+      </p:sp>
+      <p:sp>
+        <p:nvSpPr>
+          <p:cNvPr id="4" name="Text 2"/>
+          <p:cNvSpPr/>
+          <p:nvPr/>
+        </p:nvSpPr>
+        <p:spPr>
+          <a:xfrm>
+            <a:off x="406301" y="870942"/>
+            <a:ext cx="8498026" cy="213271"/>
+          </a:xfrm>
+          <a:prstGeom prst="rect">
+            <a:avLst/>
+          </a:prstGeom>
+          <a:noFill/>
+          <a:ln/>
+        </p:spPr>
+        <p:txBody>
+          <a:bodyPr wrap="square" lIns="0" tIns="0" rIns="0" bIns="0" rtlCol="0" anchor="t"/>
+          <a:lstStyle/>
+          <a:p>
+            <a:pPr algn="l" indent="0" marL="0">
+              <a:lnSpc>
+                <a:spcPts val="1680"/>
+              </a:lnSpc>
+              <a:spcBef>
+                <a:spcPts val="300"/>
+              </a:spcBef>
+              <a:spcAft>
+                <a:spcPts val="300"/>
+              </a:spcAft>
+              <a:buNone/>
+            </a:pPr>
+            <a:r>
+              <a:rPr lang="en-US" sz="1200" dirty="0">
+                <a:solidFill>
+                  <a:srgbClr val="1C2833"/>
+                </a:solidFill>
+                <a:latin typeface="Arial" pitchFamily="34" charset="0"/>
+                <a:ea typeface="Arial" pitchFamily="34" charset="-122"/>
+                <a:cs typeface="Arial" pitchFamily="34" charset="-120"/>
+              </a:rPr>
+              <a:t>In groups of two pairs (4 students), pairs rehearse their 3-minute presentation in front of each other.</a:t>
+            </a:r>
+            <a:endParaRPr lang="en-US" sz="1200" dirty="0"/>
+          </a:p>
+        </p:txBody>
+      </p:sp>
+      <p:sp>
+        <p:nvSpPr>
+          <p:cNvPr id="5" name="Text 3"/>
+          <p:cNvSpPr/>
+          <p:nvPr/>
+        </p:nvSpPr>
+        <p:spPr>
+          <a:xfrm>
+            <a:off x="406301" y="1160413"/>
+            <a:ext cx="8498026" cy="213271"/>
+          </a:xfrm>
+          <a:prstGeom prst="rect">
+            <a:avLst/>
+          </a:prstGeom>
+          <a:noFill/>
+          <a:ln/>
+        </p:spPr>
+        <p:txBody>
+          <a:bodyPr wrap="square" lIns="0" tIns="0" rIns="0" bIns="0" rtlCol="0" anchor="t"/>
+          <a:lstStyle/>
+          <a:p>
+            <a:pPr algn="l" indent="0" marL="0">
+              <a:lnSpc>
+                <a:spcPts val="1680"/>
+              </a:lnSpc>
+              <a:spcBef>
+                <a:spcPts val="300"/>
+              </a:spcBef>
+              <a:spcAft>
+                <a:spcPts val="300"/>
+              </a:spcAft>
+              <a:buNone/>
+            </a:pPr>
+            <a:r>
+              <a:rPr lang="en-US" sz="1200" dirty="0">
+                <a:solidFill>
+                  <a:srgbClr val="1C2833"/>
+                </a:solidFill>
+                <a:latin typeface="Arial" pitchFamily="34" charset="0"/>
+                <a:ea typeface="Arial" pitchFamily="34" charset="-122"/>
+                <a:cs typeface="Arial" pitchFamily="34" charset="-120"/>
+              </a:rPr>
+              <a:t>The listening pair times the speakers and gives one piece of feedback:</a:t>
+            </a:r>
+            <a:endParaRPr lang="en-US" sz="1200" dirty="0"/>
+          </a:p>
+        </p:txBody>
+      </p:sp>
+      <p:sp>
+        <p:nvSpPr>
+          <p:cNvPr id="6" name="Text 4"/>
+          <p:cNvSpPr/>
+          <p:nvPr/>
+        </p:nvSpPr>
+        <p:spPr>
+          <a:xfrm>
+            <a:off x="634901" y="1462534"/>
+            <a:ext cx="8102798" cy="525661"/>
+          </a:xfrm>
+          <a:prstGeom prst="rect">
+            <a:avLst/>
+          </a:prstGeom>
+          <a:noFill/>
+          <a:ln/>
+        </p:spPr>
+        <p:txBody>
+          <a:bodyPr wrap="square" lIns="0" tIns="0" rIns="0" bIns="0" rtlCol="0" anchor="t"/>
+          <a:lstStyle/>
+          <a:p>
+            <a:pPr algn="l" marL="342900" indent="-342900">
+              <a:lnSpc>
+                <a:spcPts val="1620"/>
+              </a:lnSpc>
+              <a:spcAft>
+                <a:spcPts val="300"/>
+              </a:spcAft>
+              <a:buSzPct val="100000"/>
+              <a:buChar char="•"/>
+            </a:pPr>
+            <a:r>
+              <a:rPr lang="en-US" sz="1200" dirty="0">
+                <a:solidFill>
+                  <a:srgbClr val="1C2833"/>
+                </a:solidFill>
+                <a:latin typeface="Arial" pitchFamily="34" charset="0"/>
+                <a:ea typeface="Arial" pitchFamily="34" charset="-122"/>
+                <a:cs typeface="Arial" pitchFamily="34" charset="-120"/>
+              </a:rPr>
+              <a:t>ONE thing that came across clearly</a:t>
+            </a:r>
+            <a:endParaRPr lang="en-US" sz="1200" dirty="0"/>
+          </a:p>
+          <a:p>
+            <a:pPr algn="l" marL="342900" indent="-342900">
+              <a:lnSpc>
+                <a:spcPts val="1620"/>
+              </a:lnSpc>
+              <a:spcAft>
+                <a:spcPts val="300"/>
+              </a:spcAft>
+              <a:buSzPct val="100000"/>
+              <a:buChar char="•"/>
+            </a:pPr>
+            <a:r>
+              <a:rPr lang="en-US" sz="1200" dirty="0">
+                <a:solidFill>
+                  <a:srgbClr val="1C2833"/>
+                </a:solidFill>
+                <a:latin typeface="Arial" pitchFamily="34" charset="0"/>
+                <a:ea typeface="Arial" pitchFamily="34" charset="-122"/>
+                <a:cs typeface="Arial" pitchFamily="34" charset="-120"/>
+              </a:rPr>
+              <a:t>ONE thing the audience didn't understand</a:t>
+            </a:r>
+            <a:endParaRPr lang="en-US" sz="1200" dirty="0"/>
+          </a:p>
+        </p:txBody>
+      </p:sp>
+      <p:sp>
+        <p:nvSpPr>
+          <p:cNvPr id="7" name="Text 5"/>
+          <p:cNvSpPr/>
+          <p:nvPr/>
+        </p:nvSpPr>
+        <p:spPr>
+          <a:xfrm>
+            <a:off x="406301" y="2077045"/>
+            <a:ext cx="8498026" cy="213271"/>
+          </a:xfrm>
+          <a:prstGeom prst="rect">
+            <a:avLst/>
+          </a:prstGeom>
+          <a:noFill/>
+          <a:ln/>
+        </p:spPr>
+        <p:txBody>
+          <a:bodyPr wrap="square" lIns="0" tIns="0" rIns="0" bIns="0" rtlCol="0" anchor="t"/>
+          <a:lstStyle/>
+          <a:p>
+            <a:pPr algn="l" indent="0" marL="0">
+              <a:lnSpc>
+                <a:spcPts val="1680"/>
+              </a:lnSpc>
+              <a:spcBef>
+                <a:spcPts val="300"/>
+              </a:spcBef>
+              <a:spcAft>
+                <a:spcPts val="300"/>
+              </a:spcAft>
+              <a:buNone/>
+            </a:pPr>
+            <a:r>
+              <a:rPr lang="en-US" sz="1200" dirty="0">
+                <a:solidFill>
+                  <a:srgbClr val="1C2833"/>
+                </a:solidFill>
+                <a:latin typeface="Arial" pitchFamily="34" charset="0"/>
+                <a:ea typeface="Arial" pitchFamily="34" charset="-122"/>
+                <a:cs typeface="Arial" pitchFamily="34" charset="-120"/>
+              </a:rPr>
+              <a:t>Then they swap.</a:t>
+            </a:r>
+            <a:endParaRPr lang="en-US" sz="1200" dirty="0"/>
+          </a:p>
+        </p:txBody>
+      </p:sp>
+      <p:sp>
+        <p:nvSpPr>
+          <p:cNvPr id="8" name="Text 6"/>
+          <p:cNvSpPr/>
+          <p:nvPr/>
+        </p:nvSpPr>
+        <p:spPr>
+          <a:xfrm>
+            <a:off x="406301" y="4434929"/>
+            <a:ext cx="8498026" cy="213271"/>
+          </a:xfrm>
+          <a:prstGeom prst="rect">
+            <a:avLst/>
+          </a:prstGeom>
+          <a:noFill/>
+          <a:ln/>
+        </p:spPr>
+        <p:txBody>
+          <a:bodyPr wrap="square" lIns="0" tIns="0" rIns="0" bIns="0" rtlCol="0" anchor="t"/>
+          <a:lstStyle/>
+          <a:p>
+            <a:pPr algn="l" indent="0" marL="0">
+              <a:lnSpc>
+                <a:spcPts val="1680"/>
+              </a:lnSpc>
+              <a:spcBef>
+                <a:spcPts val="300"/>
+              </a:spcBef>
+              <a:spcAft>
+                <a:spcPts val="300"/>
+              </a:spcAft>
+              <a:buNone/>
+            </a:pPr>
+            <a:r>
+              <a:rPr lang="en-US" sz="1200" dirty="0">
+                <a:solidFill>
+                  <a:srgbClr val="1C2833"/>
+                </a:solidFill>
+                <a:latin typeface="Arial" pitchFamily="34" charset="0"/>
+                <a:ea typeface="Arial" pitchFamily="34" charset="-122"/>
+                <a:cs typeface="Arial" pitchFamily="34" charset="-120"/>
+              </a:rPr>
+              <a:t>Middle ·  · IKS Curriculum</a:t>
+            </a:r>
+            <a:endParaRPr lang="en-US" sz="1200" dirty="0"/>
+          </a:p>
+        </p:txBody>
+      </p:sp>
+    </p:spTree>
+  </p:cSld>
+  <p:clrMapOvr>
+    <a:masterClrMapping/>
+  </p:clrMapOvr>
+</p:sld>
+</file>
+
+<file path=ppt/slides/slide15.xml><?xml version="1.0" encoding="utf-8"?>
+<p:sld xmlns:a="http://schemas.openxmlformats.org/drawingml/2006/main" xmlns:r="http://schemas.openxmlformats.org/officeDocument/2006/relationships" xmlns:p="http://schemas.openxmlformats.org/presentationml/2006/main">
+  <p:cSld name="Slide 15">
+    <p:bg>
+      <p:bgPr>
+        <a:solidFill>
+          <a:srgbClr val="FFFFFF"/>
+        </a:solidFill>
+      </p:bgPr>
+    </p:bg>
+    <p:spTree>
+      <p:nvGrpSpPr>
+        <p:cNvPr id="1" name=""/>
+        <p:cNvGrpSpPr/>
+        <p:nvPr/>
+      </p:nvGrpSpPr>
+      <p:grpSpPr>
+        <a:xfrm>
+          <a:off x="0" y="0"/>
+          <a:ext cx="0" cy="0"/>
+          <a:chOff x="0" y="0"/>
+          <a:chExt cx="0" cy="0"/>
+        </a:xfrm>
+      </p:grpSpPr>
+      <p:sp>
+        <p:nvSpPr>
+          <p:cNvPr id="2" name="Text 0"/>
+          <p:cNvSpPr/>
+          <p:nvPr/>
+        </p:nvSpPr>
+        <p:spPr>
+          <a:xfrm>
+            <a:off x="0" y="0"/>
+            <a:ext cx="9144000" cy="101501"/>
+          </a:xfrm>
+          <a:prstGeom prst="rect">
+            <a:avLst/>
+          </a:prstGeom>
+          <a:solidFill>
+            <a:srgbClr val="277884"/>
+          </a:solidFill>
+          <a:ln/>
+        </p:spPr>
+        <p:txBody>
+          <a:bodyPr wrap="square" rtlCol="0" anchor="ctr"/>
+          <a:lstStyle/>
+          <a:p>
+            <a:pPr indent="0" marL="0">
+              <a:buNone/>
+            </a:pPr>
+            <a:endParaRPr lang="en-US" dirty="0"/>
+          </a:p>
+        </p:txBody>
+      </p:sp>
+      <p:sp>
+        <p:nvSpPr>
+          <p:cNvPr id="3" name="Text 1"/>
+          <p:cNvSpPr/>
+          <p:nvPr/>
+        </p:nvSpPr>
+        <p:spPr>
+          <a:xfrm>
+            <a:off x="406301" y="457051"/>
+            <a:ext cx="8498026" cy="274290"/>
+          </a:xfrm>
+          <a:prstGeom prst="rect">
+            <a:avLst/>
+          </a:prstGeom>
+          <a:noFill/>
+          <a:ln/>
+        </p:spPr>
+        <p:txBody>
+          <a:bodyPr wrap="square" lIns="0" tIns="0" rIns="0" bIns="0" rtlCol="0" anchor="t"/>
+          <a:lstStyle/>
+          <a:p>
+            <a:pPr algn="l" indent="0" marL="0">
+              <a:lnSpc>
+                <a:spcPts val="2160"/>
+              </a:lnSpc>
+              <a:spcBef>
+                <a:spcPts val="600"/>
+              </a:spcBef>
+              <a:spcAft>
+                <a:spcPts val="800"/>
+              </a:spcAft>
+              <a:buNone/>
+            </a:pPr>
+            <a:r>
+              <a:rPr lang="en-US" sz="1800" b="1" dirty="0">
+                <a:solidFill>
+                  <a:srgbClr val="FE4447"/>
+                </a:solidFill>
+                <a:latin typeface="Georgia" pitchFamily="34" charset="0"/>
+                <a:ea typeface="Georgia" pitchFamily="34" charset="-122"/>
+                <a:cs typeface="Georgia" pitchFamily="34" charset="-120"/>
+              </a:rPr>
+              <a:t>Wrap-up (2 min)</a:t>
+            </a:r>
+            <a:endParaRPr lang="en-US" sz="1800" dirty="0"/>
+          </a:p>
+        </p:txBody>
+      </p:sp>
+      <p:sp>
+        <p:nvSpPr>
+          <p:cNvPr id="4" name="Text 2"/>
+          <p:cNvSpPr/>
+          <p:nvPr/>
+        </p:nvSpPr>
+        <p:spPr>
+          <a:xfrm>
+            <a:off x="634901" y="883593"/>
+            <a:ext cx="8102798" cy="525661"/>
+          </a:xfrm>
+          <a:prstGeom prst="rect">
+            <a:avLst/>
+          </a:prstGeom>
+          <a:noFill/>
+          <a:ln/>
+        </p:spPr>
+        <p:txBody>
+          <a:bodyPr wrap="square" lIns="0" tIns="0" rIns="0" bIns="0" rtlCol="0" anchor="t"/>
+          <a:lstStyle/>
+          <a:p>
+            <a:pPr algn="l" marL="342900" indent="-342900">
+              <a:lnSpc>
+                <a:spcPts val="1620"/>
+              </a:lnSpc>
+              <a:spcAft>
+                <a:spcPts val="300"/>
+              </a:spcAft>
+              <a:buSzPct val="100000"/>
+              <a:buChar char="•"/>
+            </a:pPr>
+            <a:r>
+              <a:rPr lang="en-US" sz="1200" dirty="0">
+                <a:solidFill>
+                  <a:srgbClr val="1C2833"/>
+                </a:solidFill>
+                <a:latin typeface="Arial" pitchFamily="34" charset="0"/>
+                <a:ea typeface="Arial" pitchFamily="34" charset="-122"/>
+                <a:cs typeface="Arial" pitchFamily="34" charset="-120"/>
+              </a:rPr>
+              <a:t>Exit signal: each pair raises hand showing 1, 2, 3, 4, or 5 fingers — how ready they feel for tomorrow.</a:t>
+            </a:r>
+            <a:endParaRPr lang="en-US" sz="1200" dirty="0"/>
+          </a:p>
+          <a:p>
+            <a:pPr algn="l" marL="342900" indent="-342900">
+              <a:lnSpc>
+                <a:spcPts val="1620"/>
+              </a:lnSpc>
+              <a:spcAft>
+                <a:spcPts val="300"/>
+              </a:spcAft>
+              <a:buSzPct val="100000"/>
+              <a:buChar char="•"/>
+            </a:pPr>
+            <a:r>
+              <a:rPr lang="en-US" sz="1200" dirty="0">
+                <a:solidFill>
+                  <a:srgbClr val="1C2833"/>
+                </a:solidFill>
+                <a:latin typeface="Arial" pitchFamily="34" charset="0"/>
+                <a:ea typeface="Arial" pitchFamily="34" charset="-122"/>
+                <a:cs typeface="Arial" pitchFamily="34" charset="-120"/>
+              </a:rPr>
+              <a:t>The teacher notes any pair showing 1 or 2 and plans a 5-minute conference at the start of Day 10.</a:t>
+            </a:r>
+            <a:endParaRPr lang="en-US" sz="1200" dirty="0"/>
+          </a:p>
+        </p:txBody>
+      </p:sp>
+      <p:sp>
+        <p:nvSpPr>
+          <p:cNvPr id="5" name="Text 3"/>
+          <p:cNvSpPr/>
+          <p:nvPr/>
+        </p:nvSpPr>
+        <p:spPr>
+          <a:xfrm>
+            <a:off x="406301" y="4434929"/>
+            <a:ext cx="8498026" cy="213271"/>
+          </a:xfrm>
+          <a:prstGeom prst="rect">
+            <a:avLst/>
+          </a:prstGeom>
+          <a:noFill/>
+          <a:ln/>
+        </p:spPr>
+        <p:txBody>
+          <a:bodyPr wrap="square" lIns="0" tIns="0" rIns="0" bIns="0" rtlCol="0" anchor="t"/>
+          <a:lstStyle/>
+          <a:p>
+            <a:pPr algn="l" indent="0" marL="0">
+              <a:lnSpc>
+                <a:spcPts val="1680"/>
+              </a:lnSpc>
+              <a:spcBef>
+                <a:spcPts val="300"/>
+              </a:spcBef>
+              <a:spcAft>
+                <a:spcPts val="300"/>
+              </a:spcAft>
+              <a:buNone/>
+            </a:pPr>
+            <a:r>
+              <a:rPr lang="en-US" sz="1200" dirty="0">
+                <a:solidFill>
+                  <a:srgbClr val="1C2833"/>
+                </a:solidFill>
+                <a:latin typeface="Arial" pitchFamily="34" charset="0"/>
+                <a:ea typeface="Arial" pitchFamily="34" charset="-122"/>
+                <a:cs typeface="Arial" pitchFamily="34" charset="-120"/>
+              </a:rPr>
+              <a:t>Middle ·  · IKS Curriculum</a:t>
+            </a:r>
+            <a:endParaRPr lang="en-US" sz="1200" dirty="0"/>
+          </a:p>
+        </p:txBody>
+      </p:sp>
+    </p:spTree>
+  </p:cSld>
+  <p:clrMapOvr>
+    <a:masterClrMapping/>
+  </p:clrMapOvr>
+</p:sld>
+</file>
+
+<file path=ppt/slides/slide16.xml><?xml version="1.0" encoding="utf-8"?>
+<p:sld xmlns:a="http://schemas.openxmlformats.org/drawingml/2006/main" xmlns:r="http://schemas.openxmlformats.org/officeDocument/2006/relationships" xmlns:p="http://schemas.openxmlformats.org/presentationml/2006/main">
+  <p:cSld name="Slide 16">
+    <p:bg>
+      <p:bgPr>
+        <a:solidFill>
+          <a:srgbClr val="FFFFFF"/>
+        </a:solidFill>
+      </p:bgPr>
+    </p:bg>
+    <p:spTree>
+      <p:nvGrpSpPr>
+        <p:cNvPr id="1" name=""/>
+        <p:cNvGrpSpPr/>
+        <p:nvPr/>
+      </p:nvGrpSpPr>
+      <p:grpSpPr>
+        <a:xfrm>
+          <a:off x="0" y="0"/>
+          <a:ext cx="0" cy="0"/>
+          <a:chOff x="0" y="0"/>
+          <a:chExt cx="0" cy="0"/>
+        </a:xfrm>
+      </p:grpSpPr>
+      <p:sp>
+        <p:nvSpPr>
+          <p:cNvPr id="2" name="Text 0"/>
+          <p:cNvSpPr/>
+          <p:nvPr/>
+        </p:nvSpPr>
+        <p:spPr>
+          <a:xfrm>
+            <a:off x="0" y="0"/>
+            <a:ext cx="9144000" cy="101501"/>
+          </a:xfrm>
+          <a:prstGeom prst="rect">
+            <a:avLst/>
+          </a:prstGeom>
+          <a:solidFill>
+            <a:srgbClr val="277884"/>
+          </a:solidFill>
+          <a:ln/>
+        </p:spPr>
+        <p:txBody>
+          <a:bodyPr wrap="square" rtlCol="0" anchor="ctr"/>
+          <a:lstStyle/>
+          <a:p>
+            <a:pPr indent="0" marL="0">
+              <a:buNone/>
+            </a:pPr>
+            <a:endParaRPr lang="en-US" dirty="0"/>
+          </a:p>
+        </p:txBody>
+      </p:sp>
+      <p:sp>
+        <p:nvSpPr>
+          <p:cNvPr id="3" name="Text 1"/>
+          <p:cNvSpPr/>
+          <p:nvPr/>
+        </p:nvSpPr>
+        <p:spPr>
+          <a:xfrm>
+            <a:off x="406301" y="457051"/>
+            <a:ext cx="8498026" cy="274290"/>
+          </a:xfrm>
+          <a:prstGeom prst="rect">
+            <a:avLst/>
+          </a:prstGeom>
+          <a:noFill/>
+          <a:ln/>
+        </p:spPr>
+        <p:txBody>
+          <a:bodyPr wrap="square" lIns="0" tIns="0" rIns="0" bIns="0" rtlCol="0" anchor="t"/>
+          <a:lstStyle/>
+          <a:p>
+            <a:pPr algn="l" indent="0" marL="0">
+              <a:lnSpc>
+                <a:spcPts val="2160"/>
+              </a:lnSpc>
+              <a:spcBef>
+                <a:spcPts val="600"/>
+              </a:spcBef>
+              <a:spcAft>
+                <a:spcPts val="800"/>
+              </a:spcAft>
+              <a:buNone/>
+            </a:pPr>
+            <a:r>
+              <a:rPr lang="en-US" sz="1800" b="1" dirty="0">
+                <a:solidFill>
+                  <a:srgbClr val="FE4447"/>
+                </a:solidFill>
+                <a:latin typeface="Georgia" pitchFamily="34" charset="0"/>
+                <a:ea typeface="Georgia" pitchFamily="34" charset="-122"/>
+                <a:cs typeface="Georgia" pitchFamily="34" charset="-120"/>
+              </a:rPr>
+              <a:t>Differentiation</a:t>
+            </a:r>
+            <a:endParaRPr lang="en-US" sz="1800" dirty="0"/>
+          </a:p>
+        </p:txBody>
+      </p:sp>
+      <p:sp>
+        <p:nvSpPr>
+          <p:cNvPr id="4" name="Text 2"/>
+          <p:cNvSpPr/>
+          <p:nvPr/>
+        </p:nvSpPr>
+        <p:spPr>
+          <a:xfrm>
+            <a:off x="634901" y="883593"/>
+            <a:ext cx="8102798" cy="1142702"/>
+          </a:xfrm>
+          <a:prstGeom prst="rect">
+            <a:avLst/>
+          </a:prstGeom>
+          <a:noFill/>
+          <a:ln/>
+        </p:spPr>
+        <p:txBody>
+          <a:bodyPr wrap="square" lIns="0" tIns="0" rIns="0" bIns="0" rtlCol="0" anchor="t"/>
+          <a:lstStyle/>
+          <a:p>
+            <a:pPr algn="l" marL="342900" indent="-342900">
+              <a:lnSpc>
+                <a:spcPts val="1620"/>
+              </a:lnSpc>
+              <a:spcAft>
+                <a:spcPts val="300"/>
+              </a:spcAft>
+              <a:buSzPct val="100000"/>
+              <a:buChar char="•"/>
+            </a:pPr>
+            <a:r>
+              <a:rPr lang="en-US" sz="1200" b="1" dirty="0">
+                <a:solidFill>
+                  <a:srgbClr val="1C2833"/>
+                </a:solidFill>
+                <a:latin typeface="Arial" pitchFamily="34" charset="0"/>
+                <a:ea typeface="Arial" pitchFamily="34" charset="-122"/>
+                <a:cs typeface="Arial" pitchFamily="34" charset="-120"/>
+              </a:rPr>
+              <a:t>One tier up:</a:t>
+            </a:r>
+            <a:pPr algn="l" indent="0" marL="0">
+              <a:lnSpc>
+                <a:spcPts val="1620"/>
+              </a:lnSpc>
+              <a:spcAft>
+                <a:spcPts val="300"/>
+              </a:spcAft>
+              <a:buNone/>
+            </a:pPr>
+            <a:r>
+              <a:rPr lang="en-US" sz="1200" dirty="0">
+                <a:solidFill>
+                  <a:srgbClr val="1C2833"/>
+                </a:solidFill>
+                <a:latin typeface="Arial" pitchFamily="34" charset="0"/>
+                <a:ea typeface="Arial" pitchFamily="34" charset="-122"/>
+                <a:cs typeface="Arial" pitchFamily="34" charset="-120"/>
+              </a:rPr>
+              <a:t> Each pair preparing a "stretch" closer: a 30-second factoid the audience will remember (e.g. "Precession means in ~13,000 years, the December solstice will be in </a:t>
+            </a:r>
+            <a:pPr algn="l" indent="0" marL="0">
+              <a:lnSpc>
+                <a:spcPts val="1620"/>
+              </a:lnSpc>
+              <a:spcAft>
+                <a:spcPts val="300"/>
+              </a:spcAft>
+              <a:buNone/>
+            </a:pPr>
+            <a:r>
+              <a:rPr lang="en-US" sz="1200" i="1" dirty="0">
+                <a:solidFill>
+                  <a:srgbClr val="1C2833"/>
+                </a:solidFill>
+                <a:latin typeface="Arial" pitchFamily="34" charset="0"/>
+                <a:ea typeface="Arial" pitchFamily="34" charset="-122"/>
+                <a:cs typeface="Arial" pitchFamily="34" charset="-120"/>
+              </a:rPr>
+              <a:t>Karka</a:t>
+            </a:r>
+            <a:pPr algn="l" indent="0" marL="0">
+              <a:lnSpc>
+                <a:spcPts val="1620"/>
+              </a:lnSpc>
+              <a:spcAft>
+                <a:spcPts val="300"/>
+              </a:spcAft>
+              <a:buNone/>
+            </a:pPr>
+            <a:r>
+              <a:rPr lang="en-US" sz="1200" dirty="0">
+                <a:solidFill>
+                  <a:srgbClr val="1C2833"/>
+                </a:solidFill>
+                <a:latin typeface="Arial" pitchFamily="34" charset="0"/>
+                <a:ea typeface="Arial" pitchFamily="34" charset="-122"/>
+                <a:cs typeface="Arial" pitchFamily="34" charset="-120"/>
+              </a:rPr>
+              <a:t>, not </a:t>
+            </a:r>
+            <a:pPr algn="l" indent="0" marL="0">
+              <a:lnSpc>
+                <a:spcPts val="1620"/>
+              </a:lnSpc>
+              <a:spcAft>
+                <a:spcPts val="300"/>
+              </a:spcAft>
+              <a:buNone/>
+            </a:pPr>
+            <a:r>
+              <a:rPr lang="en-US" sz="1200" i="1" dirty="0">
+                <a:solidFill>
+                  <a:srgbClr val="1C2833"/>
+                </a:solidFill>
+                <a:latin typeface="Arial" pitchFamily="34" charset="0"/>
+                <a:ea typeface="Arial" pitchFamily="34" charset="-122"/>
+                <a:cs typeface="Arial" pitchFamily="34" charset="-120"/>
+              </a:rPr>
+              <a:t>Makara</a:t>
+            </a:r>
+            <a:pPr algn="l" indent="0" marL="0">
+              <a:lnSpc>
+                <a:spcPts val="1620"/>
+              </a:lnSpc>
+              <a:spcAft>
+                <a:spcPts val="300"/>
+              </a:spcAft>
+              <a:buNone/>
+            </a:pPr>
+            <a:r>
+              <a:rPr lang="en-US" sz="1200" dirty="0">
+                <a:solidFill>
+                  <a:srgbClr val="1C2833"/>
+                </a:solidFill>
+                <a:latin typeface="Arial" pitchFamily="34" charset="0"/>
+                <a:ea typeface="Arial" pitchFamily="34" charset="-122"/>
+                <a:cs typeface="Arial" pitchFamily="34" charset="-120"/>
+              </a:rPr>
+              <a:t>"). Confirm the factoid is astronomically accurate before they include it.</a:t>
+            </a:r>
+            <a:endParaRPr lang="en-US" sz="1200" dirty="0"/>
+          </a:p>
+          <a:p>
+            <a:pPr algn="l" marL="342900" indent="-342900">
+              <a:lnSpc>
+                <a:spcPts val="1620"/>
+              </a:lnSpc>
+              <a:spcAft>
+                <a:spcPts val="300"/>
+              </a:spcAft>
+              <a:buSzPct val="100000"/>
+              <a:buChar char="•"/>
+            </a:pPr>
+            <a:r>
+              <a:rPr lang="en-US" sz="1200" b="1" dirty="0">
+                <a:solidFill>
+                  <a:srgbClr val="1C2833"/>
+                </a:solidFill>
+                <a:latin typeface="Arial" pitchFamily="34" charset="0"/>
+                <a:ea typeface="Arial" pitchFamily="34" charset="-122"/>
+                <a:cs typeface="Arial" pitchFamily="34" charset="-120"/>
+              </a:rPr>
+              <a:t>One tier down:</a:t>
+            </a:r>
+            <a:pPr algn="l" indent="0" marL="0">
+              <a:lnSpc>
+                <a:spcPts val="1620"/>
+              </a:lnSpc>
+              <a:spcAft>
+                <a:spcPts val="300"/>
+              </a:spcAft>
+              <a:buNone/>
+            </a:pPr>
+            <a:r>
+              <a:rPr lang="en-US" sz="1200" dirty="0">
+                <a:solidFill>
+                  <a:srgbClr val="1C2833"/>
+                </a:solidFill>
+                <a:latin typeface="Arial" pitchFamily="34" charset="0"/>
+                <a:ea typeface="Arial" pitchFamily="34" charset="-122"/>
+                <a:cs typeface="Arial" pitchFamily="34" charset="-120"/>
+              </a:rPr>
+              <a:t> Skip the Babylonian table; just mention "the zodiac is shared between India, Greece, and the older Babylonian tradition." That's enough for a "Meets" presentation.</a:t>
+            </a:r>
+            <a:endParaRPr lang="en-US" sz="1200" dirty="0"/>
+          </a:p>
+        </p:txBody>
+      </p:sp>
+      <p:sp>
+        <p:nvSpPr>
+          <p:cNvPr id="5" name="Text 3"/>
+          <p:cNvSpPr/>
+          <p:nvPr/>
+        </p:nvSpPr>
+        <p:spPr>
+          <a:xfrm>
+            <a:off x="406301" y="4434929"/>
+            <a:ext cx="8498026" cy="213271"/>
+          </a:xfrm>
+          <a:prstGeom prst="rect">
+            <a:avLst/>
+          </a:prstGeom>
+          <a:noFill/>
+          <a:ln/>
+        </p:spPr>
+        <p:txBody>
+          <a:bodyPr wrap="square" lIns="0" tIns="0" rIns="0" bIns="0" rtlCol="0" anchor="t"/>
+          <a:lstStyle/>
+          <a:p>
+            <a:pPr algn="l" indent="0" marL="0">
+              <a:lnSpc>
+                <a:spcPts val="1680"/>
+              </a:lnSpc>
+              <a:spcBef>
+                <a:spcPts val="300"/>
+              </a:spcBef>
+              <a:spcAft>
+                <a:spcPts val="300"/>
+              </a:spcAft>
+              <a:buNone/>
+            </a:pPr>
+            <a:r>
+              <a:rPr lang="en-US" sz="1200" dirty="0">
+                <a:solidFill>
+                  <a:srgbClr val="1C2833"/>
+                </a:solidFill>
+                <a:latin typeface="Arial" pitchFamily="34" charset="0"/>
+                <a:ea typeface="Arial" pitchFamily="34" charset="-122"/>
+                <a:cs typeface="Arial" pitchFamily="34" charset="-120"/>
+              </a:rPr>
+              <a:t>Middle ·  · IKS Curriculum</a:t>
+            </a:r>
+            <a:endParaRPr lang="en-US" sz="1200" dirty="0"/>
+          </a:p>
+        </p:txBody>
+      </p:sp>
+    </p:spTree>
+  </p:cSld>
+  <p:clrMapOvr>
+    <a:masterClrMapping/>
+  </p:clrMapOvr>
+</p:sld>
+</file>
+
+<file path=ppt/slides/slide17.xml><?xml version="1.0" encoding="utf-8"?>
+<p:sld xmlns:a="http://schemas.openxmlformats.org/drawingml/2006/main" xmlns:r="http://schemas.openxmlformats.org/officeDocument/2006/relationships" xmlns:p="http://schemas.openxmlformats.org/presentationml/2006/main">
+  <p:cSld name="Slide 17">
+    <p:bg>
+      <p:bgPr>
+        <a:solidFill>
+          <a:srgbClr val="FFFFFF"/>
+        </a:solidFill>
+      </p:bgPr>
+    </p:bg>
+    <p:spTree>
+      <p:nvGrpSpPr>
+        <p:cNvPr id="1" name=""/>
+        <p:cNvGrpSpPr/>
+        <p:nvPr/>
+      </p:nvGrpSpPr>
+      <p:grpSpPr>
+        <a:xfrm>
+          <a:off x="0" y="0"/>
+          <a:ext cx="0" cy="0"/>
+          <a:chOff x="0" y="0"/>
+          <a:chExt cx="0" cy="0"/>
+        </a:xfrm>
+      </p:grpSpPr>
+      <p:sp>
+        <p:nvSpPr>
+          <p:cNvPr id="2" name="Text 0"/>
+          <p:cNvSpPr/>
+          <p:nvPr/>
+        </p:nvSpPr>
+        <p:spPr>
+          <a:xfrm>
+            <a:off x="0" y="0"/>
+            <a:ext cx="9144000" cy="101501"/>
+          </a:xfrm>
+          <a:prstGeom prst="rect">
+            <a:avLst/>
+          </a:prstGeom>
+          <a:solidFill>
+            <a:srgbClr val="277884"/>
+          </a:solidFill>
+          <a:ln/>
+        </p:spPr>
+        <p:txBody>
+          <a:bodyPr wrap="square" rtlCol="0" anchor="ctr"/>
+          <a:lstStyle/>
+          <a:p>
+            <a:pPr indent="0" marL="0">
+              <a:buNone/>
+            </a:pPr>
+            <a:endParaRPr lang="en-US" dirty="0"/>
+          </a:p>
+        </p:txBody>
+      </p:sp>
+      <p:sp>
+        <p:nvSpPr>
+          <p:cNvPr id="3" name="Text 1"/>
+          <p:cNvSpPr/>
+          <p:nvPr/>
+        </p:nvSpPr>
+        <p:spPr>
+          <a:xfrm>
+            <a:off x="406301" y="457051"/>
+            <a:ext cx="8498026" cy="274290"/>
+          </a:xfrm>
+          <a:prstGeom prst="rect">
+            <a:avLst/>
+          </a:prstGeom>
+          <a:noFill/>
+          <a:ln/>
+        </p:spPr>
+        <p:txBody>
+          <a:bodyPr wrap="square" lIns="0" tIns="0" rIns="0" bIns="0" rtlCol="0" anchor="t"/>
+          <a:lstStyle/>
+          <a:p>
+            <a:pPr algn="l" indent="0" marL="0">
+              <a:lnSpc>
+                <a:spcPts val="2160"/>
+              </a:lnSpc>
+              <a:spcBef>
+                <a:spcPts val="600"/>
+              </a:spcBef>
+              <a:spcAft>
+                <a:spcPts val="800"/>
+              </a:spcAft>
+              <a:buNone/>
+            </a:pPr>
+            <a:r>
+              <a:rPr lang="en-US" sz="1800" b="1" dirty="0">
+                <a:solidFill>
+                  <a:srgbClr val="FE4447"/>
+                </a:solidFill>
+                <a:latin typeface="Georgia" pitchFamily="34" charset="0"/>
+                <a:ea typeface="Georgia" pitchFamily="34" charset="-122"/>
+                <a:cs typeface="Georgia" pitchFamily="34" charset="-120"/>
+              </a:rPr>
+              <a:t>Teacher notes</a:t>
+            </a:r>
+            <a:endParaRPr lang="en-US" sz="1800" dirty="0"/>
+          </a:p>
+        </p:txBody>
+      </p:sp>
+      <p:sp>
+        <p:nvSpPr>
+          <p:cNvPr id="4" name="Text 2"/>
+          <p:cNvSpPr/>
+          <p:nvPr/>
+        </p:nvSpPr>
+        <p:spPr>
+          <a:xfrm>
+            <a:off x="634901" y="883593"/>
+            <a:ext cx="8102798" cy="1386483"/>
+          </a:xfrm>
+          <a:prstGeom prst="rect">
+            <a:avLst/>
+          </a:prstGeom>
+          <a:noFill/>
+          <a:ln/>
+        </p:spPr>
+        <p:txBody>
+          <a:bodyPr wrap="square" lIns="0" tIns="0" rIns="0" bIns="0" rtlCol="0" anchor="t"/>
+          <a:lstStyle/>
+          <a:p>
+            <a:pPr algn="l" marL="342900" indent="-342900">
+              <a:lnSpc>
+                <a:spcPts val="1620"/>
+              </a:lnSpc>
+              <a:spcAft>
+                <a:spcPts val="300"/>
+              </a:spcAft>
+              <a:buSzPct val="100000"/>
+              <a:buChar char="•"/>
+            </a:pPr>
+            <a:r>
+              <a:rPr lang="en-US" sz="1200" dirty="0">
+                <a:solidFill>
+                  <a:srgbClr val="1C2833"/>
+                </a:solidFill>
+                <a:latin typeface="Arial" pitchFamily="34" charset="0"/>
+                <a:ea typeface="Arial" pitchFamily="34" charset="-122"/>
+                <a:cs typeface="Arial" pitchFamily="34" charset="-120"/>
+              </a:rPr>
+              <a:t>A small but real risk: a pair invents a Sanskrit etymology to "explain" a Greek name. Catch this — don't let invented etymology into a presentation.</a:t>
+            </a:r>
+            <a:endParaRPr lang="en-US" sz="1200" dirty="0"/>
+          </a:p>
+          <a:p>
+            <a:pPr algn="l" marL="342900" indent="-342900">
+              <a:lnSpc>
+                <a:spcPts val="1620"/>
+              </a:lnSpc>
+              <a:spcAft>
+                <a:spcPts val="300"/>
+              </a:spcAft>
+              <a:buSzPct val="100000"/>
+              <a:buChar char="•"/>
+            </a:pPr>
+            <a:r>
+              <a:rPr lang="en-US" sz="1200" dirty="0">
+                <a:solidFill>
+                  <a:srgbClr val="1C2833"/>
+                </a:solidFill>
+                <a:latin typeface="Arial" pitchFamily="34" charset="0"/>
+                <a:ea typeface="Arial" pitchFamily="34" charset="-122"/>
+                <a:cs typeface="Arial" pitchFamily="34" charset="-120"/>
+              </a:rPr>
+              <a:t>The Babylonian names contain Akkadian / Sumerian cuneiform transliterations (LU.ḪUN.GÁ, etc.). Don't drill these — they're for visual comparison, not memorisation.</a:t>
+            </a:r>
+            <a:endParaRPr lang="en-US" sz="1200" dirty="0"/>
+          </a:p>
+          <a:p>
+            <a:pPr algn="l" marL="342900" indent="-342900">
+              <a:lnSpc>
+                <a:spcPts val="1620"/>
+              </a:lnSpc>
+              <a:spcAft>
+                <a:spcPts val="300"/>
+              </a:spcAft>
+              <a:buSzPct val="100000"/>
+              <a:buChar char="•"/>
+            </a:pPr>
+            <a:r>
+              <a:rPr lang="en-US" sz="1200" dirty="0">
+                <a:solidFill>
+                  <a:srgbClr val="1C2833"/>
+                </a:solidFill>
+                <a:latin typeface="Arial" pitchFamily="34" charset="0"/>
+                <a:ea typeface="Arial" pitchFamily="34" charset="-122"/>
+                <a:cs typeface="Arial" pitchFamily="34" charset="-120"/>
+              </a:rPr>
+              <a:t>Lateness on the wheel is acceptable as long as the presentation is rehearsed. Better an unfinished but well-explained wheel than a beautiful unstructured one.</a:t>
+            </a:r>
+            <a:endParaRPr lang="en-US" sz="1200" dirty="0"/>
+          </a:p>
+        </p:txBody>
+      </p:sp>
+      <p:sp>
+        <p:nvSpPr>
+          <p:cNvPr id="5" name="Text 3"/>
+          <p:cNvSpPr/>
+          <p:nvPr/>
+        </p:nvSpPr>
+        <p:spPr>
+          <a:xfrm>
+            <a:off x="406301" y="4434929"/>
+            <a:ext cx="8498026" cy="213271"/>
+          </a:xfrm>
+          <a:prstGeom prst="rect">
+            <a:avLst/>
+          </a:prstGeom>
+          <a:noFill/>
+          <a:ln/>
+        </p:spPr>
+        <p:txBody>
+          <a:bodyPr wrap="square" lIns="0" tIns="0" rIns="0" bIns="0" rtlCol="0" anchor="t"/>
+          <a:lstStyle/>
+          <a:p>
+            <a:pPr algn="l" indent="0" marL="0">
+              <a:lnSpc>
+                <a:spcPts val="1680"/>
+              </a:lnSpc>
+              <a:spcBef>
+                <a:spcPts val="300"/>
+              </a:spcBef>
+              <a:spcAft>
+                <a:spcPts val="300"/>
+              </a:spcAft>
+              <a:buNone/>
+            </a:pPr>
+            <a:r>
+              <a:rPr lang="en-US" sz="1200" dirty="0">
+                <a:solidFill>
+                  <a:srgbClr val="1C2833"/>
+                </a:solidFill>
+                <a:latin typeface="Arial" pitchFamily="34" charset="0"/>
+                <a:ea typeface="Arial" pitchFamily="34" charset="-122"/>
+                <a:cs typeface="Arial" pitchFamily="34" charset="-120"/>
+              </a:rPr>
+              <a:t>Middle ·  · IKS Curriculum</a:t>
+            </a:r>
+            <a:endParaRPr lang="en-US" sz="1200" dirty="0"/>
+          </a:p>
+        </p:txBody>
+      </p:sp>
+    </p:spTree>
+  </p:cSld>
+  <p:clrMapOvr>
+    <a:masterClrMapping/>
+  </p:clrMapOvr>
+</p:sld>
+</file>
+
+<file path=ppt/slides/slide18.xml><?xml version="1.0" encoding="utf-8"?>
+<p:sld xmlns:a="http://schemas.openxmlformats.org/drawingml/2006/main" xmlns:r="http://schemas.openxmlformats.org/officeDocument/2006/relationships" xmlns:p="http://schemas.openxmlformats.org/presentationml/2006/main">
+  <p:cSld name="Slide 18">
+    <p:bg>
+      <p:bgPr>
+        <a:solidFill>
+          <a:srgbClr val="FFFFFF"/>
+        </a:solidFill>
+      </p:bgPr>
+    </p:bg>
+    <p:spTree>
+      <p:nvGrpSpPr>
+        <p:cNvPr id="1" name=""/>
+        <p:cNvGrpSpPr/>
+        <p:nvPr/>
+      </p:nvGrpSpPr>
+      <p:grpSpPr>
+        <a:xfrm>
+          <a:off x="0" y="0"/>
+          <a:ext cx="0" cy="0"/>
+          <a:chOff x="0" y="0"/>
+          <a:chExt cx="0" cy="0"/>
+        </a:xfrm>
+      </p:grpSpPr>
+      <p:sp>
+        <p:nvSpPr>
+          <p:cNvPr id="2" name="Text 0"/>
+          <p:cNvSpPr/>
+          <p:nvPr/>
+        </p:nvSpPr>
+        <p:spPr>
+          <a:xfrm>
+            <a:off x="0" y="0"/>
+            <a:ext cx="9144000" cy="101501"/>
+          </a:xfrm>
+          <a:prstGeom prst="rect">
+            <a:avLst/>
+          </a:prstGeom>
+          <a:solidFill>
+            <a:srgbClr val="277884"/>
+          </a:solidFill>
+          <a:ln/>
+        </p:spPr>
+        <p:txBody>
+          <a:bodyPr wrap="square" rtlCol="0" anchor="ctr"/>
+          <a:lstStyle/>
+          <a:p>
+            <a:pPr indent="0" marL="0">
+              <a:buNone/>
+            </a:pPr>
+            <a:endParaRPr lang="en-US" dirty="0"/>
+          </a:p>
+        </p:txBody>
+      </p:sp>
+      <p:sp>
+        <p:nvSpPr>
+          <p:cNvPr id="3" name="Text 1"/>
+          <p:cNvSpPr/>
+          <p:nvPr/>
+        </p:nvSpPr>
+        <p:spPr>
+          <a:xfrm>
+            <a:off x="406301" y="457051"/>
+            <a:ext cx="8498026" cy="274290"/>
+          </a:xfrm>
+          <a:prstGeom prst="rect">
+            <a:avLst/>
+          </a:prstGeom>
+          <a:noFill/>
+          <a:ln/>
+        </p:spPr>
+        <p:txBody>
+          <a:bodyPr wrap="square" lIns="0" tIns="0" rIns="0" bIns="0" rtlCol="0" anchor="t"/>
+          <a:lstStyle/>
+          <a:p>
+            <a:pPr algn="l" indent="0" marL="0">
+              <a:lnSpc>
+                <a:spcPts val="2160"/>
+              </a:lnSpc>
+              <a:spcBef>
+                <a:spcPts val="600"/>
+              </a:spcBef>
+              <a:spcAft>
+                <a:spcPts val="800"/>
+              </a:spcAft>
+              <a:buNone/>
+            </a:pPr>
+            <a:r>
+              <a:rPr lang="en-US" sz="1800" b="1" dirty="0">
+                <a:solidFill>
+                  <a:srgbClr val="FE4447"/>
+                </a:solidFill>
+                <a:latin typeface="Georgia" pitchFamily="34" charset="0"/>
+                <a:ea typeface="Georgia" pitchFamily="34" charset="-122"/>
+                <a:cs typeface="Georgia" pitchFamily="34" charset="-120"/>
+              </a:rPr>
+              <a:t>Homework</a:t>
+            </a:r>
+            <a:endParaRPr lang="en-US" sz="1800" dirty="0"/>
+          </a:p>
+        </p:txBody>
+      </p:sp>
+      <p:sp>
+        <p:nvSpPr>
+          <p:cNvPr id="4" name="Text 2"/>
+          <p:cNvSpPr/>
+          <p:nvPr/>
+        </p:nvSpPr>
+        <p:spPr>
+          <a:xfrm>
+            <a:off x="634901" y="883593"/>
+            <a:ext cx="8102798" cy="1744563"/>
+          </a:xfrm>
+          <a:prstGeom prst="rect">
+            <a:avLst/>
+          </a:prstGeom>
+          <a:noFill/>
+          <a:ln/>
+        </p:spPr>
+        <p:txBody>
+          <a:bodyPr wrap="square" lIns="0" tIns="0" rIns="0" bIns="0" rtlCol="0" anchor="t"/>
+          <a:lstStyle/>
+          <a:p>
+            <a:pPr algn="l" marL="342900" indent="-342900">
+              <a:lnSpc>
+                <a:spcPts val="1620"/>
+              </a:lnSpc>
+              <a:spcAft>
+                <a:spcPts val="300"/>
+              </a:spcAft>
+              <a:buSzPct val="100000"/>
+              <a:buChar char="•"/>
+            </a:pPr>
+            <a:r>
+              <a:rPr lang="en-US" sz="1200" dirty="0">
+                <a:solidFill>
+                  <a:srgbClr val="1C2833"/>
+                </a:solidFill>
+                <a:latin typeface="Arial" pitchFamily="34" charset="0"/>
+                <a:ea typeface="Arial" pitchFamily="34" charset="-122"/>
+                <a:cs typeface="Arial" pitchFamily="34" charset="-120"/>
+              </a:rPr>
+              <a:t>Final touches. By tomorrow morning, the wheel should be:</a:t>
+            </a:r>
+            <a:endParaRPr lang="en-US" sz="1200" dirty="0"/>
+          </a:p>
+          <a:p>
+            <a:pPr algn="l" marL="342900" indent="-342900">
+              <a:lnSpc>
+                <a:spcPts val="1620"/>
+              </a:lnSpc>
+              <a:spcAft>
+                <a:spcPts val="300"/>
+              </a:spcAft>
+              <a:buSzPct val="100000"/>
+              <a:buChar char="•"/>
+            </a:pPr>
+            <a:r>
+              <a:rPr lang="en-US" sz="1200" dirty="0">
+                <a:solidFill>
+                  <a:srgbClr val="1C2833"/>
+                </a:solidFill>
+                <a:latin typeface="Arial" pitchFamily="34" charset="0"/>
+                <a:ea typeface="Arial" pitchFamily="34" charset="-122"/>
+                <a:cs typeface="Arial" pitchFamily="34" charset="-120"/>
+              </a:rPr>
+              <a:t>[ ] Labelled in Sanskrit and English / Greek</a:t>
+            </a:r>
+            <a:endParaRPr lang="en-US" sz="1200" dirty="0"/>
+          </a:p>
+          <a:p>
+            <a:pPr algn="l" marL="342900" indent="-342900">
+              <a:lnSpc>
+                <a:spcPts val="1620"/>
+              </a:lnSpc>
+              <a:spcAft>
+                <a:spcPts val="300"/>
+              </a:spcAft>
+              <a:buSzPct val="100000"/>
+              <a:buChar char="•"/>
+            </a:pPr>
+            <a:r>
+              <a:rPr lang="en-US" sz="1200" dirty="0">
+                <a:solidFill>
+                  <a:srgbClr val="1C2833"/>
+                </a:solidFill>
+                <a:latin typeface="Arial" pitchFamily="34" charset="0"/>
+                <a:ea typeface="Arial" pitchFamily="34" charset="-122"/>
+                <a:cs typeface="Arial" pitchFamily="34" charset="-120"/>
+              </a:rPr>
+              <a:t>[ ] Coloured legibly</a:t>
+            </a:r>
+            <a:endParaRPr lang="en-US" sz="1200" dirty="0"/>
+          </a:p>
+          <a:p>
+            <a:pPr algn="l" marL="342900" indent="-342900">
+              <a:lnSpc>
+                <a:spcPts val="1620"/>
+              </a:lnSpc>
+              <a:spcAft>
+                <a:spcPts val="300"/>
+              </a:spcAft>
+              <a:buSzPct val="100000"/>
+              <a:buChar char="•"/>
+            </a:pPr>
+            <a:r>
+              <a:rPr lang="en-US" sz="1200" dirty="0">
+                <a:solidFill>
+                  <a:srgbClr val="1C2833"/>
+                </a:solidFill>
+                <a:latin typeface="Arial" pitchFamily="34" charset="0"/>
+                <a:ea typeface="Arial" pitchFamily="34" charset="-122"/>
+                <a:cs typeface="Arial" pitchFamily="34" charset="-120"/>
+              </a:rPr>
+              <a:t>[ ] Showing all four turning-points with dual </a:t>
+            </a:r>
+            <a:pPr algn="l" indent="0" marL="0">
+              <a:lnSpc>
+                <a:spcPts val="1620"/>
+              </a:lnSpc>
+              <a:spcAft>
+                <a:spcPts val="300"/>
+              </a:spcAft>
+              <a:buNone/>
+            </a:pPr>
+            <a:r>
+              <a:rPr lang="en-US" sz="1200" i="1" dirty="0">
+                <a:solidFill>
+                  <a:srgbClr val="1C2833"/>
+                </a:solidFill>
+                <a:latin typeface="Arial" pitchFamily="34" charset="0"/>
+                <a:ea typeface="Arial" pitchFamily="34" charset="-122"/>
+                <a:cs typeface="Arial" pitchFamily="34" charset="-120"/>
+              </a:rPr>
+              <a:t>sāyana</a:t>
+            </a:r>
+            <a:pPr algn="l" indent="0" marL="0">
+              <a:lnSpc>
+                <a:spcPts val="1620"/>
+              </a:lnSpc>
+              <a:spcAft>
+                <a:spcPts val="300"/>
+              </a:spcAft>
+              <a:buNone/>
+            </a:pPr>
+            <a:r>
+              <a:rPr lang="en-US" sz="1200" dirty="0">
+                <a:solidFill>
+                  <a:srgbClr val="1C2833"/>
+                </a:solidFill>
+                <a:latin typeface="Arial" pitchFamily="34" charset="0"/>
+                <a:ea typeface="Arial" pitchFamily="34" charset="-122"/>
+                <a:cs typeface="Arial" pitchFamily="34" charset="-120"/>
+              </a:rPr>
               <a:t> / </a:t>
             </a:r>
             <a:pPr algn="l" indent="0" marL="0">
               <a:lnSpc>
-                <a:spcPts val="1680"/>
-              </a:lnSpc>
-              <a:spcBef>
-                <a:spcPts val="300"/>
-              </a:spcBef>
+                <a:spcPts val="1620"/>
+              </a:lnSpc>
               <a:spcAft>
                 <a:spcPts val="300"/>
               </a:spcAft>
@@ -3061,26 +5682,95 @@
             </a:r>
             <a:pPr algn="l" indent="0" marL="0">
               <a:lnSpc>
-                <a:spcPts val="1680"/>
-              </a:lnSpc>
-              <a:spcBef>
-                <a:spcPts val="300"/>
-              </a:spcBef>
-              <a:spcAft>
-                <a:spcPts val="300"/>
-              </a:spcAft>
-              <a:buNone/>
-            </a:pPr>
-            <a:r>
-              <a:rPr lang="en-US" sz="1200" dirty="0">
-                <a:solidFill>
-                  <a:srgbClr val="1C2833"/>
-                </a:solidFill>
-                <a:latin typeface="Arial" pitchFamily="34" charset="0"/>
-                <a:ea typeface="Arial" pitchFamily="34" charset="-122"/>
-                <a:cs typeface="Arial" pitchFamily="34" charset="-120"/>
-              </a:rPr>
-              <a:t> dates - [ ] Including at least one cross-cultural reference - [ ] Accompanied by a 4–6 sentence explanation - [ ] Ready for a 3-minute presentation by both partners</a:t>
+                <a:spcPts val="1620"/>
+              </a:lnSpc>
+              <a:spcAft>
+                <a:spcPts val="300"/>
+              </a:spcAft>
+              <a:buNone/>
+            </a:pPr>
+            <a:r>
+              <a:rPr lang="en-US" sz="1200" dirty="0">
+                <a:solidFill>
+                  <a:srgbClr val="1C2833"/>
+                </a:solidFill>
+                <a:latin typeface="Arial" pitchFamily="34" charset="0"/>
+                <a:ea typeface="Arial" pitchFamily="34" charset="-122"/>
+                <a:cs typeface="Arial" pitchFamily="34" charset="-120"/>
+              </a:rPr>
+              <a:t> dates</a:t>
+            </a:r>
+            <a:endParaRPr lang="en-US" sz="1200" dirty="0"/>
+          </a:p>
+          <a:p>
+            <a:pPr algn="l" marL="342900" indent="-342900">
+              <a:lnSpc>
+                <a:spcPts val="1620"/>
+              </a:lnSpc>
+              <a:spcAft>
+                <a:spcPts val="300"/>
+              </a:spcAft>
+              <a:buSzPct val="100000"/>
+              <a:buChar char="•"/>
+            </a:pPr>
+            <a:r>
+              <a:rPr lang="en-US" sz="1200" dirty="0">
+                <a:solidFill>
+                  <a:srgbClr val="1C2833"/>
+                </a:solidFill>
+                <a:latin typeface="Arial" pitchFamily="34" charset="0"/>
+                <a:ea typeface="Arial" pitchFamily="34" charset="-122"/>
+                <a:cs typeface="Arial" pitchFamily="34" charset="-120"/>
+              </a:rPr>
+              <a:t>[ ] Including at least one cross-cultural reference</a:t>
+            </a:r>
+            <a:endParaRPr lang="en-US" sz="1200" dirty="0"/>
+          </a:p>
+          <a:p>
+            <a:pPr algn="l" marL="342900" indent="-342900">
+              <a:lnSpc>
+                <a:spcPts val="1620"/>
+              </a:lnSpc>
+              <a:spcAft>
+                <a:spcPts val="300"/>
+              </a:spcAft>
+              <a:buSzPct val="100000"/>
+              <a:buChar char="•"/>
+            </a:pPr>
+            <a:r>
+              <a:rPr lang="en-US" sz="1200" dirty="0">
+                <a:solidFill>
+                  <a:srgbClr val="1C2833"/>
+                </a:solidFill>
+                <a:latin typeface="Arial" pitchFamily="34" charset="0"/>
+                <a:ea typeface="Arial" pitchFamily="34" charset="-122"/>
+                <a:cs typeface="Arial" pitchFamily="34" charset="-120"/>
+              </a:rPr>
+              <a:t>[ ] Accompanied by a 4–6 sentence explanation</a:t>
+            </a:r>
+            <a:endParaRPr lang="en-US" sz="1200" dirty="0"/>
+          </a:p>
+          <a:p>
+            <a:pPr algn="l" marL="342900" indent="-342900">
+              <a:lnSpc>
+                <a:spcPts val="1620"/>
+              </a:lnSpc>
+              <a:spcAft>
+                <a:spcPts val="300"/>
+              </a:spcAft>
+              <a:buSzPct val="100000"/>
+              <a:buChar char="•"/>
+            </a:pPr>
+            <a:r>
+              <a:rPr lang="en-US" sz="1200" dirty="0">
+                <a:solidFill>
+                  <a:srgbClr val="1C2833"/>
+                </a:solidFill>
+                <a:latin typeface="Arial" pitchFamily="34" charset="0"/>
+                <a:ea typeface="Arial" pitchFamily="34" charset="-122"/>
+                <a:cs typeface="Arial" pitchFamily="34" charset="-120"/>
+              </a:rPr>
+              <a:t>[ ] Ready for a 3-minute presentation by both partners</a:t>
             </a:r>
             <a:endParaRPr lang="en-US" sz="1200" dirty="0"/>
           </a:p>
@@ -3238,7 +5928,7 @@
                 <a:ea typeface="Georgia" pitchFamily="34" charset="-122"/>
                 <a:cs typeface="Georgia" pitchFamily="34" charset="-120"/>
               </a:rPr>
-              <a:t>Materials</a:t>
+              <a:t>Learning objective</a:t>
             </a:r>
             <a:endParaRPr lang="en-US" sz="1800" dirty="0"/>
           </a:p>
@@ -3253,7 +5943,7 @@
         <p:spPr>
           <a:xfrm>
             <a:off x="406301" y="870942"/>
-            <a:ext cx="8498026" cy="436066"/>
+            <a:ext cx="8498026" cy="426541"/>
           </a:xfrm>
           <a:prstGeom prst="rect">
             <a:avLst/>
@@ -3286,7 +5976,7 @@
                 <a:ea typeface="Arial" pitchFamily="34" charset="-122"/>
                 <a:cs typeface="Arial" pitchFamily="34" charset="-120"/>
               </a:rPr>
-              <a:t>– The in-progress </a:t>
+              <a:t>By the end of this session, every pair has a presentation-ready </a:t>
             </a:r>
             <a:pPr algn="l" indent="0" marL="0">
               <a:lnSpc>
@@ -3332,99 +6022,7 @@
                 <a:ea typeface="Arial" pitchFamily="34" charset="-122"/>
                 <a:cs typeface="Arial" pitchFamily="34" charset="-120"/>
               </a:rPr>
-              <a:t>-wheel from Day 8 – Reference printout: Sanskrit / Greek / Babylonian zodiac names side by side (provided below in </a:t>
-            </a:r>
-            <a:pPr algn="l" indent="0" marL="0">
-              <a:lnSpc>
-                <a:spcPts val="1680"/>
-              </a:lnSpc>
-              <a:spcBef>
-                <a:spcPts val="300"/>
-              </a:spcBef>
-              <a:spcAft>
-                <a:spcPts val="300"/>
-              </a:spcAft>
-              <a:buNone/>
-            </a:pPr>
-            <a:r>
-              <a:rPr lang="en-US" sz="1200" i="1" dirty="0">
-                <a:solidFill>
-                  <a:srgbClr val="1C2833"/>
-                </a:solidFill>
-                <a:latin typeface="Arial" pitchFamily="34" charset="0"/>
-                <a:ea typeface="Arial" pitchFamily="34" charset="-122"/>
-                <a:cs typeface="Arial" pitchFamily="34" charset="-120"/>
-              </a:rPr>
-              <a:t>Cross-cultural reference</a:t>
-            </a:r>
-            <a:pPr algn="l" indent="0" marL="0">
-              <a:lnSpc>
-                <a:spcPts val="1680"/>
-              </a:lnSpc>
-              <a:spcBef>
-                <a:spcPts val="300"/>
-              </a:spcBef>
-              <a:spcAft>
-                <a:spcPts val="300"/>
-              </a:spcAft>
-              <a:buNone/>
-            </a:pPr>
-            <a:r>
-              <a:rPr lang="en-US" sz="1200" dirty="0">
-                <a:solidFill>
-                  <a:srgbClr val="1C2833"/>
-                </a:solidFill>
-                <a:latin typeface="Arial" pitchFamily="34" charset="0"/>
-                <a:ea typeface="Arial" pitchFamily="34" charset="-122"/>
-                <a:cs typeface="Arial" pitchFamily="34" charset="-120"/>
-              </a:rPr>
-              <a:t>) – Stopwatch / phone timer – The rubric (</a:t>
-            </a:r>
-            <a:pPr algn="l" indent="0" marL="0">
-              <a:lnSpc>
-                <a:spcPts val="1680"/>
-              </a:lnSpc>
-              <a:spcBef>
-                <a:spcPts val="300"/>
-              </a:spcBef>
-              <a:spcAft>
-                <a:spcPts val="300"/>
-              </a:spcAft>
-              <a:buNone/>
-            </a:pPr>
-            <a:r>
-              <a:rPr lang="en-US" sz="1200" dirty="0">
-                <a:solidFill>
-                  <a:srgbClr val="1C2833"/>
-                </a:solidFill>
-                <a:latin typeface="Arial" pitchFamily="34" charset="0"/>
-                <a:ea typeface="Arial" pitchFamily="34" charset="-122"/>
-                <a:cs typeface="Arial" pitchFamily="34" charset="-120"/>
-              </a:rPr>
-              <a:t>assessments/rubric.md</a:t>
-            </a:r>
-            <a:pPr algn="l" indent="0" marL="0">
-              <a:lnSpc>
-                <a:spcPts val="1680"/>
-              </a:lnSpc>
-              <a:spcBef>
-                <a:spcPts val="300"/>
-              </a:spcBef>
-              <a:spcAft>
-                <a:spcPts val="300"/>
-              </a:spcAft>
-              <a:buNone/>
-            </a:pPr>
-            <a:r>
-              <a:rPr lang="en-US" sz="1200" dirty="0">
-                <a:solidFill>
-                  <a:srgbClr val="1C2833"/>
-                </a:solidFill>
-                <a:latin typeface="Arial" pitchFamily="34" charset="0"/>
-                <a:ea typeface="Arial" pitchFamily="34" charset="-122"/>
-                <a:cs typeface="Arial" pitchFamily="34" charset="-120"/>
-              </a:rPr>
-              <a:t>)</a:t>
+              <a:t>-wheel including a cross-cultural comparison element (Greek / Babylonian / Gregorian) and a rehearsed 3-minute presentation script.</a:t>
             </a:r>
             <a:endParaRPr lang="en-US" sz="1200" dirty="0"/>
           </a:p>
@@ -3582,7 +6180,7 @@
                 <a:ea typeface="Georgia" pitchFamily="34" charset="-122"/>
                 <a:cs typeface="Georgia" pitchFamily="34" charset="-120"/>
               </a:rPr>
-              <a:t>Cross-cultural reference</a:t>
+              <a:t>Materials</a:t>
             </a:r>
             <a:endParaRPr lang="en-US" sz="1800" dirty="0"/>
           </a:p>
@@ -3596,8 +6194,8 @@
         </p:nvSpPr>
         <p:spPr>
           <a:xfrm>
-            <a:off x="406301" y="870942"/>
-            <a:ext cx="8498026" cy="213271"/>
+            <a:off x="634901" y="883593"/>
+            <a:ext cx="8102798" cy="1237952"/>
           </a:xfrm>
           <a:prstGeom prst="rect">
             <a:avLst/>
@@ -3609,28 +6207,218 @@
           <a:bodyPr wrap="square" lIns="0" tIns="0" rIns="0" bIns="0" rtlCol="0" anchor="t"/>
           <a:lstStyle/>
           <a:p>
-            <a:pPr algn="l" indent="0" marL="0">
-              <a:lnSpc>
-                <a:spcPts val="1680"/>
-              </a:lnSpc>
-              <a:spcBef>
-                <a:spcPts val="300"/>
-              </a:spcBef>
-              <a:spcAft>
-                <a:spcPts val="300"/>
-              </a:spcAft>
-              <a:buNone/>
-            </a:pPr>
-            <a:r>
-              <a:rPr lang="en-US" sz="1200" dirty="0">
-                <a:solidFill>
-                  <a:srgbClr val="1C2833"/>
-                </a:solidFill>
-                <a:latin typeface="Arial" pitchFamily="34" charset="0"/>
-                <a:ea typeface="Arial" pitchFamily="34" charset="-122"/>
-                <a:cs typeface="Arial" pitchFamily="34" charset="-120"/>
-              </a:rPr>
-              <a:t>The 12 zodiac signs across three traditions:</a:t>
+            <a:pPr algn="l" marL="342900" indent="-342900">
+              <a:lnSpc>
+                <a:spcPts val="1620"/>
+              </a:lnSpc>
+              <a:spcAft>
+                <a:spcPts val="300"/>
+              </a:spcAft>
+              <a:buSzPct val="100000"/>
+              <a:buChar char="•"/>
+            </a:pPr>
+            <a:r>
+              <a:rPr lang="en-US" sz="1200" dirty="0">
+                <a:solidFill>
+                  <a:srgbClr val="1C2833"/>
+                </a:solidFill>
+                <a:latin typeface="Arial" pitchFamily="34" charset="0"/>
+                <a:ea typeface="Arial" pitchFamily="34" charset="-122"/>
+                <a:cs typeface="Arial" pitchFamily="34" charset="-120"/>
+              </a:rPr>
+              <a:t>The in-progress </a:t>
+            </a:r>
+            <a:pPr algn="l" indent="0" marL="0">
+              <a:lnSpc>
+                <a:spcPts val="1620"/>
+              </a:lnSpc>
+              <a:spcAft>
+                <a:spcPts val="300"/>
+              </a:spcAft>
+              <a:buNone/>
+            </a:pPr>
+            <a:r>
+              <a:rPr lang="en-US" sz="1200" i="1" dirty="0">
+                <a:solidFill>
+                  <a:srgbClr val="1C2833"/>
+                </a:solidFill>
+                <a:latin typeface="Arial" pitchFamily="34" charset="0"/>
+                <a:ea typeface="Arial" pitchFamily="34" charset="-122"/>
+                <a:cs typeface="Arial" pitchFamily="34" charset="-120"/>
+              </a:rPr>
+              <a:t>rāśi</a:t>
+            </a:r>
+            <a:pPr algn="l" indent="0" marL="0">
+              <a:lnSpc>
+                <a:spcPts val="1620"/>
+              </a:lnSpc>
+              <a:spcAft>
+                <a:spcPts val="300"/>
+              </a:spcAft>
+              <a:buNone/>
+            </a:pPr>
+            <a:r>
+              <a:rPr lang="en-US" sz="1200" dirty="0">
+                <a:solidFill>
+                  <a:srgbClr val="1C2833"/>
+                </a:solidFill>
+                <a:latin typeface="Arial" pitchFamily="34" charset="0"/>
+                <a:ea typeface="Arial" pitchFamily="34" charset="-122"/>
+                <a:cs typeface="Arial" pitchFamily="34" charset="-120"/>
+              </a:rPr>
+              <a:t>-wheel from Day 8</a:t>
+            </a:r>
+            <a:endParaRPr lang="en-US" sz="1200" dirty="0"/>
+          </a:p>
+          <a:p>
+            <a:pPr algn="l" marL="342900" indent="-342900">
+              <a:lnSpc>
+                <a:spcPts val="1620"/>
+              </a:lnSpc>
+              <a:spcAft>
+                <a:spcPts val="300"/>
+              </a:spcAft>
+              <a:buSzPct val="100000"/>
+              <a:buChar char="•"/>
+            </a:pPr>
+            <a:r>
+              <a:rPr lang="en-US" sz="1200" dirty="0">
+                <a:solidFill>
+                  <a:srgbClr val="1C2833"/>
+                </a:solidFill>
+                <a:latin typeface="Arial" pitchFamily="34" charset="0"/>
+                <a:ea typeface="Arial" pitchFamily="34" charset="-122"/>
+                <a:cs typeface="Arial" pitchFamily="34" charset="-120"/>
+              </a:rPr>
+              <a:t>Reference printout: Sanskrit / Greek / Babylonian zodiac names side by side (provided below in </a:t>
+            </a:r>
+            <a:pPr algn="l" indent="0" marL="0">
+              <a:lnSpc>
+                <a:spcPts val="1620"/>
+              </a:lnSpc>
+              <a:spcAft>
+                <a:spcPts val="300"/>
+              </a:spcAft>
+              <a:buNone/>
+            </a:pPr>
+            <a:r>
+              <a:rPr lang="en-US" sz="1200" i="1" dirty="0">
+                <a:solidFill>
+                  <a:srgbClr val="1C2833"/>
+                </a:solidFill>
+                <a:latin typeface="Arial" pitchFamily="34" charset="0"/>
+                <a:ea typeface="Arial" pitchFamily="34" charset="-122"/>
+                <a:cs typeface="Arial" pitchFamily="34" charset="-120"/>
+              </a:rPr>
+              <a:t>Cross-cultural reference</a:t>
+            </a:r>
+            <a:pPr algn="l" indent="0" marL="0">
+              <a:lnSpc>
+                <a:spcPts val="1620"/>
+              </a:lnSpc>
+              <a:spcAft>
+                <a:spcPts val="300"/>
+              </a:spcAft>
+              <a:buNone/>
+            </a:pPr>
+            <a:r>
+              <a:rPr lang="en-US" sz="1200" dirty="0">
+                <a:solidFill>
+                  <a:srgbClr val="1C2833"/>
+                </a:solidFill>
+                <a:latin typeface="Arial" pitchFamily="34" charset="0"/>
+                <a:ea typeface="Arial" pitchFamily="34" charset="-122"/>
+                <a:cs typeface="Arial" pitchFamily="34" charset="-120"/>
+              </a:rPr>
+              <a:t>)</a:t>
+            </a:r>
+            <a:endParaRPr lang="en-US" sz="1200" dirty="0"/>
+          </a:p>
+          <a:p>
+            <a:pPr algn="l" marL="342900" indent="-342900">
+              <a:lnSpc>
+                <a:spcPts val="1620"/>
+              </a:lnSpc>
+              <a:spcAft>
+                <a:spcPts val="300"/>
+              </a:spcAft>
+              <a:buSzPct val="100000"/>
+              <a:buChar char="•"/>
+            </a:pPr>
+            <a:r>
+              <a:rPr lang="en-US" sz="1200" dirty="0">
+                <a:solidFill>
+                  <a:srgbClr val="1C2833"/>
+                </a:solidFill>
+                <a:latin typeface="Arial" pitchFamily="34" charset="0"/>
+                <a:ea typeface="Arial" pitchFamily="34" charset="-122"/>
+                <a:cs typeface="Arial" pitchFamily="34" charset="-120"/>
+              </a:rPr>
+              <a:t>Stopwatch / phone timer</a:t>
+            </a:r>
+            <a:endParaRPr lang="en-US" sz="1200" dirty="0"/>
+          </a:p>
+          <a:p>
+            <a:pPr algn="l" marL="342900" indent="-342900">
+              <a:lnSpc>
+                <a:spcPts val="1620"/>
+              </a:lnSpc>
+              <a:spcAft>
+                <a:spcPts val="300"/>
+              </a:spcAft>
+              <a:buSzPct val="100000"/>
+              <a:buChar char="•"/>
+            </a:pPr>
+            <a:r>
+              <a:rPr lang="en-US" sz="1200" dirty="0">
+                <a:solidFill>
+                  <a:srgbClr val="1C2833"/>
+                </a:solidFill>
+                <a:latin typeface="Arial" pitchFamily="34" charset="0"/>
+                <a:ea typeface="Arial" pitchFamily="34" charset="-122"/>
+                <a:cs typeface="Arial" pitchFamily="34" charset="-120"/>
+              </a:rPr>
+              <a:t>The rubric (</a:t>
+            </a:r>
+            <a:pPr algn="l" indent="0" marL="0">
+              <a:lnSpc>
+                <a:spcPts val="1620"/>
+              </a:lnSpc>
+              <a:spcAft>
+                <a:spcPts val="300"/>
+              </a:spcAft>
+              <a:buNone/>
+            </a:pPr>
+            <a:r>
+              <a:rPr lang="en-US" sz="1200" dirty="0">
+                <a:solidFill>
+                  <a:srgbClr val="1C2833"/>
+                </a:solidFill>
+                <a:latin typeface="Arial" pitchFamily="34" charset="0"/>
+                <a:ea typeface="Arial" pitchFamily="34" charset="-122"/>
+                <a:cs typeface="Arial" pitchFamily="34" charset="-120"/>
+              </a:rPr>
+              <a:t>assessments/rubric.md</a:t>
+            </a:r>
+            <a:pPr algn="l" indent="0" marL="0">
+              <a:lnSpc>
+                <a:spcPts val="1620"/>
+              </a:lnSpc>
+              <a:spcAft>
+                <a:spcPts val="300"/>
+              </a:spcAft>
+              <a:buNone/>
+            </a:pPr>
+            <a:r>
+              <a:rPr lang="en-US" sz="1200" dirty="0">
+                <a:solidFill>
+                  <a:srgbClr val="1C2833"/>
+                </a:solidFill>
+                <a:latin typeface="Arial" pitchFamily="34" charset="0"/>
+                <a:ea typeface="Arial" pitchFamily="34" charset="-122"/>
+                <a:cs typeface="Arial" pitchFamily="34" charset="-120"/>
+              </a:rPr>
+              <a:t>)</a:t>
             </a:r>
             <a:endParaRPr lang="en-US" sz="1200" dirty="0"/>
           </a:p>
@@ -3644,1549 +6432,7 @@
         </p:nvSpPr>
         <p:spPr>
           <a:xfrm>
-            <a:off x="406301" y="1160413"/>
-            <a:ext cx="8498026" cy="213271"/>
-          </a:xfrm>
-          <a:prstGeom prst="rect">
-            <a:avLst/>
-          </a:prstGeom>
-          <a:noFill/>
-          <a:ln/>
-        </p:spPr>
-        <p:txBody>
-          <a:bodyPr wrap="square" lIns="0" tIns="0" rIns="0" bIns="0" rtlCol="0" anchor="t"/>
-          <a:lstStyle/>
-          <a:p>
-            <a:pPr algn="l" indent="0" marL="0">
-              <a:lnSpc>
-                <a:spcPts val="1680"/>
-              </a:lnSpc>
-              <a:spcBef>
-                <a:spcPts val="300"/>
-              </a:spcBef>
-              <a:spcAft>
-                <a:spcPts val="300"/>
-              </a:spcAft>
-              <a:buNone/>
-            </a:pPr>
-            <a:r>
-              <a:rPr lang="en-US" sz="1200" i="1" dirty="0">
-                <a:solidFill>
-                  <a:srgbClr val="1C2833"/>
-                </a:solidFill>
-                <a:latin typeface="Arial" pitchFamily="34" charset="0"/>
-                <a:ea typeface="Arial" pitchFamily="34" charset="-122"/>
-                <a:cs typeface="Arial" pitchFamily="34" charset="-120"/>
-              </a:rPr>
-              <a:t>Each row: # · Sanskrit (Indian,</a:t>
-            </a:r>
-            <a:pPr algn="l" indent="0" marL="0">
-              <a:lnSpc>
-                <a:spcPts val="1680"/>
-              </a:lnSpc>
-              <a:spcBef>
-                <a:spcPts val="300"/>
-              </a:spcBef>
-              <a:spcAft>
-                <a:spcPts val="300"/>
-              </a:spcAft>
-              <a:buNone/>
-            </a:pPr>
-            <a:r>
-              <a:rPr lang="en-US" sz="1200" dirty="0">
-                <a:solidFill>
-                  <a:srgbClr val="1C2833"/>
-                </a:solidFill>
-                <a:latin typeface="Arial" pitchFamily="34" charset="0"/>
-                <a:ea typeface="Arial" pitchFamily="34" charset="-122"/>
-                <a:cs typeface="Arial" pitchFamily="34" charset="-120"/>
-              </a:rPr>
-              <a:t>rāśi</a:t>
-            </a:r>
-            <a:pPr algn="l" indent="0" marL="0">
-              <a:lnSpc>
-                <a:spcPts val="1680"/>
-              </a:lnSpc>
-              <a:spcBef>
-                <a:spcPts val="300"/>
-              </a:spcBef>
-              <a:spcAft>
-                <a:spcPts val="300"/>
-              </a:spcAft>
-              <a:buNone/>
-            </a:pPr>
-            <a:r>
-              <a:rPr lang="en-US" sz="1200" i="1" dirty="0">
-                <a:solidFill>
-                  <a:srgbClr val="1C2833"/>
-                </a:solidFill>
-                <a:latin typeface="Arial" pitchFamily="34" charset="0"/>
-                <a:ea typeface="Arial" pitchFamily="34" charset="-122"/>
-                <a:cs typeface="Arial" pitchFamily="34" charset="-120"/>
-              </a:rPr>
-              <a:t>) · Greek / English · Babylonian (~700 BCE origins).</a:t>
-            </a:r>
-            <a:endParaRPr lang="en-US" sz="1200" dirty="0"/>
-          </a:p>
-        </p:txBody>
-      </p:sp>
-      <p:sp>
-        <p:nvSpPr>
-          <p:cNvPr id="6" name="Text 4"/>
-          <p:cNvSpPr/>
-          <p:nvPr/>
-        </p:nvSpPr>
-        <p:spPr>
-          <a:xfrm>
-            <a:off x="634901" y="1462534"/>
-            <a:ext cx="8102798" cy="2963466"/>
-          </a:xfrm>
-          <a:prstGeom prst="rect">
-            <a:avLst/>
-          </a:prstGeom>
-          <a:noFill/>
-          <a:ln/>
-        </p:spPr>
-        <p:txBody>
-          <a:bodyPr wrap="square" lIns="0" tIns="0" rIns="0" bIns="0" rtlCol="0" anchor="t"/>
-          <a:lstStyle/>
-          <a:p>
-            <a:pPr algn="l" marL="342900" indent="-342900">
-              <a:lnSpc>
-                <a:spcPts val="1620"/>
-              </a:lnSpc>
-              <a:spcAft>
-                <a:spcPts val="300"/>
-              </a:spcAft>
-              <a:buSzPct val="100000"/>
-              <a:buChar char="•"/>
-            </a:pPr>
-            <a:r>
-              <a:rPr lang="en-US" sz="1200" b="1" dirty="0">
-                <a:solidFill>
-                  <a:srgbClr val="1C2833"/>
-                </a:solidFill>
-                <a:latin typeface="Arial" pitchFamily="34" charset="0"/>
-                <a:ea typeface="Arial" pitchFamily="34" charset="-122"/>
-                <a:cs typeface="Arial" pitchFamily="34" charset="-120"/>
-              </a:rPr>
-              <a:t>1</a:t>
-            </a:r>
-            <a:pPr algn="l" indent="0" marL="0">
-              <a:lnSpc>
-                <a:spcPts val="1620"/>
-              </a:lnSpc>
-              <a:spcAft>
-                <a:spcPts val="300"/>
-              </a:spcAft>
-              <a:buNone/>
-            </a:pPr>
-            <a:r>
-              <a:rPr lang="en-US" sz="1200" dirty="0">
-                <a:solidFill>
-                  <a:srgbClr val="1C2833"/>
-                </a:solidFill>
-                <a:latin typeface="Arial" pitchFamily="34" charset="0"/>
-                <a:ea typeface="Arial" pitchFamily="34" charset="-122"/>
-                <a:cs typeface="Arial" pitchFamily="34" charset="-120"/>
-              </a:rPr>
-              <a:t> — </a:t>
-            </a:r>
-            <a:pPr algn="l" indent="0" marL="0">
-              <a:lnSpc>
-                <a:spcPts val="1620"/>
-              </a:lnSpc>
-              <a:spcAft>
-                <a:spcPts val="300"/>
-              </a:spcAft>
-              <a:buNone/>
-            </a:pPr>
-            <a:r>
-              <a:rPr lang="en-US" sz="1200" i="1" dirty="0">
-                <a:solidFill>
-                  <a:srgbClr val="1C2833"/>
-                </a:solidFill>
-                <a:latin typeface="Arial" pitchFamily="34" charset="0"/>
-                <a:ea typeface="Arial" pitchFamily="34" charset="-122"/>
-                <a:cs typeface="Arial" pitchFamily="34" charset="-120"/>
-              </a:rPr>
-              <a:t>Meṣa</a:t>
-            </a:r>
-            <a:pPr algn="l" indent="0" marL="0">
-              <a:lnSpc>
-                <a:spcPts val="1620"/>
-              </a:lnSpc>
-              <a:spcAft>
-                <a:spcPts val="300"/>
-              </a:spcAft>
-              <a:buNone/>
-            </a:pPr>
-            <a:r>
-              <a:rPr lang="en-US" sz="1200" dirty="0">
-                <a:solidFill>
-                  <a:srgbClr val="1C2833"/>
-                </a:solidFill>
-                <a:latin typeface="Arial" pitchFamily="34" charset="0"/>
-                <a:ea typeface="Arial" pitchFamily="34" charset="-122"/>
-                <a:cs typeface="Arial" pitchFamily="34" charset="-120"/>
-              </a:rPr>
-              <a:t> (Ram) · Aries (Ram) · LU.ḪUN.GÁ (Hired Man)</a:t>
-            </a:r>
-            <a:endParaRPr lang="en-US" sz="1200" dirty="0"/>
-          </a:p>
-          <a:p>
-            <a:pPr algn="l" marL="342900" indent="-342900">
-              <a:lnSpc>
-                <a:spcPts val="1620"/>
-              </a:lnSpc>
-              <a:spcAft>
-                <a:spcPts val="300"/>
-              </a:spcAft>
-              <a:buSzPct val="100000"/>
-              <a:buChar char="•"/>
-            </a:pPr>
-            <a:r>
-              <a:rPr lang="en-US" sz="1200" b="1" dirty="0">
-                <a:solidFill>
-                  <a:srgbClr val="1C2833"/>
-                </a:solidFill>
-                <a:latin typeface="Arial" pitchFamily="34" charset="0"/>
-                <a:ea typeface="Arial" pitchFamily="34" charset="-122"/>
-                <a:cs typeface="Arial" pitchFamily="34" charset="-120"/>
-              </a:rPr>
-              <a:t>2</a:t>
-            </a:r>
-            <a:pPr algn="l" indent="0" marL="0">
-              <a:lnSpc>
-                <a:spcPts val="1620"/>
-              </a:lnSpc>
-              <a:spcAft>
-                <a:spcPts val="300"/>
-              </a:spcAft>
-              <a:buNone/>
-            </a:pPr>
-            <a:r>
-              <a:rPr lang="en-US" sz="1200" dirty="0">
-                <a:solidFill>
-                  <a:srgbClr val="1C2833"/>
-                </a:solidFill>
-                <a:latin typeface="Arial" pitchFamily="34" charset="0"/>
-                <a:ea typeface="Arial" pitchFamily="34" charset="-122"/>
-                <a:cs typeface="Arial" pitchFamily="34" charset="-120"/>
-              </a:rPr>
-              <a:t> — </a:t>
-            </a:r>
-            <a:pPr algn="l" indent="0" marL="0">
-              <a:lnSpc>
-                <a:spcPts val="1620"/>
-              </a:lnSpc>
-              <a:spcAft>
-                <a:spcPts val="300"/>
-              </a:spcAft>
-              <a:buNone/>
-            </a:pPr>
-            <a:r>
-              <a:rPr lang="en-US" sz="1200" i="1" dirty="0">
-                <a:solidFill>
-                  <a:srgbClr val="1C2833"/>
-                </a:solidFill>
-                <a:latin typeface="Arial" pitchFamily="34" charset="0"/>
-                <a:ea typeface="Arial" pitchFamily="34" charset="-122"/>
-                <a:cs typeface="Arial" pitchFamily="34" charset="-120"/>
-              </a:rPr>
-              <a:t>Vṛṣabha</a:t>
-            </a:r>
-            <a:pPr algn="l" indent="0" marL="0">
-              <a:lnSpc>
-                <a:spcPts val="1620"/>
-              </a:lnSpc>
-              <a:spcAft>
-                <a:spcPts val="300"/>
-              </a:spcAft>
-              <a:buNone/>
-            </a:pPr>
-            <a:r>
-              <a:rPr lang="en-US" sz="1200" dirty="0">
-                <a:solidFill>
-                  <a:srgbClr val="1C2833"/>
-                </a:solidFill>
-                <a:latin typeface="Arial" pitchFamily="34" charset="0"/>
-                <a:ea typeface="Arial" pitchFamily="34" charset="-122"/>
-                <a:cs typeface="Arial" pitchFamily="34" charset="-120"/>
-              </a:rPr>
-              <a:t> (Bull) · Taurus (Bull) · GU.AN.NA (Bull of Heaven)</a:t>
-            </a:r>
-            <a:endParaRPr lang="en-US" sz="1200" dirty="0"/>
-          </a:p>
-          <a:p>
-            <a:pPr algn="l" marL="342900" indent="-342900">
-              <a:lnSpc>
-                <a:spcPts val="1620"/>
-              </a:lnSpc>
-              <a:spcAft>
-                <a:spcPts val="300"/>
-              </a:spcAft>
-              <a:buSzPct val="100000"/>
-              <a:buChar char="•"/>
-            </a:pPr>
-            <a:r>
-              <a:rPr lang="en-US" sz="1200" b="1" dirty="0">
-                <a:solidFill>
-                  <a:srgbClr val="1C2833"/>
-                </a:solidFill>
-                <a:latin typeface="Arial" pitchFamily="34" charset="0"/>
-                <a:ea typeface="Arial" pitchFamily="34" charset="-122"/>
-                <a:cs typeface="Arial" pitchFamily="34" charset="-120"/>
-              </a:rPr>
-              <a:t>3</a:t>
-            </a:r>
-            <a:pPr algn="l" indent="0" marL="0">
-              <a:lnSpc>
-                <a:spcPts val="1620"/>
-              </a:lnSpc>
-              <a:spcAft>
-                <a:spcPts val="300"/>
-              </a:spcAft>
-              <a:buNone/>
-            </a:pPr>
-            <a:r>
-              <a:rPr lang="en-US" sz="1200" dirty="0">
-                <a:solidFill>
-                  <a:srgbClr val="1C2833"/>
-                </a:solidFill>
-                <a:latin typeface="Arial" pitchFamily="34" charset="0"/>
-                <a:ea typeface="Arial" pitchFamily="34" charset="-122"/>
-                <a:cs typeface="Arial" pitchFamily="34" charset="-120"/>
-              </a:rPr>
-              <a:t> — </a:t>
-            </a:r>
-            <a:pPr algn="l" indent="0" marL="0">
-              <a:lnSpc>
-                <a:spcPts val="1620"/>
-              </a:lnSpc>
-              <a:spcAft>
-                <a:spcPts val="300"/>
-              </a:spcAft>
-              <a:buNone/>
-            </a:pPr>
-            <a:r>
-              <a:rPr lang="en-US" sz="1200" i="1" dirty="0">
-                <a:solidFill>
-                  <a:srgbClr val="1C2833"/>
-                </a:solidFill>
-                <a:latin typeface="Arial" pitchFamily="34" charset="0"/>
-                <a:ea typeface="Arial" pitchFamily="34" charset="-122"/>
-                <a:cs typeface="Arial" pitchFamily="34" charset="-120"/>
-              </a:rPr>
-              <a:t>Mithuna</a:t>
-            </a:r>
-            <a:pPr algn="l" indent="0" marL="0">
-              <a:lnSpc>
-                <a:spcPts val="1620"/>
-              </a:lnSpc>
-              <a:spcAft>
-                <a:spcPts val="300"/>
-              </a:spcAft>
-              <a:buNone/>
-            </a:pPr>
-            <a:r>
-              <a:rPr lang="en-US" sz="1200" dirty="0">
-                <a:solidFill>
-                  <a:srgbClr val="1C2833"/>
-                </a:solidFill>
-                <a:latin typeface="Arial" pitchFamily="34" charset="0"/>
-                <a:ea typeface="Arial" pitchFamily="34" charset="-122"/>
-                <a:cs typeface="Arial" pitchFamily="34" charset="-120"/>
-              </a:rPr>
-              <a:t> (Twins) · Gemini (Twins) · MAŠ.TAB.BA (Great Twins)</a:t>
-            </a:r>
-            <a:endParaRPr lang="en-US" sz="1200" dirty="0"/>
-          </a:p>
-          <a:p>
-            <a:pPr algn="l" marL="342900" indent="-342900">
-              <a:lnSpc>
-                <a:spcPts val="1620"/>
-              </a:lnSpc>
-              <a:spcAft>
-                <a:spcPts val="300"/>
-              </a:spcAft>
-              <a:buSzPct val="100000"/>
-              <a:buChar char="•"/>
-            </a:pPr>
-            <a:r>
-              <a:rPr lang="en-US" sz="1200" b="1" dirty="0">
-                <a:solidFill>
-                  <a:srgbClr val="1C2833"/>
-                </a:solidFill>
-                <a:latin typeface="Arial" pitchFamily="34" charset="0"/>
-                <a:ea typeface="Arial" pitchFamily="34" charset="-122"/>
-                <a:cs typeface="Arial" pitchFamily="34" charset="-120"/>
-              </a:rPr>
-              <a:t>4</a:t>
-            </a:r>
-            <a:pPr algn="l" indent="0" marL="0">
-              <a:lnSpc>
-                <a:spcPts val="1620"/>
-              </a:lnSpc>
-              <a:spcAft>
-                <a:spcPts val="300"/>
-              </a:spcAft>
-              <a:buNone/>
-            </a:pPr>
-            <a:r>
-              <a:rPr lang="en-US" sz="1200" dirty="0">
-                <a:solidFill>
-                  <a:srgbClr val="1C2833"/>
-                </a:solidFill>
-                <a:latin typeface="Arial" pitchFamily="34" charset="0"/>
-                <a:ea typeface="Arial" pitchFamily="34" charset="-122"/>
-                <a:cs typeface="Arial" pitchFamily="34" charset="-120"/>
-              </a:rPr>
-              <a:t> — </a:t>
-            </a:r>
-            <a:pPr algn="l" indent="0" marL="0">
-              <a:lnSpc>
-                <a:spcPts val="1620"/>
-              </a:lnSpc>
-              <a:spcAft>
-                <a:spcPts val="300"/>
-              </a:spcAft>
-              <a:buNone/>
-            </a:pPr>
-            <a:r>
-              <a:rPr lang="en-US" sz="1200" i="1" dirty="0">
-                <a:solidFill>
-                  <a:srgbClr val="1C2833"/>
-                </a:solidFill>
-                <a:latin typeface="Arial" pitchFamily="34" charset="0"/>
-                <a:ea typeface="Arial" pitchFamily="34" charset="-122"/>
-                <a:cs typeface="Arial" pitchFamily="34" charset="-120"/>
-              </a:rPr>
-              <a:t>Karka</a:t>
-            </a:r>
-            <a:pPr algn="l" indent="0" marL="0">
-              <a:lnSpc>
-                <a:spcPts val="1620"/>
-              </a:lnSpc>
-              <a:spcAft>
-                <a:spcPts val="300"/>
-              </a:spcAft>
-              <a:buNone/>
-            </a:pPr>
-            <a:r>
-              <a:rPr lang="en-US" sz="1200" dirty="0">
-                <a:solidFill>
-                  <a:srgbClr val="1C2833"/>
-                </a:solidFill>
-                <a:latin typeface="Arial" pitchFamily="34" charset="0"/>
-                <a:ea typeface="Arial" pitchFamily="34" charset="-122"/>
-                <a:cs typeface="Arial" pitchFamily="34" charset="-120"/>
-              </a:rPr>
-              <a:t> (Crab) · Cancer (Crab) · AL.LUL (Crab)</a:t>
-            </a:r>
-            <a:endParaRPr lang="en-US" sz="1200" dirty="0"/>
-          </a:p>
-          <a:p>
-            <a:pPr algn="l" marL="342900" indent="-342900">
-              <a:lnSpc>
-                <a:spcPts val="1620"/>
-              </a:lnSpc>
-              <a:spcAft>
-                <a:spcPts val="300"/>
-              </a:spcAft>
-              <a:buSzPct val="100000"/>
-              <a:buChar char="•"/>
-            </a:pPr>
-            <a:r>
-              <a:rPr lang="en-US" sz="1200" b="1" dirty="0">
-                <a:solidFill>
-                  <a:srgbClr val="1C2833"/>
-                </a:solidFill>
-                <a:latin typeface="Arial" pitchFamily="34" charset="0"/>
-                <a:ea typeface="Arial" pitchFamily="34" charset="-122"/>
-                <a:cs typeface="Arial" pitchFamily="34" charset="-120"/>
-              </a:rPr>
-              <a:t>5</a:t>
-            </a:r>
-            <a:pPr algn="l" indent="0" marL="0">
-              <a:lnSpc>
-                <a:spcPts val="1620"/>
-              </a:lnSpc>
-              <a:spcAft>
-                <a:spcPts val="300"/>
-              </a:spcAft>
-              <a:buNone/>
-            </a:pPr>
-            <a:r>
-              <a:rPr lang="en-US" sz="1200" dirty="0">
-                <a:solidFill>
-                  <a:srgbClr val="1C2833"/>
-                </a:solidFill>
-                <a:latin typeface="Arial" pitchFamily="34" charset="0"/>
-                <a:ea typeface="Arial" pitchFamily="34" charset="-122"/>
-                <a:cs typeface="Arial" pitchFamily="34" charset="-120"/>
-              </a:rPr>
-              <a:t> — </a:t>
-            </a:r>
-            <a:pPr algn="l" indent="0" marL="0">
-              <a:lnSpc>
-                <a:spcPts val="1620"/>
-              </a:lnSpc>
-              <a:spcAft>
-                <a:spcPts val="300"/>
-              </a:spcAft>
-              <a:buNone/>
-            </a:pPr>
-            <a:r>
-              <a:rPr lang="en-US" sz="1200" i="1" dirty="0">
-                <a:solidFill>
-                  <a:srgbClr val="1C2833"/>
-                </a:solidFill>
-                <a:latin typeface="Arial" pitchFamily="34" charset="0"/>
-                <a:ea typeface="Arial" pitchFamily="34" charset="-122"/>
-                <a:cs typeface="Arial" pitchFamily="34" charset="-120"/>
-              </a:rPr>
-              <a:t>Siṁha</a:t>
-            </a:r>
-            <a:pPr algn="l" indent="0" marL="0">
-              <a:lnSpc>
-                <a:spcPts val="1620"/>
-              </a:lnSpc>
-              <a:spcAft>
-                <a:spcPts val="300"/>
-              </a:spcAft>
-              <a:buNone/>
-            </a:pPr>
-            <a:r>
-              <a:rPr lang="en-US" sz="1200" dirty="0">
-                <a:solidFill>
-                  <a:srgbClr val="1C2833"/>
-                </a:solidFill>
-                <a:latin typeface="Arial" pitchFamily="34" charset="0"/>
-                <a:ea typeface="Arial" pitchFamily="34" charset="-122"/>
-                <a:cs typeface="Arial" pitchFamily="34" charset="-120"/>
-              </a:rPr>
-              <a:t> (Lion) · Leo (Lion) · UR.GU.LA (Lion)</a:t>
-            </a:r>
-            <a:endParaRPr lang="en-US" sz="1200" dirty="0"/>
-          </a:p>
-          <a:p>
-            <a:pPr algn="l" marL="342900" indent="-342900">
-              <a:lnSpc>
-                <a:spcPts val="1620"/>
-              </a:lnSpc>
-              <a:spcAft>
-                <a:spcPts val="300"/>
-              </a:spcAft>
-              <a:buSzPct val="100000"/>
-              <a:buChar char="•"/>
-            </a:pPr>
-            <a:r>
-              <a:rPr lang="en-US" sz="1200" b="1" dirty="0">
-                <a:solidFill>
-                  <a:srgbClr val="1C2833"/>
-                </a:solidFill>
-                <a:latin typeface="Arial" pitchFamily="34" charset="0"/>
-                <a:ea typeface="Arial" pitchFamily="34" charset="-122"/>
-                <a:cs typeface="Arial" pitchFamily="34" charset="-120"/>
-              </a:rPr>
-              <a:t>6</a:t>
-            </a:r>
-            <a:pPr algn="l" indent="0" marL="0">
-              <a:lnSpc>
-                <a:spcPts val="1620"/>
-              </a:lnSpc>
-              <a:spcAft>
-                <a:spcPts val="300"/>
-              </a:spcAft>
-              <a:buNone/>
-            </a:pPr>
-            <a:r>
-              <a:rPr lang="en-US" sz="1200" dirty="0">
-                <a:solidFill>
-                  <a:srgbClr val="1C2833"/>
-                </a:solidFill>
-                <a:latin typeface="Arial" pitchFamily="34" charset="0"/>
-                <a:ea typeface="Arial" pitchFamily="34" charset="-122"/>
-                <a:cs typeface="Arial" pitchFamily="34" charset="-120"/>
-              </a:rPr>
-              <a:t> — </a:t>
-            </a:r>
-            <a:pPr algn="l" indent="0" marL="0">
-              <a:lnSpc>
-                <a:spcPts val="1620"/>
-              </a:lnSpc>
-              <a:spcAft>
-                <a:spcPts val="300"/>
-              </a:spcAft>
-              <a:buNone/>
-            </a:pPr>
-            <a:r>
-              <a:rPr lang="en-US" sz="1200" i="1" dirty="0">
-                <a:solidFill>
-                  <a:srgbClr val="1C2833"/>
-                </a:solidFill>
-                <a:latin typeface="Arial" pitchFamily="34" charset="0"/>
-                <a:ea typeface="Arial" pitchFamily="34" charset="-122"/>
-                <a:cs typeface="Arial" pitchFamily="34" charset="-120"/>
-              </a:rPr>
-              <a:t>Kanyā</a:t>
-            </a:r>
-            <a:pPr algn="l" indent="0" marL="0">
-              <a:lnSpc>
-                <a:spcPts val="1620"/>
-              </a:lnSpc>
-              <a:spcAft>
-                <a:spcPts val="300"/>
-              </a:spcAft>
-              <a:buNone/>
-            </a:pPr>
-            <a:r>
-              <a:rPr lang="en-US" sz="1200" dirty="0">
-                <a:solidFill>
-                  <a:srgbClr val="1C2833"/>
-                </a:solidFill>
-                <a:latin typeface="Arial" pitchFamily="34" charset="0"/>
-                <a:ea typeface="Arial" pitchFamily="34" charset="-122"/>
-                <a:cs typeface="Arial" pitchFamily="34" charset="-120"/>
-              </a:rPr>
-              <a:t> (Maiden) · Virgo (Maiden) · AB.SIN (Furrow / barley ear)</a:t>
-            </a:r>
-            <a:endParaRPr lang="en-US" sz="1200" dirty="0"/>
-          </a:p>
-          <a:p>
-            <a:pPr algn="l" marL="342900" indent="-342900">
-              <a:lnSpc>
-                <a:spcPts val="1620"/>
-              </a:lnSpc>
-              <a:spcAft>
-                <a:spcPts val="300"/>
-              </a:spcAft>
-              <a:buSzPct val="100000"/>
-              <a:buChar char="•"/>
-            </a:pPr>
-            <a:r>
-              <a:rPr lang="en-US" sz="1200" b="1" dirty="0">
-                <a:solidFill>
-                  <a:srgbClr val="1C2833"/>
-                </a:solidFill>
-                <a:latin typeface="Arial" pitchFamily="34" charset="0"/>
-                <a:ea typeface="Arial" pitchFamily="34" charset="-122"/>
-                <a:cs typeface="Arial" pitchFamily="34" charset="-120"/>
-              </a:rPr>
-              <a:t>7</a:t>
-            </a:r>
-            <a:pPr algn="l" indent="0" marL="0">
-              <a:lnSpc>
-                <a:spcPts val="1620"/>
-              </a:lnSpc>
-              <a:spcAft>
-                <a:spcPts val="300"/>
-              </a:spcAft>
-              <a:buNone/>
-            </a:pPr>
-            <a:r>
-              <a:rPr lang="en-US" sz="1200" dirty="0">
-                <a:solidFill>
-                  <a:srgbClr val="1C2833"/>
-                </a:solidFill>
-                <a:latin typeface="Arial" pitchFamily="34" charset="0"/>
-                <a:ea typeface="Arial" pitchFamily="34" charset="-122"/>
-                <a:cs typeface="Arial" pitchFamily="34" charset="-120"/>
-              </a:rPr>
-              <a:t> — </a:t>
-            </a:r>
-            <a:pPr algn="l" indent="0" marL="0">
-              <a:lnSpc>
-                <a:spcPts val="1620"/>
-              </a:lnSpc>
-              <a:spcAft>
-                <a:spcPts val="300"/>
-              </a:spcAft>
-              <a:buNone/>
-            </a:pPr>
-            <a:r>
-              <a:rPr lang="en-US" sz="1200" i="1" dirty="0">
-                <a:solidFill>
-                  <a:srgbClr val="1C2833"/>
-                </a:solidFill>
-                <a:latin typeface="Arial" pitchFamily="34" charset="0"/>
-                <a:ea typeface="Arial" pitchFamily="34" charset="-122"/>
-                <a:cs typeface="Arial" pitchFamily="34" charset="-120"/>
-              </a:rPr>
-              <a:t>Tulā</a:t>
-            </a:r>
-            <a:pPr algn="l" indent="0" marL="0">
-              <a:lnSpc>
-                <a:spcPts val="1620"/>
-              </a:lnSpc>
-              <a:spcAft>
-                <a:spcPts val="300"/>
-              </a:spcAft>
-              <a:buNone/>
-            </a:pPr>
-            <a:r>
-              <a:rPr lang="en-US" sz="1200" dirty="0">
-                <a:solidFill>
-                  <a:srgbClr val="1C2833"/>
-                </a:solidFill>
-                <a:latin typeface="Arial" pitchFamily="34" charset="0"/>
-                <a:ea typeface="Arial" pitchFamily="34" charset="-122"/>
-                <a:cs typeface="Arial" pitchFamily="34" charset="-120"/>
-              </a:rPr>
-              <a:t> (Scales) · Libra (Scales) · RIN (Balance)</a:t>
-            </a:r>
-            <a:endParaRPr lang="en-US" sz="1200" dirty="0"/>
-          </a:p>
-          <a:p>
-            <a:pPr algn="l" marL="342900" indent="-342900">
-              <a:lnSpc>
-                <a:spcPts val="1620"/>
-              </a:lnSpc>
-              <a:spcAft>
-                <a:spcPts val="300"/>
-              </a:spcAft>
-              <a:buSzPct val="100000"/>
-              <a:buChar char="•"/>
-            </a:pPr>
-            <a:r>
-              <a:rPr lang="en-US" sz="1200" b="1" dirty="0">
-                <a:solidFill>
-                  <a:srgbClr val="1C2833"/>
-                </a:solidFill>
-                <a:latin typeface="Arial" pitchFamily="34" charset="0"/>
-                <a:ea typeface="Arial" pitchFamily="34" charset="-122"/>
-                <a:cs typeface="Arial" pitchFamily="34" charset="-120"/>
-              </a:rPr>
-              <a:t>8</a:t>
-            </a:r>
-            <a:pPr algn="l" indent="0" marL="0">
-              <a:lnSpc>
-                <a:spcPts val="1620"/>
-              </a:lnSpc>
-              <a:spcAft>
-                <a:spcPts val="300"/>
-              </a:spcAft>
-              <a:buNone/>
-            </a:pPr>
-            <a:r>
-              <a:rPr lang="en-US" sz="1200" dirty="0">
-                <a:solidFill>
-                  <a:srgbClr val="1C2833"/>
-                </a:solidFill>
-                <a:latin typeface="Arial" pitchFamily="34" charset="0"/>
-                <a:ea typeface="Arial" pitchFamily="34" charset="-122"/>
-                <a:cs typeface="Arial" pitchFamily="34" charset="-120"/>
-              </a:rPr>
-              <a:t> — </a:t>
-            </a:r>
-            <a:pPr algn="l" indent="0" marL="0">
-              <a:lnSpc>
-                <a:spcPts val="1620"/>
-              </a:lnSpc>
-              <a:spcAft>
-                <a:spcPts val="300"/>
-              </a:spcAft>
-              <a:buNone/>
-            </a:pPr>
-            <a:r>
-              <a:rPr lang="en-US" sz="1200" i="1" dirty="0">
-                <a:solidFill>
-                  <a:srgbClr val="1C2833"/>
-                </a:solidFill>
-                <a:latin typeface="Arial" pitchFamily="34" charset="0"/>
-                <a:ea typeface="Arial" pitchFamily="34" charset="-122"/>
-                <a:cs typeface="Arial" pitchFamily="34" charset="-120"/>
-              </a:rPr>
-              <a:t>Vṛścika</a:t>
-            </a:r>
-            <a:pPr algn="l" indent="0" marL="0">
-              <a:lnSpc>
-                <a:spcPts val="1620"/>
-              </a:lnSpc>
-              <a:spcAft>
-                <a:spcPts val="300"/>
-              </a:spcAft>
-              <a:buNone/>
-            </a:pPr>
-            <a:r>
-              <a:rPr lang="en-US" sz="1200" dirty="0">
-                <a:solidFill>
-                  <a:srgbClr val="1C2833"/>
-                </a:solidFill>
-                <a:latin typeface="Arial" pitchFamily="34" charset="0"/>
-                <a:ea typeface="Arial" pitchFamily="34" charset="-122"/>
-                <a:cs typeface="Arial" pitchFamily="34" charset="-120"/>
-              </a:rPr>
-              <a:t> (Scorpion) · Scorpio (Scorpion) · GIR.TAB (Scorpion)</a:t>
-            </a:r>
-            <a:endParaRPr lang="en-US" sz="1200" dirty="0"/>
-          </a:p>
-          <a:p>
-            <a:pPr algn="l" marL="342900" indent="-342900">
-              <a:lnSpc>
-                <a:spcPts val="1620"/>
-              </a:lnSpc>
-              <a:spcAft>
-                <a:spcPts val="300"/>
-              </a:spcAft>
-              <a:buSzPct val="100000"/>
-              <a:buChar char="•"/>
-            </a:pPr>
-            <a:r>
-              <a:rPr lang="en-US" sz="1200" b="1" dirty="0">
-                <a:solidFill>
-                  <a:srgbClr val="1C2833"/>
-                </a:solidFill>
-                <a:latin typeface="Arial" pitchFamily="34" charset="0"/>
-                <a:ea typeface="Arial" pitchFamily="34" charset="-122"/>
-                <a:cs typeface="Arial" pitchFamily="34" charset="-120"/>
-              </a:rPr>
-              <a:t>9</a:t>
-            </a:r>
-            <a:pPr algn="l" indent="0" marL="0">
-              <a:lnSpc>
-                <a:spcPts val="1620"/>
-              </a:lnSpc>
-              <a:spcAft>
-                <a:spcPts val="300"/>
-              </a:spcAft>
-              <a:buNone/>
-            </a:pPr>
-            <a:r>
-              <a:rPr lang="en-US" sz="1200" dirty="0">
-                <a:solidFill>
-                  <a:srgbClr val="1C2833"/>
-                </a:solidFill>
-                <a:latin typeface="Arial" pitchFamily="34" charset="0"/>
-                <a:ea typeface="Arial" pitchFamily="34" charset="-122"/>
-                <a:cs typeface="Arial" pitchFamily="34" charset="-120"/>
-              </a:rPr>
-              <a:t> — </a:t>
-            </a:r>
-            <a:pPr algn="l" indent="0" marL="0">
-              <a:lnSpc>
-                <a:spcPts val="1620"/>
-              </a:lnSpc>
-              <a:spcAft>
-                <a:spcPts val="300"/>
-              </a:spcAft>
-              <a:buNone/>
-            </a:pPr>
-            <a:r>
-              <a:rPr lang="en-US" sz="1200" i="1" dirty="0">
-                <a:solidFill>
-                  <a:srgbClr val="1C2833"/>
-                </a:solidFill>
-                <a:latin typeface="Arial" pitchFamily="34" charset="0"/>
-                <a:ea typeface="Arial" pitchFamily="34" charset="-122"/>
-                <a:cs typeface="Arial" pitchFamily="34" charset="-120"/>
-              </a:rPr>
-              <a:t>Dhanus</a:t>
-            </a:r>
-            <a:pPr algn="l" indent="0" marL="0">
-              <a:lnSpc>
-                <a:spcPts val="1620"/>
-              </a:lnSpc>
-              <a:spcAft>
-                <a:spcPts val="300"/>
-              </a:spcAft>
-              <a:buNone/>
-            </a:pPr>
-            <a:r>
-              <a:rPr lang="en-US" sz="1200" dirty="0">
-                <a:solidFill>
-                  <a:srgbClr val="1C2833"/>
-                </a:solidFill>
-                <a:latin typeface="Arial" pitchFamily="34" charset="0"/>
-                <a:ea typeface="Arial" pitchFamily="34" charset="-122"/>
-                <a:cs typeface="Arial" pitchFamily="34" charset="-120"/>
-              </a:rPr>
-              <a:t> (Bow) · Sagittarius (Archer) · PA.BIL.SAG (Archer)</a:t>
-            </a:r>
-            <a:endParaRPr lang="en-US" sz="1200" dirty="0"/>
-          </a:p>
-          <a:p>
-            <a:pPr algn="l" marL="342900" indent="-342900">
-              <a:lnSpc>
-                <a:spcPts val="1620"/>
-              </a:lnSpc>
-              <a:spcAft>
-                <a:spcPts val="300"/>
-              </a:spcAft>
-              <a:buSzPct val="100000"/>
-              <a:buChar char="•"/>
-            </a:pPr>
-            <a:r>
-              <a:rPr lang="en-US" sz="1200" b="1" dirty="0">
-                <a:solidFill>
-                  <a:srgbClr val="1C2833"/>
-                </a:solidFill>
-                <a:latin typeface="Arial" pitchFamily="34" charset="0"/>
-                <a:ea typeface="Arial" pitchFamily="34" charset="-122"/>
-                <a:cs typeface="Arial" pitchFamily="34" charset="-120"/>
-              </a:rPr>
-              <a:t>10</a:t>
-            </a:r>
-            <a:pPr algn="l" indent="0" marL="0">
-              <a:lnSpc>
-                <a:spcPts val="1620"/>
-              </a:lnSpc>
-              <a:spcAft>
-                <a:spcPts val="300"/>
-              </a:spcAft>
-              <a:buNone/>
-            </a:pPr>
-            <a:r>
-              <a:rPr lang="en-US" sz="1200" dirty="0">
-                <a:solidFill>
-                  <a:srgbClr val="1C2833"/>
-                </a:solidFill>
-                <a:latin typeface="Arial" pitchFamily="34" charset="0"/>
-                <a:ea typeface="Arial" pitchFamily="34" charset="-122"/>
-                <a:cs typeface="Arial" pitchFamily="34" charset="-120"/>
-              </a:rPr>
-              <a:t> — </a:t>
-            </a:r>
-            <a:pPr algn="l" indent="0" marL="0">
-              <a:lnSpc>
-                <a:spcPts val="1620"/>
-              </a:lnSpc>
-              <a:spcAft>
-                <a:spcPts val="300"/>
-              </a:spcAft>
-              <a:buNone/>
-            </a:pPr>
-            <a:r>
-              <a:rPr lang="en-US" sz="1200" i="1" dirty="0">
-                <a:solidFill>
-                  <a:srgbClr val="1C2833"/>
-                </a:solidFill>
-                <a:latin typeface="Arial" pitchFamily="34" charset="0"/>
-                <a:ea typeface="Arial" pitchFamily="34" charset="-122"/>
-                <a:cs typeface="Arial" pitchFamily="34" charset="-120"/>
-              </a:rPr>
-              <a:t>Makara</a:t>
-            </a:r>
-            <a:pPr algn="l" indent="0" marL="0">
-              <a:lnSpc>
-                <a:spcPts val="1620"/>
-              </a:lnSpc>
-              <a:spcAft>
-                <a:spcPts val="300"/>
-              </a:spcAft>
-              <a:buNone/>
-            </a:pPr>
-            <a:r>
-              <a:rPr lang="en-US" sz="1200" dirty="0">
-                <a:solidFill>
-                  <a:srgbClr val="1C2833"/>
-                </a:solidFill>
-                <a:latin typeface="Arial" pitchFamily="34" charset="0"/>
-                <a:ea typeface="Arial" pitchFamily="34" charset="-122"/>
-                <a:cs typeface="Arial" pitchFamily="34" charset="-120"/>
-              </a:rPr>
-              <a:t> (Sea-goat) · Capricorn (Sea-goat) · SUḪUR.MAŠ (Goat-fish)</a:t>
-            </a:r>
-            <a:endParaRPr lang="en-US" sz="1200" dirty="0"/>
-          </a:p>
-          <a:p>
-            <a:pPr algn="l" marL="342900" indent="-342900">
-              <a:lnSpc>
-                <a:spcPts val="1620"/>
-              </a:lnSpc>
-              <a:spcAft>
-                <a:spcPts val="300"/>
-              </a:spcAft>
-              <a:buSzPct val="100000"/>
-              <a:buChar char="•"/>
-            </a:pPr>
-            <a:r>
-              <a:rPr lang="en-US" sz="1200" b="1" dirty="0">
-                <a:solidFill>
-                  <a:srgbClr val="1C2833"/>
-                </a:solidFill>
-                <a:latin typeface="Arial" pitchFamily="34" charset="0"/>
-                <a:ea typeface="Arial" pitchFamily="34" charset="-122"/>
-                <a:cs typeface="Arial" pitchFamily="34" charset="-120"/>
-              </a:rPr>
-              <a:t>11</a:t>
-            </a:r>
-            <a:pPr algn="l" indent="0" marL="0">
-              <a:lnSpc>
-                <a:spcPts val="1620"/>
-              </a:lnSpc>
-              <a:spcAft>
-                <a:spcPts val="300"/>
-              </a:spcAft>
-              <a:buNone/>
-            </a:pPr>
-            <a:r>
-              <a:rPr lang="en-US" sz="1200" dirty="0">
-                <a:solidFill>
-                  <a:srgbClr val="1C2833"/>
-                </a:solidFill>
-                <a:latin typeface="Arial" pitchFamily="34" charset="0"/>
-                <a:ea typeface="Arial" pitchFamily="34" charset="-122"/>
-                <a:cs typeface="Arial" pitchFamily="34" charset="-120"/>
-              </a:rPr>
-              <a:t> — </a:t>
-            </a:r>
-            <a:pPr algn="l" indent="0" marL="0">
-              <a:lnSpc>
-                <a:spcPts val="1620"/>
-              </a:lnSpc>
-              <a:spcAft>
-                <a:spcPts val="300"/>
-              </a:spcAft>
-              <a:buNone/>
-            </a:pPr>
-            <a:r>
-              <a:rPr lang="en-US" sz="1200" i="1" dirty="0">
-                <a:solidFill>
-                  <a:srgbClr val="1C2833"/>
-                </a:solidFill>
-                <a:latin typeface="Arial" pitchFamily="34" charset="0"/>
-                <a:ea typeface="Arial" pitchFamily="34" charset="-122"/>
-                <a:cs typeface="Arial" pitchFamily="34" charset="-120"/>
-              </a:rPr>
-              <a:t>Kumbha</a:t>
-            </a:r>
-            <a:pPr algn="l" indent="0" marL="0">
-              <a:lnSpc>
-                <a:spcPts val="1620"/>
-              </a:lnSpc>
-              <a:spcAft>
-                <a:spcPts val="300"/>
-              </a:spcAft>
-              <a:buNone/>
-            </a:pPr>
-            <a:r>
-              <a:rPr lang="en-US" sz="1200" dirty="0">
-                <a:solidFill>
-                  <a:srgbClr val="1C2833"/>
-                </a:solidFill>
-                <a:latin typeface="Arial" pitchFamily="34" charset="0"/>
-                <a:ea typeface="Arial" pitchFamily="34" charset="-122"/>
-                <a:cs typeface="Arial" pitchFamily="34" charset="-120"/>
-              </a:rPr>
-              <a:t> (Water-pot) · Aquarius (Water-bearer) · GU.LA (Great One / water-pourer)</a:t>
-            </a:r>
-            <a:endParaRPr lang="en-US" sz="1200" dirty="0"/>
-          </a:p>
-          <a:p>
-            <a:pPr algn="l" marL="342900" indent="-342900">
-              <a:lnSpc>
-                <a:spcPts val="1620"/>
-              </a:lnSpc>
-              <a:spcAft>
-                <a:spcPts val="300"/>
-              </a:spcAft>
-              <a:buSzPct val="100000"/>
-              <a:buChar char="•"/>
-            </a:pPr>
-            <a:r>
-              <a:rPr lang="en-US" sz="1200" b="1" dirty="0">
-                <a:solidFill>
-                  <a:srgbClr val="1C2833"/>
-                </a:solidFill>
-                <a:latin typeface="Arial" pitchFamily="34" charset="0"/>
-                <a:ea typeface="Arial" pitchFamily="34" charset="-122"/>
-                <a:cs typeface="Arial" pitchFamily="34" charset="-120"/>
-              </a:rPr>
-              <a:t>12</a:t>
-            </a:r>
-            <a:pPr algn="l" indent="0" marL="0">
-              <a:lnSpc>
-                <a:spcPts val="1620"/>
-              </a:lnSpc>
-              <a:spcAft>
-                <a:spcPts val="300"/>
-              </a:spcAft>
-              <a:buNone/>
-            </a:pPr>
-            <a:r>
-              <a:rPr lang="en-US" sz="1200" dirty="0">
-                <a:solidFill>
-                  <a:srgbClr val="1C2833"/>
-                </a:solidFill>
-                <a:latin typeface="Arial" pitchFamily="34" charset="0"/>
-                <a:ea typeface="Arial" pitchFamily="34" charset="-122"/>
-                <a:cs typeface="Arial" pitchFamily="34" charset="-120"/>
-              </a:rPr>
-              <a:t> — </a:t>
-            </a:r>
-            <a:pPr algn="l" indent="0" marL="0">
-              <a:lnSpc>
-                <a:spcPts val="1620"/>
-              </a:lnSpc>
-              <a:spcAft>
-                <a:spcPts val="300"/>
-              </a:spcAft>
-              <a:buNone/>
-            </a:pPr>
-            <a:r>
-              <a:rPr lang="en-US" sz="1200" i="1" dirty="0">
-                <a:solidFill>
-                  <a:srgbClr val="1C2833"/>
-                </a:solidFill>
-                <a:latin typeface="Arial" pitchFamily="34" charset="0"/>
-                <a:ea typeface="Arial" pitchFamily="34" charset="-122"/>
-                <a:cs typeface="Arial" pitchFamily="34" charset="-120"/>
-              </a:rPr>
-              <a:t>Mīna</a:t>
-            </a:r>
-            <a:pPr algn="l" indent="0" marL="0">
-              <a:lnSpc>
-                <a:spcPts val="1620"/>
-              </a:lnSpc>
-              <a:spcAft>
-                <a:spcPts val="300"/>
-              </a:spcAft>
-              <a:buNone/>
-            </a:pPr>
-            <a:r>
-              <a:rPr lang="en-US" sz="1200" dirty="0">
-                <a:solidFill>
-                  <a:srgbClr val="1C2833"/>
-                </a:solidFill>
-                <a:latin typeface="Arial" pitchFamily="34" charset="0"/>
-                <a:ea typeface="Arial" pitchFamily="34" charset="-122"/>
-                <a:cs typeface="Arial" pitchFamily="34" charset="-120"/>
-              </a:rPr>
-              <a:t> (Fishes) · Pisces (Fishes) · DU.NU.NU (Tails)</a:t>
-            </a:r>
-            <a:endParaRPr lang="en-US" sz="1200" dirty="0"/>
-          </a:p>
-        </p:txBody>
-      </p:sp>
-      <p:sp>
-        <p:nvSpPr>
-          <p:cNvPr id="7" name="Text 5"/>
-          <p:cNvSpPr/>
-          <p:nvPr/>
-        </p:nvSpPr>
-        <p:spPr>
-          <a:xfrm>
-            <a:off x="406301" y="4514850"/>
-            <a:ext cx="8498026" cy="1066354"/>
-          </a:xfrm>
-          <a:prstGeom prst="rect">
-            <a:avLst/>
-          </a:prstGeom>
-          <a:noFill/>
-          <a:ln/>
-        </p:spPr>
-        <p:txBody>
-          <a:bodyPr wrap="square" lIns="0" tIns="0" rIns="0" bIns="0" rtlCol="0" anchor="t"/>
-          <a:lstStyle/>
-          <a:p>
-            <a:pPr algn="l" indent="0" marL="0">
-              <a:lnSpc>
-                <a:spcPts val="1680"/>
-              </a:lnSpc>
-              <a:spcBef>
-                <a:spcPts val="300"/>
-              </a:spcBef>
-              <a:spcAft>
-                <a:spcPts val="300"/>
-              </a:spcAft>
-              <a:buNone/>
-            </a:pPr>
-            <a:r>
-              <a:rPr lang="en-US" sz="1200" dirty="0">
-                <a:solidFill>
-                  <a:srgbClr val="1C2833"/>
-                </a:solidFill>
-                <a:latin typeface="Arial" pitchFamily="34" charset="0"/>
-                <a:ea typeface="Arial" pitchFamily="34" charset="-122"/>
-                <a:cs typeface="Arial" pitchFamily="34" charset="-120"/>
-              </a:rPr>
-              <a:t>The Indian, Greek, and Babylonian names are </a:t>
-            </a:r>
-            <a:pPr algn="l" indent="0" marL="0">
-              <a:lnSpc>
-                <a:spcPts val="1680"/>
-              </a:lnSpc>
-              <a:spcBef>
-                <a:spcPts val="300"/>
-              </a:spcBef>
-              <a:spcAft>
-                <a:spcPts val="300"/>
-              </a:spcAft>
-              <a:buNone/>
-            </a:pPr>
-            <a:r>
-              <a:rPr lang="en-US" sz="1200" i="1" dirty="0">
-                <a:solidFill>
-                  <a:srgbClr val="1C2833"/>
-                </a:solidFill>
-                <a:latin typeface="Arial" pitchFamily="34" charset="0"/>
-                <a:ea typeface="Arial" pitchFamily="34" charset="-122"/>
-                <a:cs typeface="Arial" pitchFamily="34" charset="-120"/>
-              </a:rPr>
-              <a:t>strikingly similar</a:t>
-            </a:r>
-            <a:pPr algn="l" indent="0" marL="0">
-              <a:lnSpc>
-                <a:spcPts val="1680"/>
-              </a:lnSpc>
-              <a:spcBef>
-                <a:spcPts val="300"/>
-              </a:spcBef>
-              <a:spcAft>
-                <a:spcPts val="300"/>
-              </a:spcAft>
-              <a:buNone/>
-            </a:pPr>
-            <a:r>
-              <a:rPr lang="en-US" sz="1200" dirty="0">
-                <a:solidFill>
-                  <a:srgbClr val="1C2833"/>
-                </a:solidFill>
-                <a:latin typeface="Arial" pitchFamily="34" charset="0"/>
-                <a:ea typeface="Arial" pitchFamily="34" charset="-122"/>
-                <a:cs typeface="Arial" pitchFamily="34" charset="-120"/>
-              </a:rPr>
-              <a:t> — the same animals (ram, bull, twins, crab, lion, scorpion, fishes) appear in all three. This is not accidental. The most likely historical explanation is </a:t>
-            </a:r>
-            <a:pPr algn="l" indent="0" marL="0">
-              <a:lnSpc>
-                <a:spcPts val="1680"/>
-              </a:lnSpc>
-              <a:spcBef>
-                <a:spcPts val="300"/>
-              </a:spcBef>
-              <a:spcAft>
-                <a:spcPts val="300"/>
-              </a:spcAft>
-              <a:buNone/>
-            </a:pPr>
-            <a:r>
-              <a:rPr lang="en-US" sz="1200" b="1" dirty="0">
-                <a:solidFill>
-                  <a:srgbClr val="1C2833"/>
-                </a:solidFill>
-                <a:latin typeface="Arial" pitchFamily="34" charset="0"/>
-                <a:ea typeface="Arial" pitchFamily="34" charset="-122"/>
-                <a:cs typeface="Arial" pitchFamily="34" charset="-120"/>
-              </a:rPr>
-              <a:t>shared origin in Babylonian astronomy (~700 BCE)</a:t>
-            </a:r>
-            <a:pPr algn="l" indent="0" marL="0">
-              <a:lnSpc>
-                <a:spcPts val="1680"/>
-              </a:lnSpc>
-              <a:spcBef>
-                <a:spcPts val="300"/>
-              </a:spcBef>
-              <a:spcAft>
-                <a:spcPts val="300"/>
-              </a:spcAft>
-              <a:buNone/>
-            </a:pPr>
-            <a:r>
-              <a:rPr lang="en-US" sz="1200" dirty="0">
-                <a:solidFill>
-                  <a:srgbClr val="1C2833"/>
-                </a:solidFill>
-                <a:latin typeface="Arial" pitchFamily="34" charset="0"/>
-                <a:ea typeface="Arial" pitchFamily="34" charset="-122"/>
-                <a:cs typeface="Arial" pitchFamily="34" charset="-120"/>
-              </a:rPr>
-              <a:t>, transmitted to Greece (post-Alexander, ~300 BCE) and to India (Hellenistic contact, last centuries BCE). The 12-fold ecliptic division and the imagery were absorbed into the Indian </a:t>
-            </a:r>
-            <a:pPr algn="l" indent="0" marL="0">
-              <a:lnSpc>
-                <a:spcPts val="1680"/>
-              </a:lnSpc>
-              <a:spcBef>
-                <a:spcPts val="300"/>
-              </a:spcBef>
-              <a:spcAft>
-                <a:spcPts val="300"/>
-              </a:spcAft>
-              <a:buNone/>
-            </a:pPr>
-            <a:r>
-              <a:rPr lang="en-US" sz="1200" i="1" dirty="0">
-                <a:solidFill>
-                  <a:srgbClr val="1C2833"/>
-                </a:solidFill>
-                <a:latin typeface="Arial" pitchFamily="34" charset="0"/>
-                <a:ea typeface="Arial" pitchFamily="34" charset="-122"/>
-                <a:cs typeface="Arial" pitchFamily="34" charset="-120"/>
-              </a:rPr>
-              <a:t>jyotiṣa</a:t>
-            </a:r>
-            <a:pPr algn="l" indent="0" marL="0">
-              <a:lnSpc>
-                <a:spcPts val="1680"/>
-              </a:lnSpc>
-              <a:spcBef>
-                <a:spcPts val="300"/>
-              </a:spcBef>
-              <a:spcAft>
-                <a:spcPts val="300"/>
-              </a:spcAft>
-              <a:buNone/>
-            </a:pPr>
-            <a:r>
-              <a:rPr lang="en-US" sz="1200" dirty="0">
-                <a:solidFill>
-                  <a:srgbClr val="1C2833"/>
-                </a:solidFill>
-                <a:latin typeface="Arial" pitchFamily="34" charset="0"/>
-                <a:ea typeface="Arial" pitchFamily="34" charset="-122"/>
-                <a:cs typeface="Arial" pitchFamily="34" charset="-120"/>
-              </a:rPr>
-              <a:t> tradition and merged with earlier Vedic star-lore (the 27 </a:t>
-            </a:r>
-            <a:pPr algn="l" indent="0" marL="0">
-              <a:lnSpc>
-                <a:spcPts val="1680"/>
-              </a:lnSpc>
-              <a:spcBef>
-                <a:spcPts val="300"/>
-              </a:spcBef>
-              <a:spcAft>
-                <a:spcPts val="300"/>
-              </a:spcAft>
-              <a:buNone/>
-            </a:pPr>
-            <a:r>
-              <a:rPr lang="en-US" sz="1200" i="1" dirty="0">
-                <a:solidFill>
-                  <a:srgbClr val="1C2833"/>
-                </a:solidFill>
-                <a:latin typeface="Arial" pitchFamily="34" charset="0"/>
-                <a:ea typeface="Arial" pitchFamily="34" charset="-122"/>
-                <a:cs typeface="Arial" pitchFamily="34" charset="-120"/>
-              </a:rPr>
-              <a:t>nakṣatra</a:t>
-            </a:r>
-            <a:pPr algn="l" indent="0" marL="0">
-              <a:lnSpc>
-                <a:spcPts val="1680"/>
-              </a:lnSpc>
-              <a:spcBef>
-                <a:spcPts val="300"/>
-              </a:spcBef>
-              <a:spcAft>
-                <a:spcPts val="300"/>
-              </a:spcAft>
-              <a:buNone/>
-            </a:pPr>
-            <a:r>
-              <a:rPr lang="en-US" sz="1200" dirty="0">
-                <a:solidFill>
-                  <a:srgbClr val="1C2833"/>
-                </a:solidFill>
-                <a:latin typeface="Arial" pitchFamily="34" charset="0"/>
-                <a:ea typeface="Arial" pitchFamily="34" charset="-122"/>
-                <a:cs typeface="Arial" pitchFamily="34" charset="-120"/>
-              </a:rPr>
-              <a:t> system, which is genuinely older and independently Indian).</a:t>
-            </a:r>
-            <a:endParaRPr lang="en-US" sz="1200" dirty="0"/>
-          </a:p>
-        </p:txBody>
-      </p:sp>
-      <p:sp>
-        <p:nvSpPr>
-          <p:cNvPr id="8" name="Text 6"/>
-          <p:cNvSpPr/>
-          <p:nvPr/>
-        </p:nvSpPr>
-        <p:spPr>
-          <a:xfrm>
-            <a:off x="406301" y="5657404"/>
-            <a:ext cx="8498026" cy="213271"/>
-          </a:xfrm>
-          <a:prstGeom prst="rect">
-            <a:avLst/>
-          </a:prstGeom>
-          <a:noFill/>
-          <a:ln/>
-        </p:spPr>
-        <p:txBody>
-          <a:bodyPr wrap="square" lIns="0" tIns="0" rIns="0" bIns="0" rtlCol="0" anchor="t"/>
-          <a:lstStyle/>
-          <a:p>
-            <a:pPr algn="l" indent="0" marL="0">
-              <a:lnSpc>
-                <a:spcPts val="1680"/>
-              </a:lnSpc>
-              <a:spcBef>
-                <a:spcPts val="300"/>
-              </a:spcBef>
-              <a:spcAft>
-                <a:spcPts val="300"/>
-              </a:spcAft>
-              <a:buNone/>
-            </a:pPr>
-            <a:r>
-              <a:rPr lang="en-US" sz="1200" dirty="0">
-                <a:solidFill>
-                  <a:srgbClr val="1C2833"/>
-                </a:solidFill>
-                <a:latin typeface="Arial" pitchFamily="34" charset="0"/>
-                <a:ea typeface="Arial" pitchFamily="34" charset="-122"/>
-                <a:cs typeface="Arial" pitchFamily="34" charset="-120"/>
-              </a:rPr>
-              <a:t>The 27-</a:t>
-            </a:r>
-            <a:pPr algn="l" indent="0" marL="0">
-              <a:lnSpc>
-                <a:spcPts val="1680"/>
-              </a:lnSpc>
-              <a:spcBef>
-                <a:spcPts val="300"/>
-              </a:spcBef>
-              <a:spcAft>
-                <a:spcPts val="300"/>
-              </a:spcAft>
-              <a:buNone/>
-            </a:pPr>
-            <a:r>
-              <a:rPr lang="en-US" sz="1200" i="1" dirty="0">
-                <a:solidFill>
-                  <a:srgbClr val="1C2833"/>
-                </a:solidFill>
-                <a:latin typeface="Arial" pitchFamily="34" charset="0"/>
-                <a:ea typeface="Arial" pitchFamily="34" charset="-122"/>
-                <a:cs typeface="Arial" pitchFamily="34" charset="-120"/>
-              </a:rPr>
-              <a:t>nakṣatra</a:t>
-            </a:r>
-            <a:pPr algn="l" indent="0" marL="0">
-              <a:lnSpc>
-                <a:spcPts val="1680"/>
-              </a:lnSpc>
-              <a:spcBef>
-                <a:spcPts val="300"/>
-              </a:spcBef>
-              <a:spcAft>
-                <a:spcPts val="300"/>
-              </a:spcAft>
-              <a:buNone/>
-            </a:pPr>
-            <a:r>
-              <a:rPr lang="en-US" sz="1200" dirty="0">
-                <a:solidFill>
-                  <a:srgbClr val="1C2833"/>
-                </a:solidFill>
-                <a:latin typeface="Arial" pitchFamily="34" charset="0"/>
-                <a:ea typeface="Arial" pitchFamily="34" charset="-122"/>
-                <a:cs typeface="Arial" pitchFamily="34" charset="-120"/>
-              </a:rPr>
-              <a:t> system </a:t>
-            </a:r>
-            <a:pPr algn="l" indent="0" marL="0">
-              <a:lnSpc>
-                <a:spcPts val="1680"/>
-              </a:lnSpc>
-              <a:spcBef>
-                <a:spcPts val="300"/>
-              </a:spcBef>
-              <a:spcAft>
-                <a:spcPts val="300"/>
-              </a:spcAft>
-              <a:buNone/>
-            </a:pPr>
-            <a:r>
-              <a:rPr lang="en-US" sz="1200" b="1" dirty="0">
-                <a:solidFill>
-                  <a:srgbClr val="1C2833"/>
-                </a:solidFill>
-                <a:latin typeface="Arial" pitchFamily="34" charset="0"/>
-                <a:ea typeface="Arial" pitchFamily="34" charset="-122"/>
-                <a:cs typeface="Arial" pitchFamily="34" charset="-120"/>
-              </a:rPr>
-              <a:t>is</a:t>
-            </a:r>
-            <a:pPr algn="l" indent="0" marL="0">
-              <a:lnSpc>
-                <a:spcPts val="1680"/>
-              </a:lnSpc>
-              <a:spcBef>
-                <a:spcPts val="300"/>
-              </a:spcBef>
-              <a:spcAft>
-                <a:spcPts val="300"/>
-              </a:spcAft>
-              <a:buNone/>
-            </a:pPr>
-            <a:r>
-              <a:rPr lang="en-US" sz="1200" dirty="0">
-                <a:solidFill>
-                  <a:srgbClr val="1C2833"/>
-                </a:solidFill>
-                <a:latin typeface="Arial" pitchFamily="34" charset="0"/>
-                <a:ea typeface="Arial" pitchFamily="34" charset="-122"/>
-                <a:cs typeface="Arial" pitchFamily="34" charset="-120"/>
-              </a:rPr>
-              <a:t> distinctively Indian; the 12-</a:t>
-            </a:r>
-            <a:pPr algn="l" indent="0" marL="0">
-              <a:lnSpc>
-                <a:spcPts val="1680"/>
-              </a:lnSpc>
-              <a:spcBef>
-                <a:spcPts val="300"/>
-              </a:spcBef>
-              <a:spcAft>
-                <a:spcPts val="300"/>
-              </a:spcAft>
-              <a:buNone/>
-            </a:pPr>
-            <a:r>
-              <a:rPr lang="en-US" sz="1200" i="1" dirty="0">
-                <a:solidFill>
-                  <a:srgbClr val="1C2833"/>
-                </a:solidFill>
-                <a:latin typeface="Arial" pitchFamily="34" charset="0"/>
-                <a:ea typeface="Arial" pitchFamily="34" charset="-122"/>
-                <a:cs typeface="Arial" pitchFamily="34" charset="-120"/>
-              </a:rPr>
-              <a:t>rāśi</a:t>
-            </a:r>
-            <a:pPr algn="l" indent="0" marL="0">
-              <a:lnSpc>
-                <a:spcPts val="1680"/>
-              </a:lnSpc>
-              <a:spcBef>
-                <a:spcPts val="300"/>
-              </a:spcBef>
-              <a:spcAft>
-                <a:spcPts val="300"/>
-              </a:spcAft>
-              <a:buNone/>
-            </a:pPr>
-            <a:r>
-              <a:rPr lang="en-US" sz="1200" dirty="0">
-                <a:solidFill>
-                  <a:srgbClr val="1C2833"/>
-                </a:solidFill>
-                <a:latin typeface="Arial" pitchFamily="34" charset="0"/>
-                <a:ea typeface="Arial" pitchFamily="34" charset="-122"/>
-                <a:cs typeface="Arial" pitchFamily="34" charset="-120"/>
-              </a:rPr>
-              <a:t> system is the Babylonian-Greek-Indian common ground.</a:t>
-            </a:r>
-            <a:endParaRPr lang="en-US" sz="1200" dirty="0"/>
-          </a:p>
-        </p:txBody>
-      </p:sp>
-      <p:sp>
-        <p:nvSpPr>
-          <p:cNvPr id="9" name="Text 7"/>
-          <p:cNvSpPr/>
-          <p:nvPr/>
-        </p:nvSpPr>
-        <p:spPr>
-          <a:xfrm>
-            <a:off x="406301" y="6023074"/>
+            <a:off x="406301" y="4434929"/>
             <a:ext cx="8498026" cy="213271"/>
           </a:xfrm>
           <a:prstGeom prst="rect">
@@ -5330,7 +6576,7 @@
                 <a:ea typeface="Georgia" pitchFamily="34" charset="-122"/>
                 <a:cs typeface="Georgia" pitchFamily="34" charset="-120"/>
               </a:rPr>
-              <a:t>Lesson flow</a:t>
+              <a:t>Cross-cultural reference</a:t>
             </a:r>
             <a:endParaRPr lang="en-US" sz="1800" dirty="0"/>
           </a:p>
@@ -5339,6 +6585,148 @@
       <p:sp>
         <p:nvSpPr>
           <p:cNvPr id="4" name="Text 2"/>
+          <p:cNvSpPr/>
+          <p:nvPr/>
+        </p:nvSpPr>
+        <p:spPr>
+          <a:xfrm>
+            <a:off x="406301" y="870942"/>
+            <a:ext cx="8498026" cy="213271"/>
+          </a:xfrm>
+          <a:prstGeom prst="rect">
+            <a:avLst/>
+          </a:prstGeom>
+          <a:noFill/>
+          <a:ln/>
+        </p:spPr>
+        <p:txBody>
+          <a:bodyPr wrap="square" lIns="0" tIns="0" rIns="0" bIns="0" rtlCol="0" anchor="t"/>
+          <a:lstStyle/>
+          <a:p>
+            <a:pPr algn="l" indent="0" marL="0">
+              <a:lnSpc>
+                <a:spcPts val="1680"/>
+              </a:lnSpc>
+              <a:spcBef>
+                <a:spcPts val="300"/>
+              </a:spcBef>
+              <a:spcAft>
+                <a:spcPts val="300"/>
+              </a:spcAft>
+              <a:buNone/>
+            </a:pPr>
+            <a:r>
+              <a:rPr lang="en-US" sz="1200" dirty="0">
+                <a:solidFill>
+                  <a:srgbClr val="1C2833"/>
+                </a:solidFill>
+                <a:latin typeface="Arial" pitchFamily="34" charset="0"/>
+                <a:ea typeface="Arial" pitchFamily="34" charset="-122"/>
+                <a:cs typeface="Arial" pitchFamily="34" charset="-120"/>
+              </a:rPr>
+              <a:t>The 12 zodiac signs across three traditions:</a:t>
+            </a:r>
+            <a:endParaRPr lang="en-US" sz="1200" dirty="0"/>
+          </a:p>
+        </p:txBody>
+      </p:sp>
+      <p:sp>
+        <p:nvSpPr>
+          <p:cNvPr id="5" name="Text 3"/>
+          <p:cNvSpPr/>
+          <p:nvPr/>
+        </p:nvSpPr>
+        <p:spPr>
+          <a:xfrm>
+            <a:off x="406301" y="1160413"/>
+            <a:ext cx="8498026" cy="213271"/>
+          </a:xfrm>
+          <a:prstGeom prst="rect">
+            <a:avLst/>
+          </a:prstGeom>
+          <a:noFill/>
+          <a:ln/>
+        </p:spPr>
+        <p:txBody>
+          <a:bodyPr wrap="square" lIns="0" tIns="0" rIns="0" bIns="0" rtlCol="0" anchor="t"/>
+          <a:lstStyle/>
+          <a:p>
+            <a:pPr algn="l" indent="0" marL="0">
+              <a:lnSpc>
+                <a:spcPts val="1680"/>
+              </a:lnSpc>
+              <a:spcBef>
+                <a:spcPts val="300"/>
+              </a:spcBef>
+              <a:spcAft>
+                <a:spcPts val="300"/>
+              </a:spcAft>
+              <a:buNone/>
+            </a:pPr>
+            <a:r>
+              <a:rPr lang="en-US" sz="1200" i="1" dirty="0">
+                <a:solidFill>
+                  <a:srgbClr val="1C2833"/>
+                </a:solidFill>
+                <a:latin typeface="Arial" pitchFamily="34" charset="0"/>
+                <a:ea typeface="Arial" pitchFamily="34" charset="-122"/>
+                <a:cs typeface="Arial" pitchFamily="34" charset="-120"/>
+              </a:rPr>
+              <a:t>Each row: # · Sanskrit (Indian,</a:t>
+            </a:r>
+            <a:pPr algn="l" indent="0" marL="0">
+              <a:lnSpc>
+                <a:spcPts val="1680"/>
+              </a:lnSpc>
+              <a:spcBef>
+                <a:spcPts val="300"/>
+              </a:spcBef>
+              <a:spcAft>
+                <a:spcPts val="300"/>
+              </a:spcAft>
+              <a:buNone/>
+            </a:pPr>
+            <a:r>
+              <a:rPr lang="en-US" sz="1200" dirty="0">
+                <a:solidFill>
+                  <a:srgbClr val="1C2833"/>
+                </a:solidFill>
+                <a:latin typeface="Arial" pitchFamily="34" charset="0"/>
+                <a:ea typeface="Arial" pitchFamily="34" charset="-122"/>
+                <a:cs typeface="Arial" pitchFamily="34" charset="-120"/>
+              </a:rPr>
+              <a:t>rāśi</a:t>
+            </a:r>
+            <a:pPr algn="l" indent="0" marL="0">
+              <a:lnSpc>
+                <a:spcPts val="1680"/>
+              </a:lnSpc>
+              <a:spcBef>
+                <a:spcPts val="300"/>
+              </a:spcBef>
+              <a:spcAft>
+                <a:spcPts val="300"/>
+              </a:spcAft>
+              <a:buNone/>
+            </a:pPr>
+            <a:r>
+              <a:rPr lang="en-US" sz="1200" i="1" dirty="0">
+                <a:solidFill>
+                  <a:srgbClr val="1C2833"/>
+                </a:solidFill>
+                <a:latin typeface="Arial" pitchFamily="34" charset="0"/>
+                <a:ea typeface="Arial" pitchFamily="34" charset="-122"/>
+                <a:cs typeface="Arial" pitchFamily="34" charset="-120"/>
+              </a:rPr>
+              <a:t>) · Greek / English · Babylonian (~700 BCE origins).</a:t>
+            </a:r>
+            <a:endParaRPr lang="en-US" sz="1200" dirty="0"/>
+          </a:p>
+        </p:txBody>
+      </p:sp>
+      <p:sp>
+        <p:nvSpPr>
+          <p:cNvPr id="6" name="Text 4"/>
           <p:cNvSpPr/>
           <p:nvPr/>
         </p:nvSpPr>
@@ -5488,7 +6876,7 @@
                 <a:ea typeface="Georgia" pitchFamily="34" charset="-122"/>
                 <a:cs typeface="Georgia" pitchFamily="34" charset="-120"/>
               </a:rPr>
-              <a:t>Warm-up (5 min)</a:t>
+              <a:t>Cross-cultural reference (cont.)</a:t>
             </a:r>
             <a:endParaRPr lang="en-US" sz="1800" dirty="0"/>
           </a:p>
@@ -5502,8 +6890,8 @@
         </p:nvSpPr>
         <p:spPr>
           <a:xfrm>
-            <a:off x="406301" y="870942"/>
-            <a:ext cx="8498026" cy="639812"/>
+            <a:off x="634901" y="883593"/>
+            <a:ext cx="8102798" cy="2475905"/>
           </a:xfrm>
           <a:prstGeom prst="rect">
             <a:avLst/>
@@ -5515,36 +6903,51 @@
           <a:bodyPr wrap="square" lIns="0" tIns="0" rIns="0" bIns="0" rtlCol="0" anchor="t"/>
           <a:lstStyle/>
           <a:p>
-            <a:pPr algn="l" indent="0" marL="0">
-              <a:lnSpc>
-                <a:spcPts val="1680"/>
-              </a:lnSpc>
-              <a:spcBef>
-                <a:spcPts val="300"/>
-              </a:spcBef>
-              <a:spcAft>
-                <a:spcPts val="300"/>
-              </a:spcAft>
-              <a:buNone/>
-            </a:pPr>
-            <a:r>
-              <a:rPr lang="en-US" sz="1200" dirty="0">
-                <a:solidFill>
-                  <a:srgbClr val="1C2833"/>
-                </a:solidFill>
-                <a:latin typeface="Arial" pitchFamily="34" charset="0"/>
-                <a:ea typeface="Arial" pitchFamily="34" charset="-122"/>
-                <a:cs typeface="Arial" pitchFamily="34" charset="-120"/>
-              </a:rPr>
-              <a:t>– Project the cross-cultural table on the board. Take 30 seconds to let students absorb. – Prompt: </a:t>
-            </a:r>
-            <a:pPr algn="l" indent="0" marL="0">
-              <a:lnSpc>
-                <a:spcPts val="1680"/>
-              </a:lnSpc>
-              <a:spcBef>
-                <a:spcPts val="300"/>
-              </a:spcBef>
+            <a:pPr algn="l" marL="342900" indent="-342900">
+              <a:lnSpc>
+                <a:spcPts val="1620"/>
+              </a:lnSpc>
+              <a:spcAft>
+                <a:spcPts val="300"/>
+              </a:spcAft>
+              <a:buSzPct val="100000"/>
+              <a:buChar char="•"/>
+            </a:pPr>
+            <a:r>
+              <a:rPr lang="en-US" sz="1200" b="1" dirty="0">
+                <a:solidFill>
+                  <a:srgbClr val="1C2833"/>
+                </a:solidFill>
+                <a:latin typeface="Arial" pitchFamily="34" charset="0"/>
+                <a:ea typeface="Arial" pitchFamily="34" charset="-122"/>
+                <a:cs typeface="Arial" pitchFamily="34" charset="-120"/>
+              </a:rPr>
+              <a:t>1</a:t>
+            </a:r>
+            <a:pPr algn="l" indent="0" marL="0">
+              <a:lnSpc>
+                <a:spcPts val="1620"/>
+              </a:lnSpc>
+              <a:spcAft>
+                <a:spcPts val="300"/>
+              </a:spcAft>
+              <a:buNone/>
+            </a:pPr>
+            <a:r>
+              <a:rPr lang="en-US" sz="1200" dirty="0">
+                <a:solidFill>
+                  <a:srgbClr val="1C2833"/>
+                </a:solidFill>
+                <a:latin typeface="Arial" pitchFamily="34" charset="0"/>
+                <a:ea typeface="Arial" pitchFamily="34" charset="-122"/>
+                <a:cs typeface="Arial" pitchFamily="34" charset="-120"/>
+              </a:rPr>
+              <a:t> — </a:t>
+            </a:r>
+            <a:pPr algn="l" indent="0" marL="0">
+              <a:lnSpc>
+                <a:spcPts val="1620"/>
+              </a:lnSpc>
               <a:spcAft>
                 <a:spcPts val="300"/>
               </a:spcAft>
@@ -5559,30 +6962,783 @@
                 <a:ea typeface="Arial" pitchFamily="34" charset="-122"/>
                 <a:cs typeface="Arial" pitchFamily="34" charset="-120"/>
               </a:rPr>
-              <a:t>"What patterns do you see?"</a:t>
-            </a:r>
-            <a:pPr algn="l" indent="0" marL="0">
-              <a:lnSpc>
-                <a:spcPts val="1680"/>
-              </a:lnSpc>
-              <a:spcBef>
-                <a:spcPts val="300"/>
-              </a:spcBef>
-              <a:spcAft>
-                <a:spcPts val="300"/>
-              </a:spcAft>
-              <a:buNone/>
-            </a:pPr>
-            <a:r>
-              <a:rPr lang="en-US" sz="1200" dirty="0">
-                <a:solidFill>
-                  <a:srgbClr val="1C2833"/>
-                </a:solidFill>
-                <a:latin typeface="Arial" pitchFamily="34" charset="0"/>
-                <a:ea typeface="Arial" pitchFamily="34" charset="-122"/>
-                <a:cs typeface="Arial" pitchFamily="34" charset="-120"/>
-              </a:rPr>
-              <a:t> — collect 2 observations. – Likely observation: "they're all about the same animals." Confirm: yes — and this is a real historical clue about cultural exchange.</a:t>
+              <a:t>Meṣa</a:t>
+            </a:r>
+            <a:pPr algn="l" indent="0" marL="0">
+              <a:lnSpc>
+                <a:spcPts val="1620"/>
+              </a:lnSpc>
+              <a:spcAft>
+                <a:spcPts val="300"/>
+              </a:spcAft>
+              <a:buNone/>
+            </a:pPr>
+            <a:r>
+              <a:rPr lang="en-US" sz="1200" dirty="0">
+                <a:solidFill>
+                  <a:srgbClr val="1C2833"/>
+                </a:solidFill>
+                <a:latin typeface="Arial" pitchFamily="34" charset="0"/>
+                <a:ea typeface="Arial" pitchFamily="34" charset="-122"/>
+                <a:cs typeface="Arial" pitchFamily="34" charset="-120"/>
+              </a:rPr>
+              <a:t> (Ram) · Aries (Ram) · LU.ḪUN.GÁ (Hired Man)</a:t>
+            </a:r>
+            <a:endParaRPr lang="en-US" sz="1200" dirty="0"/>
+          </a:p>
+          <a:p>
+            <a:pPr algn="l" marL="342900" indent="-342900">
+              <a:lnSpc>
+                <a:spcPts val="1620"/>
+              </a:lnSpc>
+              <a:spcAft>
+                <a:spcPts val="300"/>
+              </a:spcAft>
+              <a:buSzPct val="100000"/>
+              <a:buChar char="•"/>
+            </a:pPr>
+            <a:r>
+              <a:rPr lang="en-US" sz="1200" b="1" dirty="0">
+                <a:solidFill>
+                  <a:srgbClr val="1C2833"/>
+                </a:solidFill>
+                <a:latin typeface="Arial" pitchFamily="34" charset="0"/>
+                <a:ea typeface="Arial" pitchFamily="34" charset="-122"/>
+                <a:cs typeface="Arial" pitchFamily="34" charset="-120"/>
+              </a:rPr>
+              <a:t>2</a:t>
+            </a:r>
+            <a:pPr algn="l" indent="0" marL="0">
+              <a:lnSpc>
+                <a:spcPts val="1620"/>
+              </a:lnSpc>
+              <a:spcAft>
+                <a:spcPts val="300"/>
+              </a:spcAft>
+              <a:buNone/>
+            </a:pPr>
+            <a:r>
+              <a:rPr lang="en-US" sz="1200" dirty="0">
+                <a:solidFill>
+                  <a:srgbClr val="1C2833"/>
+                </a:solidFill>
+                <a:latin typeface="Arial" pitchFamily="34" charset="0"/>
+                <a:ea typeface="Arial" pitchFamily="34" charset="-122"/>
+                <a:cs typeface="Arial" pitchFamily="34" charset="-120"/>
+              </a:rPr>
+              <a:t> — </a:t>
+            </a:r>
+            <a:pPr algn="l" indent="0" marL="0">
+              <a:lnSpc>
+                <a:spcPts val="1620"/>
+              </a:lnSpc>
+              <a:spcAft>
+                <a:spcPts val="300"/>
+              </a:spcAft>
+              <a:buNone/>
+            </a:pPr>
+            <a:r>
+              <a:rPr lang="en-US" sz="1200" i="1" dirty="0">
+                <a:solidFill>
+                  <a:srgbClr val="1C2833"/>
+                </a:solidFill>
+                <a:latin typeface="Arial" pitchFamily="34" charset="0"/>
+                <a:ea typeface="Arial" pitchFamily="34" charset="-122"/>
+                <a:cs typeface="Arial" pitchFamily="34" charset="-120"/>
+              </a:rPr>
+              <a:t>Vṛṣabha</a:t>
+            </a:r>
+            <a:pPr algn="l" indent="0" marL="0">
+              <a:lnSpc>
+                <a:spcPts val="1620"/>
+              </a:lnSpc>
+              <a:spcAft>
+                <a:spcPts val="300"/>
+              </a:spcAft>
+              <a:buNone/>
+            </a:pPr>
+            <a:r>
+              <a:rPr lang="en-US" sz="1200" dirty="0">
+                <a:solidFill>
+                  <a:srgbClr val="1C2833"/>
+                </a:solidFill>
+                <a:latin typeface="Arial" pitchFamily="34" charset="0"/>
+                <a:ea typeface="Arial" pitchFamily="34" charset="-122"/>
+                <a:cs typeface="Arial" pitchFamily="34" charset="-120"/>
+              </a:rPr>
+              <a:t> (Bull) · Taurus (Bull) · GU.AN.NA (Bull of Heaven)</a:t>
+            </a:r>
+            <a:endParaRPr lang="en-US" sz="1200" dirty="0"/>
+          </a:p>
+          <a:p>
+            <a:pPr algn="l" marL="342900" indent="-342900">
+              <a:lnSpc>
+                <a:spcPts val="1620"/>
+              </a:lnSpc>
+              <a:spcAft>
+                <a:spcPts val="300"/>
+              </a:spcAft>
+              <a:buSzPct val="100000"/>
+              <a:buChar char="•"/>
+            </a:pPr>
+            <a:r>
+              <a:rPr lang="en-US" sz="1200" b="1" dirty="0">
+                <a:solidFill>
+                  <a:srgbClr val="1C2833"/>
+                </a:solidFill>
+                <a:latin typeface="Arial" pitchFamily="34" charset="0"/>
+                <a:ea typeface="Arial" pitchFamily="34" charset="-122"/>
+                <a:cs typeface="Arial" pitchFamily="34" charset="-120"/>
+              </a:rPr>
+              <a:t>3</a:t>
+            </a:r>
+            <a:pPr algn="l" indent="0" marL="0">
+              <a:lnSpc>
+                <a:spcPts val="1620"/>
+              </a:lnSpc>
+              <a:spcAft>
+                <a:spcPts val="300"/>
+              </a:spcAft>
+              <a:buNone/>
+            </a:pPr>
+            <a:r>
+              <a:rPr lang="en-US" sz="1200" dirty="0">
+                <a:solidFill>
+                  <a:srgbClr val="1C2833"/>
+                </a:solidFill>
+                <a:latin typeface="Arial" pitchFamily="34" charset="0"/>
+                <a:ea typeface="Arial" pitchFamily="34" charset="-122"/>
+                <a:cs typeface="Arial" pitchFamily="34" charset="-120"/>
+              </a:rPr>
+              <a:t> — </a:t>
+            </a:r>
+            <a:pPr algn="l" indent="0" marL="0">
+              <a:lnSpc>
+                <a:spcPts val="1620"/>
+              </a:lnSpc>
+              <a:spcAft>
+                <a:spcPts val="300"/>
+              </a:spcAft>
+              <a:buNone/>
+            </a:pPr>
+            <a:r>
+              <a:rPr lang="en-US" sz="1200" i="1" dirty="0">
+                <a:solidFill>
+                  <a:srgbClr val="1C2833"/>
+                </a:solidFill>
+                <a:latin typeface="Arial" pitchFamily="34" charset="0"/>
+                <a:ea typeface="Arial" pitchFamily="34" charset="-122"/>
+                <a:cs typeface="Arial" pitchFamily="34" charset="-120"/>
+              </a:rPr>
+              <a:t>Mithuna</a:t>
+            </a:r>
+            <a:pPr algn="l" indent="0" marL="0">
+              <a:lnSpc>
+                <a:spcPts val="1620"/>
+              </a:lnSpc>
+              <a:spcAft>
+                <a:spcPts val="300"/>
+              </a:spcAft>
+              <a:buNone/>
+            </a:pPr>
+            <a:r>
+              <a:rPr lang="en-US" sz="1200" dirty="0">
+                <a:solidFill>
+                  <a:srgbClr val="1C2833"/>
+                </a:solidFill>
+                <a:latin typeface="Arial" pitchFamily="34" charset="0"/>
+                <a:ea typeface="Arial" pitchFamily="34" charset="-122"/>
+                <a:cs typeface="Arial" pitchFamily="34" charset="-120"/>
+              </a:rPr>
+              <a:t> (Twins) · Gemini (Twins) · MAŠ.TAB.BA (Great Twins)</a:t>
+            </a:r>
+            <a:endParaRPr lang="en-US" sz="1200" dirty="0"/>
+          </a:p>
+          <a:p>
+            <a:pPr algn="l" marL="342900" indent="-342900">
+              <a:lnSpc>
+                <a:spcPts val="1620"/>
+              </a:lnSpc>
+              <a:spcAft>
+                <a:spcPts val="300"/>
+              </a:spcAft>
+              <a:buSzPct val="100000"/>
+              <a:buChar char="•"/>
+            </a:pPr>
+            <a:r>
+              <a:rPr lang="en-US" sz="1200" b="1" dirty="0">
+                <a:solidFill>
+                  <a:srgbClr val="1C2833"/>
+                </a:solidFill>
+                <a:latin typeface="Arial" pitchFamily="34" charset="0"/>
+                <a:ea typeface="Arial" pitchFamily="34" charset="-122"/>
+                <a:cs typeface="Arial" pitchFamily="34" charset="-120"/>
+              </a:rPr>
+              <a:t>4</a:t>
+            </a:r>
+            <a:pPr algn="l" indent="0" marL="0">
+              <a:lnSpc>
+                <a:spcPts val="1620"/>
+              </a:lnSpc>
+              <a:spcAft>
+                <a:spcPts val="300"/>
+              </a:spcAft>
+              <a:buNone/>
+            </a:pPr>
+            <a:r>
+              <a:rPr lang="en-US" sz="1200" dirty="0">
+                <a:solidFill>
+                  <a:srgbClr val="1C2833"/>
+                </a:solidFill>
+                <a:latin typeface="Arial" pitchFamily="34" charset="0"/>
+                <a:ea typeface="Arial" pitchFamily="34" charset="-122"/>
+                <a:cs typeface="Arial" pitchFamily="34" charset="-120"/>
+              </a:rPr>
+              <a:t> — </a:t>
+            </a:r>
+            <a:pPr algn="l" indent="0" marL="0">
+              <a:lnSpc>
+                <a:spcPts val="1620"/>
+              </a:lnSpc>
+              <a:spcAft>
+                <a:spcPts val="300"/>
+              </a:spcAft>
+              <a:buNone/>
+            </a:pPr>
+            <a:r>
+              <a:rPr lang="en-US" sz="1200" i="1" dirty="0">
+                <a:solidFill>
+                  <a:srgbClr val="1C2833"/>
+                </a:solidFill>
+                <a:latin typeface="Arial" pitchFamily="34" charset="0"/>
+                <a:ea typeface="Arial" pitchFamily="34" charset="-122"/>
+                <a:cs typeface="Arial" pitchFamily="34" charset="-120"/>
+              </a:rPr>
+              <a:t>Karka</a:t>
+            </a:r>
+            <a:pPr algn="l" indent="0" marL="0">
+              <a:lnSpc>
+                <a:spcPts val="1620"/>
+              </a:lnSpc>
+              <a:spcAft>
+                <a:spcPts val="300"/>
+              </a:spcAft>
+              <a:buNone/>
+            </a:pPr>
+            <a:r>
+              <a:rPr lang="en-US" sz="1200" dirty="0">
+                <a:solidFill>
+                  <a:srgbClr val="1C2833"/>
+                </a:solidFill>
+                <a:latin typeface="Arial" pitchFamily="34" charset="0"/>
+                <a:ea typeface="Arial" pitchFamily="34" charset="-122"/>
+                <a:cs typeface="Arial" pitchFamily="34" charset="-120"/>
+              </a:rPr>
+              <a:t> (Crab) · Cancer (Crab) · AL.LUL (Crab)</a:t>
+            </a:r>
+            <a:endParaRPr lang="en-US" sz="1200" dirty="0"/>
+          </a:p>
+          <a:p>
+            <a:pPr algn="l" marL="342900" indent="-342900">
+              <a:lnSpc>
+                <a:spcPts val="1620"/>
+              </a:lnSpc>
+              <a:spcAft>
+                <a:spcPts val="300"/>
+              </a:spcAft>
+              <a:buSzPct val="100000"/>
+              <a:buChar char="•"/>
+            </a:pPr>
+            <a:r>
+              <a:rPr lang="en-US" sz="1200" b="1" dirty="0">
+                <a:solidFill>
+                  <a:srgbClr val="1C2833"/>
+                </a:solidFill>
+                <a:latin typeface="Arial" pitchFamily="34" charset="0"/>
+                <a:ea typeface="Arial" pitchFamily="34" charset="-122"/>
+                <a:cs typeface="Arial" pitchFamily="34" charset="-120"/>
+              </a:rPr>
+              <a:t>5</a:t>
+            </a:r>
+            <a:pPr algn="l" indent="0" marL="0">
+              <a:lnSpc>
+                <a:spcPts val="1620"/>
+              </a:lnSpc>
+              <a:spcAft>
+                <a:spcPts val="300"/>
+              </a:spcAft>
+              <a:buNone/>
+            </a:pPr>
+            <a:r>
+              <a:rPr lang="en-US" sz="1200" dirty="0">
+                <a:solidFill>
+                  <a:srgbClr val="1C2833"/>
+                </a:solidFill>
+                <a:latin typeface="Arial" pitchFamily="34" charset="0"/>
+                <a:ea typeface="Arial" pitchFamily="34" charset="-122"/>
+                <a:cs typeface="Arial" pitchFamily="34" charset="-120"/>
+              </a:rPr>
+              <a:t> — </a:t>
+            </a:r>
+            <a:pPr algn="l" indent="0" marL="0">
+              <a:lnSpc>
+                <a:spcPts val="1620"/>
+              </a:lnSpc>
+              <a:spcAft>
+                <a:spcPts val="300"/>
+              </a:spcAft>
+              <a:buNone/>
+            </a:pPr>
+            <a:r>
+              <a:rPr lang="en-US" sz="1200" i="1" dirty="0">
+                <a:solidFill>
+                  <a:srgbClr val="1C2833"/>
+                </a:solidFill>
+                <a:latin typeface="Arial" pitchFamily="34" charset="0"/>
+                <a:ea typeface="Arial" pitchFamily="34" charset="-122"/>
+                <a:cs typeface="Arial" pitchFamily="34" charset="-120"/>
+              </a:rPr>
+              <a:t>Siṁha</a:t>
+            </a:r>
+            <a:pPr algn="l" indent="0" marL="0">
+              <a:lnSpc>
+                <a:spcPts val="1620"/>
+              </a:lnSpc>
+              <a:spcAft>
+                <a:spcPts val="300"/>
+              </a:spcAft>
+              <a:buNone/>
+            </a:pPr>
+            <a:r>
+              <a:rPr lang="en-US" sz="1200" dirty="0">
+                <a:solidFill>
+                  <a:srgbClr val="1C2833"/>
+                </a:solidFill>
+                <a:latin typeface="Arial" pitchFamily="34" charset="0"/>
+                <a:ea typeface="Arial" pitchFamily="34" charset="-122"/>
+                <a:cs typeface="Arial" pitchFamily="34" charset="-120"/>
+              </a:rPr>
+              <a:t> (Lion) · Leo (Lion) · UR.GU.LA (Lion)</a:t>
+            </a:r>
+            <a:endParaRPr lang="en-US" sz="1200" dirty="0"/>
+          </a:p>
+          <a:p>
+            <a:pPr algn="l" marL="342900" indent="-342900">
+              <a:lnSpc>
+                <a:spcPts val="1620"/>
+              </a:lnSpc>
+              <a:spcAft>
+                <a:spcPts val="300"/>
+              </a:spcAft>
+              <a:buSzPct val="100000"/>
+              <a:buChar char="•"/>
+            </a:pPr>
+            <a:r>
+              <a:rPr lang="en-US" sz="1200" b="1" dirty="0">
+                <a:solidFill>
+                  <a:srgbClr val="1C2833"/>
+                </a:solidFill>
+                <a:latin typeface="Arial" pitchFamily="34" charset="0"/>
+                <a:ea typeface="Arial" pitchFamily="34" charset="-122"/>
+                <a:cs typeface="Arial" pitchFamily="34" charset="-120"/>
+              </a:rPr>
+              <a:t>6</a:t>
+            </a:r>
+            <a:pPr algn="l" indent="0" marL="0">
+              <a:lnSpc>
+                <a:spcPts val="1620"/>
+              </a:lnSpc>
+              <a:spcAft>
+                <a:spcPts val="300"/>
+              </a:spcAft>
+              <a:buNone/>
+            </a:pPr>
+            <a:r>
+              <a:rPr lang="en-US" sz="1200" dirty="0">
+                <a:solidFill>
+                  <a:srgbClr val="1C2833"/>
+                </a:solidFill>
+                <a:latin typeface="Arial" pitchFamily="34" charset="0"/>
+                <a:ea typeface="Arial" pitchFamily="34" charset="-122"/>
+                <a:cs typeface="Arial" pitchFamily="34" charset="-120"/>
+              </a:rPr>
+              <a:t> — </a:t>
+            </a:r>
+            <a:pPr algn="l" indent="0" marL="0">
+              <a:lnSpc>
+                <a:spcPts val="1620"/>
+              </a:lnSpc>
+              <a:spcAft>
+                <a:spcPts val="300"/>
+              </a:spcAft>
+              <a:buNone/>
+            </a:pPr>
+            <a:r>
+              <a:rPr lang="en-US" sz="1200" i="1" dirty="0">
+                <a:solidFill>
+                  <a:srgbClr val="1C2833"/>
+                </a:solidFill>
+                <a:latin typeface="Arial" pitchFamily="34" charset="0"/>
+                <a:ea typeface="Arial" pitchFamily="34" charset="-122"/>
+                <a:cs typeface="Arial" pitchFamily="34" charset="-120"/>
+              </a:rPr>
+              <a:t>Kanyā</a:t>
+            </a:r>
+            <a:pPr algn="l" indent="0" marL="0">
+              <a:lnSpc>
+                <a:spcPts val="1620"/>
+              </a:lnSpc>
+              <a:spcAft>
+                <a:spcPts val="300"/>
+              </a:spcAft>
+              <a:buNone/>
+            </a:pPr>
+            <a:r>
+              <a:rPr lang="en-US" sz="1200" dirty="0">
+                <a:solidFill>
+                  <a:srgbClr val="1C2833"/>
+                </a:solidFill>
+                <a:latin typeface="Arial" pitchFamily="34" charset="0"/>
+                <a:ea typeface="Arial" pitchFamily="34" charset="-122"/>
+                <a:cs typeface="Arial" pitchFamily="34" charset="-120"/>
+              </a:rPr>
+              <a:t> (Maiden) · Virgo (Maiden) · AB.SIN (Furrow / barley ear)</a:t>
+            </a:r>
+            <a:endParaRPr lang="en-US" sz="1200" dirty="0"/>
+          </a:p>
+          <a:p>
+            <a:pPr algn="l" marL="342900" indent="-342900">
+              <a:lnSpc>
+                <a:spcPts val="1620"/>
+              </a:lnSpc>
+              <a:spcAft>
+                <a:spcPts val="300"/>
+              </a:spcAft>
+              <a:buSzPct val="100000"/>
+              <a:buChar char="•"/>
+            </a:pPr>
+            <a:r>
+              <a:rPr lang="en-US" sz="1200" b="1" dirty="0">
+                <a:solidFill>
+                  <a:srgbClr val="1C2833"/>
+                </a:solidFill>
+                <a:latin typeface="Arial" pitchFamily="34" charset="0"/>
+                <a:ea typeface="Arial" pitchFamily="34" charset="-122"/>
+                <a:cs typeface="Arial" pitchFamily="34" charset="-120"/>
+              </a:rPr>
+              <a:t>7</a:t>
+            </a:r>
+            <a:pPr algn="l" indent="0" marL="0">
+              <a:lnSpc>
+                <a:spcPts val="1620"/>
+              </a:lnSpc>
+              <a:spcAft>
+                <a:spcPts val="300"/>
+              </a:spcAft>
+              <a:buNone/>
+            </a:pPr>
+            <a:r>
+              <a:rPr lang="en-US" sz="1200" dirty="0">
+                <a:solidFill>
+                  <a:srgbClr val="1C2833"/>
+                </a:solidFill>
+                <a:latin typeface="Arial" pitchFamily="34" charset="0"/>
+                <a:ea typeface="Arial" pitchFamily="34" charset="-122"/>
+                <a:cs typeface="Arial" pitchFamily="34" charset="-120"/>
+              </a:rPr>
+              <a:t> — </a:t>
+            </a:r>
+            <a:pPr algn="l" indent="0" marL="0">
+              <a:lnSpc>
+                <a:spcPts val="1620"/>
+              </a:lnSpc>
+              <a:spcAft>
+                <a:spcPts val="300"/>
+              </a:spcAft>
+              <a:buNone/>
+            </a:pPr>
+            <a:r>
+              <a:rPr lang="en-US" sz="1200" i="1" dirty="0">
+                <a:solidFill>
+                  <a:srgbClr val="1C2833"/>
+                </a:solidFill>
+                <a:latin typeface="Arial" pitchFamily="34" charset="0"/>
+                <a:ea typeface="Arial" pitchFamily="34" charset="-122"/>
+                <a:cs typeface="Arial" pitchFamily="34" charset="-120"/>
+              </a:rPr>
+              <a:t>Tulā</a:t>
+            </a:r>
+            <a:pPr algn="l" indent="0" marL="0">
+              <a:lnSpc>
+                <a:spcPts val="1620"/>
+              </a:lnSpc>
+              <a:spcAft>
+                <a:spcPts val="300"/>
+              </a:spcAft>
+              <a:buNone/>
+            </a:pPr>
+            <a:r>
+              <a:rPr lang="en-US" sz="1200" dirty="0">
+                <a:solidFill>
+                  <a:srgbClr val="1C2833"/>
+                </a:solidFill>
+                <a:latin typeface="Arial" pitchFamily="34" charset="0"/>
+                <a:ea typeface="Arial" pitchFamily="34" charset="-122"/>
+                <a:cs typeface="Arial" pitchFamily="34" charset="-120"/>
+              </a:rPr>
+              <a:t> (Scales) · Libra (Scales) · RIN (Balance)</a:t>
+            </a:r>
+            <a:endParaRPr lang="en-US" sz="1200" dirty="0"/>
+          </a:p>
+          <a:p>
+            <a:pPr algn="l" marL="342900" indent="-342900">
+              <a:lnSpc>
+                <a:spcPts val="1620"/>
+              </a:lnSpc>
+              <a:spcAft>
+                <a:spcPts val="300"/>
+              </a:spcAft>
+              <a:buSzPct val="100000"/>
+              <a:buChar char="•"/>
+            </a:pPr>
+            <a:r>
+              <a:rPr lang="en-US" sz="1200" b="1" dirty="0">
+                <a:solidFill>
+                  <a:srgbClr val="1C2833"/>
+                </a:solidFill>
+                <a:latin typeface="Arial" pitchFamily="34" charset="0"/>
+                <a:ea typeface="Arial" pitchFamily="34" charset="-122"/>
+                <a:cs typeface="Arial" pitchFamily="34" charset="-120"/>
+              </a:rPr>
+              <a:t>8</a:t>
+            </a:r>
+            <a:pPr algn="l" indent="0" marL="0">
+              <a:lnSpc>
+                <a:spcPts val="1620"/>
+              </a:lnSpc>
+              <a:spcAft>
+                <a:spcPts val="300"/>
+              </a:spcAft>
+              <a:buNone/>
+            </a:pPr>
+            <a:r>
+              <a:rPr lang="en-US" sz="1200" dirty="0">
+                <a:solidFill>
+                  <a:srgbClr val="1C2833"/>
+                </a:solidFill>
+                <a:latin typeface="Arial" pitchFamily="34" charset="0"/>
+                <a:ea typeface="Arial" pitchFamily="34" charset="-122"/>
+                <a:cs typeface="Arial" pitchFamily="34" charset="-120"/>
+              </a:rPr>
+              <a:t> — </a:t>
+            </a:r>
+            <a:pPr algn="l" indent="0" marL="0">
+              <a:lnSpc>
+                <a:spcPts val="1620"/>
+              </a:lnSpc>
+              <a:spcAft>
+                <a:spcPts val="300"/>
+              </a:spcAft>
+              <a:buNone/>
+            </a:pPr>
+            <a:r>
+              <a:rPr lang="en-US" sz="1200" i="1" dirty="0">
+                <a:solidFill>
+                  <a:srgbClr val="1C2833"/>
+                </a:solidFill>
+                <a:latin typeface="Arial" pitchFamily="34" charset="0"/>
+                <a:ea typeface="Arial" pitchFamily="34" charset="-122"/>
+                <a:cs typeface="Arial" pitchFamily="34" charset="-120"/>
+              </a:rPr>
+              <a:t>Vṛścika</a:t>
+            </a:r>
+            <a:pPr algn="l" indent="0" marL="0">
+              <a:lnSpc>
+                <a:spcPts val="1620"/>
+              </a:lnSpc>
+              <a:spcAft>
+                <a:spcPts val="300"/>
+              </a:spcAft>
+              <a:buNone/>
+            </a:pPr>
+            <a:r>
+              <a:rPr lang="en-US" sz="1200" dirty="0">
+                <a:solidFill>
+                  <a:srgbClr val="1C2833"/>
+                </a:solidFill>
+                <a:latin typeface="Arial" pitchFamily="34" charset="0"/>
+                <a:ea typeface="Arial" pitchFamily="34" charset="-122"/>
+                <a:cs typeface="Arial" pitchFamily="34" charset="-120"/>
+              </a:rPr>
+              <a:t> (Scorpion) · Scorpio (Scorpion) · GIR.TAB (Scorpion)</a:t>
+            </a:r>
+            <a:endParaRPr lang="en-US" sz="1200" dirty="0"/>
+          </a:p>
+          <a:p>
+            <a:pPr algn="l" marL="342900" indent="-342900">
+              <a:lnSpc>
+                <a:spcPts val="1620"/>
+              </a:lnSpc>
+              <a:spcAft>
+                <a:spcPts val="300"/>
+              </a:spcAft>
+              <a:buSzPct val="100000"/>
+              <a:buChar char="•"/>
+            </a:pPr>
+            <a:r>
+              <a:rPr lang="en-US" sz="1200" b="1" dirty="0">
+                <a:solidFill>
+                  <a:srgbClr val="1C2833"/>
+                </a:solidFill>
+                <a:latin typeface="Arial" pitchFamily="34" charset="0"/>
+                <a:ea typeface="Arial" pitchFamily="34" charset="-122"/>
+                <a:cs typeface="Arial" pitchFamily="34" charset="-120"/>
+              </a:rPr>
+              <a:t>9</a:t>
+            </a:r>
+            <a:pPr algn="l" indent="0" marL="0">
+              <a:lnSpc>
+                <a:spcPts val="1620"/>
+              </a:lnSpc>
+              <a:spcAft>
+                <a:spcPts val="300"/>
+              </a:spcAft>
+              <a:buNone/>
+            </a:pPr>
+            <a:r>
+              <a:rPr lang="en-US" sz="1200" dirty="0">
+                <a:solidFill>
+                  <a:srgbClr val="1C2833"/>
+                </a:solidFill>
+                <a:latin typeface="Arial" pitchFamily="34" charset="0"/>
+                <a:ea typeface="Arial" pitchFamily="34" charset="-122"/>
+                <a:cs typeface="Arial" pitchFamily="34" charset="-120"/>
+              </a:rPr>
+              <a:t> — </a:t>
+            </a:r>
+            <a:pPr algn="l" indent="0" marL="0">
+              <a:lnSpc>
+                <a:spcPts val="1620"/>
+              </a:lnSpc>
+              <a:spcAft>
+                <a:spcPts val="300"/>
+              </a:spcAft>
+              <a:buNone/>
+            </a:pPr>
+            <a:r>
+              <a:rPr lang="en-US" sz="1200" i="1" dirty="0">
+                <a:solidFill>
+                  <a:srgbClr val="1C2833"/>
+                </a:solidFill>
+                <a:latin typeface="Arial" pitchFamily="34" charset="0"/>
+                <a:ea typeface="Arial" pitchFamily="34" charset="-122"/>
+                <a:cs typeface="Arial" pitchFamily="34" charset="-120"/>
+              </a:rPr>
+              <a:t>Dhanus</a:t>
+            </a:r>
+            <a:pPr algn="l" indent="0" marL="0">
+              <a:lnSpc>
+                <a:spcPts val="1620"/>
+              </a:lnSpc>
+              <a:spcAft>
+                <a:spcPts val="300"/>
+              </a:spcAft>
+              <a:buNone/>
+            </a:pPr>
+            <a:r>
+              <a:rPr lang="en-US" sz="1200" dirty="0">
+                <a:solidFill>
+                  <a:srgbClr val="1C2833"/>
+                </a:solidFill>
+                <a:latin typeface="Arial" pitchFamily="34" charset="0"/>
+                <a:ea typeface="Arial" pitchFamily="34" charset="-122"/>
+                <a:cs typeface="Arial" pitchFamily="34" charset="-120"/>
+              </a:rPr>
+              <a:t> (Bow) · Sagittarius (Archer) · PA.BIL.SAG (Archer)</a:t>
+            </a:r>
+            <a:endParaRPr lang="en-US" sz="1200" dirty="0"/>
+          </a:p>
+          <a:p>
+            <a:pPr algn="l" marL="342900" indent="-342900">
+              <a:lnSpc>
+                <a:spcPts val="1620"/>
+              </a:lnSpc>
+              <a:spcAft>
+                <a:spcPts val="300"/>
+              </a:spcAft>
+              <a:buSzPct val="100000"/>
+              <a:buChar char="•"/>
+            </a:pPr>
+            <a:r>
+              <a:rPr lang="en-US" sz="1200" b="1" dirty="0">
+                <a:solidFill>
+                  <a:srgbClr val="1C2833"/>
+                </a:solidFill>
+                <a:latin typeface="Arial" pitchFamily="34" charset="0"/>
+                <a:ea typeface="Arial" pitchFamily="34" charset="-122"/>
+                <a:cs typeface="Arial" pitchFamily="34" charset="-120"/>
+              </a:rPr>
+              <a:t>10</a:t>
+            </a:r>
+            <a:pPr algn="l" indent="0" marL="0">
+              <a:lnSpc>
+                <a:spcPts val="1620"/>
+              </a:lnSpc>
+              <a:spcAft>
+                <a:spcPts val="300"/>
+              </a:spcAft>
+              <a:buNone/>
+            </a:pPr>
+            <a:r>
+              <a:rPr lang="en-US" sz="1200" dirty="0">
+                <a:solidFill>
+                  <a:srgbClr val="1C2833"/>
+                </a:solidFill>
+                <a:latin typeface="Arial" pitchFamily="34" charset="0"/>
+                <a:ea typeface="Arial" pitchFamily="34" charset="-122"/>
+                <a:cs typeface="Arial" pitchFamily="34" charset="-120"/>
+              </a:rPr>
+              <a:t> — </a:t>
+            </a:r>
+            <a:pPr algn="l" indent="0" marL="0">
+              <a:lnSpc>
+                <a:spcPts val="1620"/>
+              </a:lnSpc>
+              <a:spcAft>
+                <a:spcPts val="300"/>
+              </a:spcAft>
+              <a:buNone/>
+            </a:pPr>
+            <a:r>
+              <a:rPr lang="en-US" sz="1200" i="1" dirty="0">
+                <a:solidFill>
+                  <a:srgbClr val="1C2833"/>
+                </a:solidFill>
+                <a:latin typeface="Arial" pitchFamily="34" charset="0"/>
+                <a:ea typeface="Arial" pitchFamily="34" charset="-122"/>
+                <a:cs typeface="Arial" pitchFamily="34" charset="-120"/>
+              </a:rPr>
+              <a:t>Makara</a:t>
+            </a:r>
+            <a:pPr algn="l" indent="0" marL="0">
+              <a:lnSpc>
+                <a:spcPts val="1620"/>
+              </a:lnSpc>
+              <a:spcAft>
+                <a:spcPts val="300"/>
+              </a:spcAft>
+              <a:buNone/>
+            </a:pPr>
+            <a:r>
+              <a:rPr lang="en-US" sz="1200" dirty="0">
+                <a:solidFill>
+                  <a:srgbClr val="1C2833"/>
+                </a:solidFill>
+                <a:latin typeface="Arial" pitchFamily="34" charset="0"/>
+                <a:ea typeface="Arial" pitchFamily="34" charset="-122"/>
+                <a:cs typeface="Arial" pitchFamily="34" charset="-120"/>
+              </a:rPr>
+              <a:t> (Sea-goat) · Capricorn (Sea-goat) · SUḪUR.MAŠ (Goat-fish)</a:t>
             </a:r>
             <a:endParaRPr lang="en-US" sz="1200" dirty="0"/>
           </a:p>
@@ -5740,7 +7896,7 @@
                 <a:ea typeface="Georgia" pitchFamily="34" charset="-122"/>
                 <a:cs typeface="Georgia" pitchFamily="34" charset="-120"/>
               </a:rPr>
-              <a:t>Core (5 min)</a:t>
+              <a:t>Cross-cultural reference (cont.)</a:t>
             </a:r>
             <a:endParaRPr lang="en-US" sz="1800" dirty="0"/>
           </a:p>
@@ -5754,8 +7910,8 @@
         </p:nvSpPr>
         <p:spPr>
           <a:xfrm>
-            <a:off x="406301" y="870942"/>
-            <a:ext cx="8498026" cy="1066354"/>
+            <a:off x="634901" y="883593"/>
+            <a:ext cx="8102798" cy="525661"/>
           </a:xfrm>
           <a:prstGeom prst="rect">
             <a:avLst/>
@@ -5767,36 +7923,51 @@
           <a:bodyPr wrap="square" lIns="0" tIns="0" rIns="0" bIns="0" rtlCol="0" anchor="t"/>
           <a:lstStyle/>
           <a:p>
-            <a:pPr algn="l" indent="0" marL="0">
-              <a:lnSpc>
-                <a:spcPts val="1680"/>
-              </a:lnSpc>
-              <a:spcBef>
-                <a:spcPts val="300"/>
-              </a:spcBef>
-              <a:spcAft>
-                <a:spcPts val="300"/>
-              </a:spcAft>
-              <a:buNone/>
-            </a:pPr>
-            <a:r>
-              <a:rPr lang="en-US" sz="1200" dirty="0">
-                <a:solidFill>
-                  <a:srgbClr val="1C2833"/>
-                </a:solidFill>
-                <a:latin typeface="Arial" pitchFamily="34" charset="0"/>
-                <a:ea typeface="Arial" pitchFamily="34" charset="-122"/>
-                <a:cs typeface="Arial" pitchFamily="34" charset="-120"/>
-              </a:rPr>
-              <a:t>– One-paragraph summary on the board: – The 12-fold zodiac is a shared inheritance across Babylon, Greece, and India. – Indian </a:t>
-            </a:r>
-            <a:pPr algn="l" indent="0" marL="0">
-              <a:lnSpc>
-                <a:spcPts val="1680"/>
-              </a:lnSpc>
-              <a:spcBef>
-                <a:spcPts val="300"/>
-              </a:spcBef>
+            <a:pPr algn="l" marL="342900" indent="-342900">
+              <a:lnSpc>
+                <a:spcPts val="1620"/>
+              </a:lnSpc>
+              <a:spcAft>
+                <a:spcPts val="300"/>
+              </a:spcAft>
+              <a:buSzPct val="100000"/>
+              <a:buChar char="•"/>
+            </a:pPr>
+            <a:r>
+              <a:rPr lang="en-US" sz="1200" b="1" dirty="0">
+                <a:solidFill>
+                  <a:srgbClr val="1C2833"/>
+                </a:solidFill>
+                <a:latin typeface="Arial" pitchFamily="34" charset="0"/>
+                <a:ea typeface="Arial" pitchFamily="34" charset="-122"/>
+                <a:cs typeface="Arial" pitchFamily="34" charset="-120"/>
+              </a:rPr>
+              <a:t>11</a:t>
+            </a:r>
+            <a:pPr algn="l" indent="0" marL="0">
+              <a:lnSpc>
+                <a:spcPts val="1620"/>
+              </a:lnSpc>
+              <a:spcAft>
+                <a:spcPts val="300"/>
+              </a:spcAft>
+              <a:buNone/>
+            </a:pPr>
+            <a:r>
+              <a:rPr lang="en-US" sz="1200" dirty="0">
+                <a:solidFill>
+                  <a:srgbClr val="1C2833"/>
+                </a:solidFill>
+                <a:latin typeface="Arial" pitchFamily="34" charset="0"/>
+                <a:ea typeface="Arial" pitchFamily="34" charset="-122"/>
+                <a:cs typeface="Arial" pitchFamily="34" charset="-120"/>
+              </a:rPr>
+              <a:t> — </a:t>
+            </a:r>
+            <a:pPr algn="l" indent="0" marL="0">
+              <a:lnSpc>
+                <a:spcPts val="1620"/>
+              </a:lnSpc>
               <a:spcAft>
                 <a:spcPts val="300"/>
               </a:spcAft>
@@ -5811,38 +7982,76 @@
                 <a:ea typeface="Arial" pitchFamily="34" charset="-122"/>
                 <a:cs typeface="Arial" pitchFamily="34" charset="-120"/>
               </a:rPr>
-              <a:t>jyotiṣa</a:t>
-            </a:r>
-            <a:pPr algn="l" indent="0" marL="0">
-              <a:lnSpc>
-                <a:spcPts val="1680"/>
-              </a:lnSpc>
-              <a:spcBef>
-                <a:spcPts val="300"/>
-              </a:spcBef>
-              <a:spcAft>
-                <a:spcPts val="300"/>
-              </a:spcAft>
-              <a:buNone/>
-            </a:pPr>
-            <a:r>
-              <a:rPr lang="en-US" sz="1200" dirty="0">
-                <a:solidFill>
-                  <a:srgbClr val="1C2833"/>
-                </a:solidFill>
-                <a:latin typeface="Arial" pitchFamily="34" charset="0"/>
-                <a:ea typeface="Arial" pitchFamily="34" charset="-122"/>
-                <a:cs typeface="Arial" pitchFamily="34" charset="-120"/>
-              </a:rPr>
-              <a:t> layered this on top of the older 27-</a:t>
-            </a:r>
-            <a:pPr algn="l" indent="0" marL="0">
-              <a:lnSpc>
-                <a:spcPts val="1680"/>
-              </a:lnSpc>
-              <a:spcBef>
-                <a:spcPts val="300"/>
-              </a:spcBef>
+              <a:t>Kumbha</a:t>
+            </a:r>
+            <a:pPr algn="l" indent="0" marL="0">
+              <a:lnSpc>
+                <a:spcPts val="1620"/>
+              </a:lnSpc>
+              <a:spcAft>
+                <a:spcPts val="300"/>
+              </a:spcAft>
+              <a:buNone/>
+            </a:pPr>
+            <a:r>
+              <a:rPr lang="en-US" sz="1200" dirty="0">
+                <a:solidFill>
+                  <a:srgbClr val="1C2833"/>
+                </a:solidFill>
+                <a:latin typeface="Arial" pitchFamily="34" charset="0"/>
+                <a:ea typeface="Arial" pitchFamily="34" charset="-122"/>
+                <a:cs typeface="Arial" pitchFamily="34" charset="-120"/>
+              </a:rPr>
+              <a:t> (Water-pot) · Aquarius (Water-bearer) · GU.LA (Great One / water-pourer)</a:t>
+            </a:r>
+            <a:endParaRPr lang="en-US" sz="1200" dirty="0"/>
+          </a:p>
+          <a:p>
+            <a:pPr algn="l" marL="342900" indent="-342900">
+              <a:lnSpc>
+                <a:spcPts val="1620"/>
+              </a:lnSpc>
+              <a:spcAft>
+                <a:spcPts val="300"/>
+              </a:spcAft>
+              <a:buSzPct val="100000"/>
+              <a:buChar char="•"/>
+            </a:pPr>
+            <a:r>
+              <a:rPr lang="en-US" sz="1200" b="1" dirty="0">
+                <a:solidFill>
+                  <a:srgbClr val="1C2833"/>
+                </a:solidFill>
+                <a:latin typeface="Arial" pitchFamily="34" charset="0"/>
+                <a:ea typeface="Arial" pitchFamily="34" charset="-122"/>
+                <a:cs typeface="Arial" pitchFamily="34" charset="-120"/>
+              </a:rPr>
+              <a:t>12</a:t>
+            </a:r>
+            <a:pPr algn="l" indent="0" marL="0">
+              <a:lnSpc>
+                <a:spcPts val="1620"/>
+              </a:lnSpc>
+              <a:spcAft>
+                <a:spcPts val="300"/>
+              </a:spcAft>
+              <a:buNone/>
+            </a:pPr>
+            <a:r>
+              <a:rPr lang="en-US" sz="1200" dirty="0">
+                <a:solidFill>
+                  <a:srgbClr val="1C2833"/>
+                </a:solidFill>
+                <a:latin typeface="Arial" pitchFamily="34" charset="0"/>
+                <a:ea typeface="Arial" pitchFamily="34" charset="-122"/>
+                <a:cs typeface="Arial" pitchFamily="34" charset="-120"/>
+              </a:rPr>
+              <a:t> — </a:t>
+            </a:r>
+            <a:pPr algn="l" indent="0" marL="0">
+              <a:lnSpc>
+                <a:spcPts val="1620"/>
+              </a:lnSpc>
               <a:spcAft>
                 <a:spcPts val="300"/>
               </a:spcAft>
@@ -5857,214 +8066,27 @@
                 <a:ea typeface="Arial" pitchFamily="34" charset="-122"/>
                 <a:cs typeface="Arial" pitchFamily="34" charset="-120"/>
               </a:rPr>
-              <a:t>nakṣatra</a:t>
-            </a:r>
-            <a:pPr algn="l" indent="0" marL="0">
-              <a:lnSpc>
-                <a:spcPts val="1680"/>
-              </a:lnSpc>
-              <a:spcBef>
-                <a:spcPts val="300"/>
-              </a:spcBef>
-              <a:spcAft>
-                <a:spcPts val="300"/>
-              </a:spcAft>
-              <a:buNone/>
-            </a:pPr>
-            <a:r>
-              <a:rPr lang="en-US" sz="1200" dirty="0">
-                <a:solidFill>
-                  <a:srgbClr val="1C2833"/>
-                </a:solidFill>
-                <a:latin typeface="Arial" pitchFamily="34" charset="0"/>
-                <a:ea typeface="Arial" pitchFamily="34" charset="-122"/>
-                <a:cs typeface="Arial" pitchFamily="34" charset="-120"/>
-              </a:rPr>
-              <a:t> system. – This means: when you study the </a:t>
-            </a:r>
-            <a:pPr algn="l" indent="0" marL="0">
-              <a:lnSpc>
-                <a:spcPts val="1680"/>
-              </a:lnSpc>
-              <a:spcBef>
-                <a:spcPts val="300"/>
-              </a:spcBef>
-              <a:spcAft>
-                <a:spcPts val="300"/>
-              </a:spcAft>
-              <a:buNone/>
-            </a:pPr>
-            <a:r>
-              <a:rPr lang="en-US" sz="1200" i="1" dirty="0">
-                <a:solidFill>
-                  <a:srgbClr val="1C2833"/>
-                </a:solidFill>
-                <a:latin typeface="Arial" pitchFamily="34" charset="0"/>
-                <a:ea typeface="Arial" pitchFamily="34" charset="-122"/>
-                <a:cs typeface="Arial" pitchFamily="34" charset="-120"/>
-              </a:rPr>
-              <a:t>rāśis</a:t>
-            </a:r>
-            <a:pPr algn="l" indent="0" marL="0">
-              <a:lnSpc>
-                <a:spcPts val="1680"/>
-              </a:lnSpc>
-              <a:spcBef>
-                <a:spcPts val="300"/>
-              </a:spcBef>
-              <a:spcAft>
-                <a:spcPts val="300"/>
-              </a:spcAft>
-              <a:buNone/>
-            </a:pPr>
-            <a:r>
-              <a:rPr lang="en-US" sz="1200" dirty="0">
-                <a:solidFill>
-                  <a:srgbClr val="1C2833"/>
-                </a:solidFill>
-                <a:latin typeface="Arial" pitchFamily="34" charset="0"/>
-                <a:ea typeface="Arial" pitchFamily="34" charset="-122"/>
-                <a:cs typeface="Arial" pitchFamily="34" charset="-120"/>
-              </a:rPr>
-              <a:t>, you are studying a 2700-year-old transcontinental mathematical-astronomical inheritance, not a purely Indian invention. – This is </a:t>
-            </a:r>
-            <a:pPr algn="l" indent="0" marL="0">
-              <a:lnSpc>
-                <a:spcPts val="1680"/>
-              </a:lnSpc>
-              <a:spcBef>
-                <a:spcPts val="300"/>
-              </a:spcBef>
-              <a:spcAft>
-                <a:spcPts val="300"/>
-              </a:spcAft>
-              <a:buNone/>
-            </a:pPr>
-            <a:r>
-              <a:rPr lang="en-US" sz="1200" b="1" dirty="0">
-                <a:solidFill>
-                  <a:srgbClr val="1C2833"/>
-                </a:solidFill>
-                <a:latin typeface="Arial" pitchFamily="34" charset="0"/>
-                <a:ea typeface="Arial" pitchFamily="34" charset="-122"/>
-                <a:cs typeface="Arial" pitchFamily="34" charset="-120"/>
-              </a:rPr>
-              <a:t>not</a:t>
-            </a:r>
-            <a:pPr algn="l" indent="0" marL="0">
-              <a:lnSpc>
-                <a:spcPts val="1680"/>
-              </a:lnSpc>
-              <a:spcBef>
-                <a:spcPts val="300"/>
-              </a:spcBef>
-              <a:spcAft>
-                <a:spcPts val="300"/>
-              </a:spcAft>
-              <a:buNone/>
-            </a:pPr>
-            <a:r>
-              <a:rPr lang="en-US" sz="1200" dirty="0">
-                <a:solidFill>
-                  <a:srgbClr val="1C2833"/>
-                </a:solidFill>
-                <a:latin typeface="Arial" pitchFamily="34" charset="0"/>
-                <a:ea typeface="Arial" pitchFamily="34" charset="-122"/>
-                <a:cs typeface="Arial" pitchFamily="34" charset="-120"/>
-              </a:rPr>
-              <a:t> "Indians borrowed from the West" — Babylonian astronomy reached India before it reached Greece in some respects, and the Indian elaboration (the </a:t>
-            </a:r>
-            <a:pPr algn="l" indent="0" marL="0">
-              <a:lnSpc>
-                <a:spcPts val="1680"/>
-              </a:lnSpc>
-              <a:spcBef>
-                <a:spcPts val="300"/>
-              </a:spcBef>
-              <a:spcAft>
-                <a:spcPts val="300"/>
-              </a:spcAft>
-              <a:buNone/>
-            </a:pPr>
-            <a:r>
-              <a:rPr lang="en-US" sz="1200" i="1" dirty="0">
-                <a:solidFill>
-                  <a:srgbClr val="1C2833"/>
-                </a:solidFill>
-                <a:latin typeface="Arial" pitchFamily="34" charset="0"/>
-                <a:ea typeface="Arial" pitchFamily="34" charset="-122"/>
-                <a:cs typeface="Arial" pitchFamily="34" charset="-120"/>
-              </a:rPr>
-              <a:t>nirayana</a:t>
-            </a:r>
-            <a:pPr algn="l" indent="0" marL="0">
-              <a:lnSpc>
-                <a:spcPts val="1680"/>
-              </a:lnSpc>
-              <a:spcBef>
-                <a:spcPts val="300"/>
-              </a:spcBef>
-              <a:spcAft>
-                <a:spcPts val="300"/>
-              </a:spcAft>
-              <a:buNone/>
-            </a:pPr>
-            <a:r>
-              <a:rPr lang="en-US" sz="1200" dirty="0">
-                <a:solidFill>
-                  <a:srgbClr val="1C2833"/>
-                </a:solidFill>
-                <a:latin typeface="Arial" pitchFamily="34" charset="0"/>
-                <a:ea typeface="Arial" pitchFamily="34" charset="-122"/>
-                <a:cs typeface="Arial" pitchFamily="34" charset="-120"/>
-              </a:rPr>
-              <a:t> convention, the </a:t>
-            </a:r>
-            <a:pPr algn="l" indent="0" marL="0">
-              <a:lnSpc>
-                <a:spcPts val="1680"/>
-              </a:lnSpc>
-              <a:spcBef>
-                <a:spcPts val="300"/>
-              </a:spcBef>
-              <a:spcAft>
-                <a:spcPts val="300"/>
-              </a:spcAft>
-              <a:buNone/>
-            </a:pPr>
-            <a:r>
-              <a:rPr lang="en-US" sz="1200" i="1" dirty="0">
-                <a:solidFill>
-                  <a:srgbClr val="1C2833"/>
-                </a:solidFill>
-                <a:latin typeface="Arial" pitchFamily="34" charset="0"/>
-                <a:ea typeface="Arial" pitchFamily="34" charset="-122"/>
-                <a:cs typeface="Arial" pitchFamily="34" charset="-120"/>
-              </a:rPr>
-              <a:t>ayanāṁśa</a:t>
-            </a:r>
-            <a:pPr algn="l" indent="0" marL="0">
-              <a:lnSpc>
-                <a:spcPts val="1680"/>
-              </a:lnSpc>
-              <a:spcBef>
-                <a:spcPts val="300"/>
-              </a:spcBef>
-              <a:spcAft>
-                <a:spcPts val="300"/>
-              </a:spcAft>
-              <a:buNone/>
-            </a:pPr>
-            <a:r>
-              <a:rPr lang="en-US" sz="1200" dirty="0">
-                <a:solidFill>
-                  <a:srgbClr val="1C2833"/>
-                </a:solidFill>
-                <a:latin typeface="Arial" pitchFamily="34" charset="0"/>
-                <a:ea typeface="Arial" pitchFamily="34" charset="-122"/>
-                <a:cs typeface="Arial" pitchFamily="34" charset="-120"/>
-              </a:rPr>
-              <a:t> corrections) is a real intellectual contribution.</a:t>
+              <a:t>Mīna</a:t>
+            </a:r>
+            <a:pPr algn="l" indent="0" marL="0">
+              <a:lnSpc>
+                <a:spcPts val="1620"/>
+              </a:lnSpc>
+              <a:spcAft>
+                <a:spcPts val="300"/>
+              </a:spcAft>
+              <a:buNone/>
+            </a:pPr>
+            <a:r>
+              <a:rPr lang="en-US" sz="1200" dirty="0">
+                <a:solidFill>
+                  <a:srgbClr val="1C2833"/>
+                </a:solidFill>
+                <a:latin typeface="Arial" pitchFamily="34" charset="0"/>
+                <a:ea typeface="Arial" pitchFamily="34" charset="-122"/>
+                <a:cs typeface="Arial" pitchFamily="34" charset="-120"/>
+              </a:rPr>
+              <a:t> (Fishes) · Pisces (Fishes) · DU.NU.NU (Tails)</a:t>
             </a:r>
             <a:endParaRPr lang="en-US" sz="1200" dirty="0"/>
           </a:p>
@@ -6222,7 +8244,7 @@
                 <a:ea typeface="Georgia" pitchFamily="34" charset="-122"/>
                 <a:cs typeface="Georgia" pitchFamily="34" charset="-120"/>
               </a:rPr>
-              <a:t>Refinement work (25 min)</a:t>
+              <a:t>Cross-cultural reference (cont.)</a:t>
             </a:r>
             <a:endParaRPr lang="en-US" sz="1800" dirty="0"/>
           </a:p>
@@ -6237,54 +8259,6 @@
         <p:spPr>
           <a:xfrm>
             <a:off x="406301" y="870942"/>
-            <a:ext cx="8498026" cy="213271"/>
-          </a:xfrm>
-          <a:prstGeom prst="rect">
-            <a:avLst/>
-          </a:prstGeom>
-          <a:noFill/>
-          <a:ln/>
-        </p:spPr>
-        <p:txBody>
-          <a:bodyPr wrap="square" lIns="0" tIns="0" rIns="0" bIns="0" rtlCol="0" anchor="t"/>
-          <a:lstStyle/>
-          <a:p>
-            <a:pPr algn="l" indent="0" marL="0">
-              <a:lnSpc>
-                <a:spcPts val="1680"/>
-              </a:lnSpc>
-              <a:spcBef>
-                <a:spcPts val="300"/>
-              </a:spcBef>
-              <a:spcAft>
-                <a:spcPts val="300"/>
-              </a:spcAft>
-              <a:buNone/>
-            </a:pPr>
-            <a:r>
-              <a:rPr lang="en-US" sz="1200" dirty="0">
-                <a:solidFill>
-                  <a:srgbClr val="1C2833"/>
-                </a:solidFill>
-                <a:latin typeface="Arial" pitchFamily="34" charset="0"/>
-                <a:ea typeface="Arial" pitchFamily="34" charset="-122"/>
-                <a:cs typeface="Arial" pitchFamily="34" charset="-120"/>
-              </a:rPr>
-              <a:t>Pairs refine their wheel:</a:t>
-            </a:r>
-            <a:endParaRPr lang="en-US" sz="1200" dirty="0"/>
-          </a:p>
-        </p:txBody>
-      </p:sp>
-      <p:sp>
-        <p:nvSpPr>
-          <p:cNvPr id="5" name="Text 3"/>
-          <p:cNvSpPr/>
-          <p:nvPr/>
-        </p:nvSpPr>
-        <p:spPr>
-          <a:xfrm>
-            <a:off x="406301" y="1160413"/>
             <a:ext cx="8498026" cy="1066354"/>
           </a:xfrm>
           <a:prstGeom prst="rect">
@@ -6318,7 +8292,7 @@
                 <a:ea typeface="Arial" pitchFamily="34" charset="-122"/>
                 <a:cs typeface="Arial" pitchFamily="34" charset="-120"/>
               </a:rPr>
-              <a:t>– Add the cross-cultural element. Options: – A small inset showing the Babylonian name for ONE </a:t>
+              <a:t>The Indian, Greek, and Babylonian names are </a:t>
             </a:r>
             <a:pPr algn="l" indent="0" marL="0">
               <a:lnSpc>
@@ -6341,7 +8315,7 @@
                 <a:ea typeface="Arial" pitchFamily="34" charset="-122"/>
                 <a:cs typeface="Arial" pitchFamily="34" charset="-120"/>
               </a:rPr>
-              <a:t>rāśi</a:t>
+              <a:t>strikingly similar</a:t>
             </a:r>
             <a:pPr algn="l" indent="0" marL="0">
               <a:lnSpc>
@@ -6364,7 +8338,7 @@
                 <a:ea typeface="Arial" pitchFamily="34" charset="-122"/>
                 <a:cs typeface="Arial" pitchFamily="34" charset="-120"/>
               </a:rPr>
-              <a:t> alongside the Sanskrit and Greek. – A single sentence on the wheel: "These 12 signs appear in similar form in Babylonian, Greek, and Indian astronomy — a 2700-year inheritance." – A short comparative note on Cancer / Karka with a footnote on the Babylonian name. – Finalise the written explanation paragraph (4–6 sentences) covering: axial tilt, the two </a:t>
+              <a:t> — the same animals (ram, bull, twins, crab, lion, scorpion, fishes) appear in all three. This is not accidental. The most likely historical explanation is </a:t>
             </a:r>
             <a:pPr algn="l" indent="0" marL="0">
               <a:lnSpc>
@@ -6379,6 +8353,52 @@
               <a:buNone/>
             </a:pPr>
             <a:r>
+              <a:rPr lang="en-US" sz="1200" b="1" dirty="0">
+                <a:solidFill>
+                  <a:srgbClr val="1C2833"/>
+                </a:solidFill>
+                <a:latin typeface="Arial" pitchFamily="34" charset="0"/>
+                <a:ea typeface="Arial" pitchFamily="34" charset="-122"/>
+                <a:cs typeface="Arial" pitchFamily="34" charset="-120"/>
+              </a:rPr>
+              <a:t>shared origin in Babylonian astronomy (~700 BCE)</a:t>
+            </a:r>
+            <a:pPr algn="l" indent="0" marL="0">
+              <a:lnSpc>
+                <a:spcPts val="1680"/>
+              </a:lnSpc>
+              <a:spcBef>
+                <a:spcPts val="300"/>
+              </a:spcBef>
+              <a:spcAft>
+                <a:spcPts val="300"/>
+              </a:spcAft>
+              <a:buNone/>
+            </a:pPr>
+            <a:r>
+              <a:rPr lang="en-US" sz="1200" dirty="0">
+                <a:solidFill>
+                  <a:srgbClr val="1C2833"/>
+                </a:solidFill>
+                <a:latin typeface="Arial" pitchFamily="34" charset="0"/>
+                <a:ea typeface="Arial" pitchFamily="34" charset="-122"/>
+                <a:cs typeface="Arial" pitchFamily="34" charset="-120"/>
+              </a:rPr>
+              <a:t>, transmitted to Greece (post-Alexander, ~300 BCE) and to India (Hellenistic contact, last centuries BCE). The 12-fold ecliptic division and the imagery were absorbed into the Indian </a:t>
+            </a:r>
+            <a:pPr algn="l" indent="0" marL="0">
+              <a:lnSpc>
+                <a:spcPts val="1680"/>
+              </a:lnSpc>
+              <a:spcBef>
+                <a:spcPts val="300"/>
+              </a:spcBef>
+              <a:spcAft>
+                <a:spcPts val="300"/>
+              </a:spcAft>
+              <a:buNone/>
+            </a:pPr>
+            <a:r>
               <a:rPr lang="en-US" sz="1200" i="1" dirty="0">
                 <a:solidFill>
                   <a:srgbClr val="1C2833"/>
@@ -6387,7 +8407,7 @@
                 <a:ea typeface="Arial" pitchFamily="34" charset="-122"/>
                 <a:cs typeface="Arial" pitchFamily="34" charset="-120"/>
               </a:rPr>
-              <a:t>ayanas</a:t>
+              <a:t>jyotiṣa</a:t>
             </a:r>
             <a:pPr algn="l" indent="0" marL="0">
               <a:lnSpc>
@@ -6410,7 +8430,7 @@
                 <a:ea typeface="Arial" pitchFamily="34" charset="-122"/>
                 <a:cs typeface="Arial" pitchFamily="34" charset="-120"/>
               </a:rPr>
-              <a:t>, the four turning-points, the </a:t>
+              <a:t> tradition and merged with earlier Vedic star-lore (the 27 </a:t>
             </a:r>
             <a:pPr algn="l" indent="0" marL="0">
               <a:lnSpc>
@@ -6433,7 +8453,7 @@
                 <a:ea typeface="Arial" pitchFamily="34" charset="-122"/>
                 <a:cs typeface="Arial" pitchFamily="34" charset="-120"/>
               </a:rPr>
-              <a:t>sāyana</a:t>
+              <a:t>nakṣatra</a:t>
             </a:r>
             <a:pPr algn="l" indent="0" marL="0">
               <a:lnSpc>
@@ -6456,53 +8476,7 @@
                 <a:ea typeface="Arial" pitchFamily="34" charset="-122"/>
                 <a:cs typeface="Arial" pitchFamily="34" charset="-120"/>
               </a:rPr>
-              <a:t> / </a:t>
-            </a:r>
-            <a:pPr algn="l" indent="0" marL="0">
-              <a:lnSpc>
-                <a:spcPts val="1680"/>
-              </a:lnSpc>
-              <a:spcBef>
-                <a:spcPts val="300"/>
-              </a:spcBef>
-              <a:spcAft>
-                <a:spcPts val="300"/>
-              </a:spcAft>
-              <a:buNone/>
-            </a:pPr>
-            <a:r>
-              <a:rPr lang="en-US" sz="1200" i="1" dirty="0">
-                <a:solidFill>
-                  <a:srgbClr val="1C2833"/>
-                </a:solidFill>
-                <a:latin typeface="Arial" pitchFamily="34" charset="0"/>
-                <a:ea typeface="Arial" pitchFamily="34" charset="-122"/>
-                <a:cs typeface="Arial" pitchFamily="34" charset="-120"/>
-              </a:rPr>
-              <a:t>nirayana</a:t>
-            </a:r>
-            <a:pPr algn="l" indent="0" marL="0">
-              <a:lnSpc>
-                <a:spcPts val="1680"/>
-              </a:lnSpc>
-              <a:spcBef>
-                <a:spcPts val="300"/>
-              </a:spcBef>
-              <a:spcAft>
-                <a:spcPts val="300"/>
-              </a:spcAft>
-              <a:buNone/>
-            </a:pPr>
-            <a:r>
-              <a:rPr lang="en-US" sz="1200" dirty="0">
-                <a:solidFill>
-                  <a:srgbClr val="1C2833"/>
-                </a:solidFill>
-                <a:latin typeface="Arial" pitchFamily="34" charset="0"/>
-                <a:ea typeface="Arial" pitchFamily="34" charset="-122"/>
-                <a:cs typeface="Arial" pitchFamily="34" charset="-120"/>
-              </a:rPr>
-              <a:t> distinction, and one citation. – Decide who-says-what in the 3-minute presentation.</a:t>
+              <a:t> system, which is genuinely older and independently Indian).</a:t>
             </a:r>
             <a:endParaRPr lang="en-US" sz="1200" dirty="0"/>
           </a:p>
@@ -6510,7 +8484,7 @@
       </p:sp>
       <p:sp>
         <p:nvSpPr>
-          <p:cNvPr id="6" name="Text 4"/>
+          <p:cNvPr id="5" name="Text 3"/>
           <p:cNvSpPr/>
           <p:nvPr/>
         </p:nvSpPr>
@@ -6660,7 +8634,7 @@
                 <a:ea typeface="Georgia" pitchFamily="34" charset="-122"/>
                 <a:cs typeface="Georgia" pitchFamily="34" charset="-120"/>
               </a:rPr>
-              <a:t>Rehearsal (8 min)</a:t>
+              <a:t>Cross-cultural reference (cont.)</a:t>
             </a:r>
             <a:endParaRPr lang="en-US" sz="1800" dirty="0"/>
           </a:p>
@@ -6708,7 +8682,145 @@
                 <a:ea typeface="Arial" pitchFamily="34" charset="-122"/>
                 <a:cs typeface="Arial" pitchFamily="34" charset="-120"/>
               </a:rPr>
-              <a:t>In groups of two pairs (4 students), pairs rehearse their 3-minute presentation in front of each other.</a:t>
+              <a:t>The 27-</a:t>
+            </a:r>
+            <a:pPr algn="l" indent="0" marL="0">
+              <a:lnSpc>
+                <a:spcPts val="1680"/>
+              </a:lnSpc>
+              <a:spcBef>
+                <a:spcPts val="300"/>
+              </a:spcBef>
+              <a:spcAft>
+                <a:spcPts val="300"/>
+              </a:spcAft>
+              <a:buNone/>
+            </a:pPr>
+            <a:r>
+              <a:rPr lang="en-US" sz="1200" i="1" dirty="0">
+                <a:solidFill>
+                  <a:srgbClr val="1C2833"/>
+                </a:solidFill>
+                <a:latin typeface="Arial" pitchFamily="34" charset="0"/>
+                <a:ea typeface="Arial" pitchFamily="34" charset="-122"/>
+                <a:cs typeface="Arial" pitchFamily="34" charset="-120"/>
+              </a:rPr>
+              <a:t>nakṣatra</a:t>
+            </a:r>
+            <a:pPr algn="l" indent="0" marL="0">
+              <a:lnSpc>
+                <a:spcPts val="1680"/>
+              </a:lnSpc>
+              <a:spcBef>
+                <a:spcPts val="300"/>
+              </a:spcBef>
+              <a:spcAft>
+                <a:spcPts val="300"/>
+              </a:spcAft>
+              <a:buNone/>
+            </a:pPr>
+            <a:r>
+              <a:rPr lang="en-US" sz="1200" dirty="0">
+                <a:solidFill>
+                  <a:srgbClr val="1C2833"/>
+                </a:solidFill>
+                <a:latin typeface="Arial" pitchFamily="34" charset="0"/>
+                <a:ea typeface="Arial" pitchFamily="34" charset="-122"/>
+                <a:cs typeface="Arial" pitchFamily="34" charset="-120"/>
+              </a:rPr>
+              <a:t> system </a:t>
+            </a:r>
+            <a:pPr algn="l" indent="0" marL="0">
+              <a:lnSpc>
+                <a:spcPts val="1680"/>
+              </a:lnSpc>
+              <a:spcBef>
+                <a:spcPts val="300"/>
+              </a:spcBef>
+              <a:spcAft>
+                <a:spcPts val="300"/>
+              </a:spcAft>
+              <a:buNone/>
+            </a:pPr>
+            <a:r>
+              <a:rPr lang="en-US" sz="1200" b="1" dirty="0">
+                <a:solidFill>
+                  <a:srgbClr val="1C2833"/>
+                </a:solidFill>
+                <a:latin typeface="Arial" pitchFamily="34" charset="0"/>
+                <a:ea typeface="Arial" pitchFamily="34" charset="-122"/>
+                <a:cs typeface="Arial" pitchFamily="34" charset="-120"/>
+              </a:rPr>
+              <a:t>is</a:t>
+            </a:r>
+            <a:pPr algn="l" indent="0" marL="0">
+              <a:lnSpc>
+                <a:spcPts val="1680"/>
+              </a:lnSpc>
+              <a:spcBef>
+                <a:spcPts val="300"/>
+              </a:spcBef>
+              <a:spcAft>
+                <a:spcPts val="300"/>
+              </a:spcAft>
+              <a:buNone/>
+            </a:pPr>
+            <a:r>
+              <a:rPr lang="en-US" sz="1200" dirty="0">
+                <a:solidFill>
+                  <a:srgbClr val="1C2833"/>
+                </a:solidFill>
+                <a:latin typeface="Arial" pitchFamily="34" charset="0"/>
+                <a:ea typeface="Arial" pitchFamily="34" charset="-122"/>
+                <a:cs typeface="Arial" pitchFamily="34" charset="-120"/>
+              </a:rPr>
+              <a:t> distinctively Indian; the 12-</a:t>
+            </a:r>
+            <a:pPr algn="l" indent="0" marL="0">
+              <a:lnSpc>
+                <a:spcPts val="1680"/>
+              </a:lnSpc>
+              <a:spcBef>
+                <a:spcPts val="300"/>
+              </a:spcBef>
+              <a:spcAft>
+                <a:spcPts val="300"/>
+              </a:spcAft>
+              <a:buNone/>
+            </a:pPr>
+            <a:r>
+              <a:rPr lang="en-US" sz="1200" i="1" dirty="0">
+                <a:solidFill>
+                  <a:srgbClr val="1C2833"/>
+                </a:solidFill>
+                <a:latin typeface="Arial" pitchFamily="34" charset="0"/>
+                <a:ea typeface="Arial" pitchFamily="34" charset="-122"/>
+                <a:cs typeface="Arial" pitchFamily="34" charset="-120"/>
+              </a:rPr>
+              <a:t>rāśi</a:t>
+            </a:r>
+            <a:pPr algn="l" indent="0" marL="0">
+              <a:lnSpc>
+                <a:spcPts val="1680"/>
+              </a:lnSpc>
+              <a:spcBef>
+                <a:spcPts val="300"/>
+              </a:spcBef>
+              <a:spcAft>
+                <a:spcPts val="300"/>
+              </a:spcAft>
+              <a:buNone/>
+            </a:pPr>
+            <a:r>
+              <a:rPr lang="en-US" sz="1200" dirty="0">
+                <a:solidFill>
+                  <a:srgbClr val="1C2833"/>
+                </a:solidFill>
+                <a:latin typeface="Arial" pitchFamily="34" charset="0"/>
+                <a:ea typeface="Arial" pitchFamily="34" charset="-122"/>
+                <a:cs typeface="Arial" pitchFamily="34" charset="-120"/>
+              </a:rPr>
+              <a:t> system is the Babylonian-Greek-Indian common ground.</a:t>
             </a:r>
             <a:endParaRPr lang="en-US" sz="1200" dirty="0"/>
           </a:p>
@@ -6717,150 +8829,6 @@
       <p:sp>
         <p:nvSpPr>
           <p:cNvPr id="5" name="Text 3"/>
-          <p:cNvSpPr/>
-          <p:nvPr/>
-        </p:nvSpPr>
-        <p:spPr>
-          <a:xfrm>
-            <a:off x="406301" y="1160413"/>
-            <a:ext cx="8498026" cy="213271"/>
-          </a:xfrm>
-          <a:prstGeom prst="rect">
-            <a:avLst/>
-          </a:prstGeom>
-          <a:noFill/>
-          <a:ln/>
-        </p:spPr>
-        <p:txBody>
-          <a:bodyPr wrap="square" lIns="0" tIns="0" rIns="0" bIns="0" rtlCol="0" anchor="t"/>
-          <a:lstStyle/>
-          <a:p>
-            <a:pPr algn="l" indent="0" marL="0">
-              <a:lnSpc>
-                <a:spcPts val="1680"/>
-              </a:lnSpc>
-              <a:spcBef>
-                <a:spcPts val="300"/>
-              </a:spcBef>
-              <a:spcAft>
-                <a:spcPts val="300"/>
-              </a:spcAft>
-              <a:buNone/>
-            </a:pPr>
-            <a:r>
-              <a:rPr lang="en-US" sz="1200" dirty="0">
-                <a:solidFill>
-                  <a:srgbClr val="1C2833"/>
-                </a:solidFill>
-                <a:latin typeface="Arial" pitchFamily="34" charset="0"/>
-                <a:ea typeface="Arial" pitchFamily="34" charset="-122"/>
-                <a:cs typeface="Arial" pitchFamily="34" charset="-120"/>
-              </a:rPr>
-              <a:t>The listening pair times the speakers and gives one piece of feedback:</a:t>
-            </a:r>
-            <a:endParaRPr lang="en-US" sz="1200" dirty="0"/>
-          </a:p>
-        </p:txBody>
-      </p:sp>
-      <p:sp>
-        <p:nvSpPr>
-          <p:cNvPr id="6" name="Text 4"/>
-          <p:cNvSpPr/>
-          <p:nvPr/>
-        </p:nvSpPr>
-        <p:spPr>
-          <a:xfrm>
-            <a:off x="406301" y="1449884"/>
-            <a:ext cx="8498026" cy="213271"/>
-          </a:xfrm>
-          <a:prstGeom prst="rect">
-            <a:avLst/>
-          </a:prstGeom>
-          <a:noFill/>
-          <a:ln/>
-        </p:spPr>
-        <p:txBody>
-          <a:bodyPr wrap="square" lIns="0" tIns="0" rIns="0" bIns="0" rtlCol="0" anchor="t"/>
-          <a:lstStyle/>
-          <a:p>
-            <a:pPr algn="l" indent="0" marL="0">
-              <a:lnSpc>
-                <a:spcPts val="1680"/>
-              </a:lnSpc>
-              <a:spcBef>
-                <a:spcPts val="300"/>
-              </a:spcBef>
-              <a:spcAft>
-                <a:spcPts val="300"/>
-              </a:spcAft>
-              <a:buNone/>
-            </a:pPr>
-            <a:r>
-              <a:rPr lang="en-US" sz="1200" dirty="0">
-                <a:solidFill>
-                  <a:srgbClr val="1C2833"/>
-                </a:solidFill>
-                <a:latin typeface="Arial" pitchFamily="34" charset="0"/>
-                <a:ea typeface="Arial" pitchFamily="34" charset="-122"/>
-                <a:cs typeface="Arial" pitchFamily="34" charset="-120"/>
-              </a:rPr>
-              <a:t>– ONE thing that came across clearly – ONE thing the audience didn't understand</a:t>
-            </a:r>
-            <a:endParaRPr lang="en-US" sz="1200" dirty="0"/>
-          </a:p>
-        </p:txBody>
-      </p:sp>
-      <p:sp>
-        <p:nvSpPr>
-          <p:cNvPr id="7" name="Text 5"/>
-          <p:cNvSpPr/>
-          <p:nvPr/>
-        </p:nvSpPr>
-        <p:spPr>
-          <a:xfrm>
-            <a:off x="406301" y="1739354"/>
-            <a:ext cx="8498026" cy="213271"/>
-          </a:xfrm>
-          <a:prstGeom prst="rect">
-            <a:avLst/>
-          </a:prstGeom>
-          <a:noFill/>
-          <a:ln/>
-        </p:spPr>
-        <p:txBody>
-          <a:bodyPr wrap="square" lIns="0" tIns="0" rIns="0" bIns="0" rtlCol="0" anchor="t"/>
-          <a:lstStyle/>
-          <a:p>
-            <a:pPr algn="l" indent="0" marL="0">
-              <a:lnSpc>
-                <a:spcPts val="1680"/>
-              </a:lnSpc>
-              <a:spcBef>
-                <a:spcPts val="300"/>
-              </a:spcBef>
-              <a:spcAft>
-                <a:spcPts val="300"/>
-              </a:spcAft>
-              <a:buNone/>
-            </a:pPr>
-            <a:r>
-              <a:rPr lang="en-US" sz="1200" dirty="0">
-                <a:solidFill>
-                  <a:srgbClr val="1C2833"/>
-                </a:solidFill>
-                <a:latin typeface="Arial" pitchFamily="34" charset="0"/>
-                <a:ea typeface="Arial" pitchFamily="34" charset="-122"/>
-                <a:cs typeface="Arial" pitchFamily="34" charset="-120"/>
-              </a:rPr>
-              <a:t>Then they swap.</a:t>
-            </a:r>
-            <a:endParaRPr lang="en-US" sz="1200" dirty="0"/>
-          </a:p>
-        </p:txBody>
-      </p:sp>
-      <p:sp>
-        <p:nvSpPr>
-          <p:cNvPr id="8" name="Text 6"/>
           <p:cNvSpPr/>
           <p:nvPr/>
         </p:nvSpPr>
@@ -7010,7 +8978,7 @@
                 <a:ea typeface="Georgia" pitchFamily="34" charset="-122"/>
                 <a:cs typeface="Georgia" pitchFamily="34" charset="-120"/>
               </a:rPr>
-              <a:t>Wrap-up (2 min)</a:t>
+              <a:t>Lesson flow</a:t>
             </a:r>
             <a:endParaRPr lang="en-US" sz="1800" dirty="0"/>
           </a:p>
@@ -7019,54 +8987,6 @@
       <p:sp>
         <p:nvSpPr>
           <p:cNvPr id="4" name="Text 2"/>
-          <p:cNvSpPr/>
-          <p:nvPr/>
-        </p:nvSpPr>
-        <p:spPr>
-          <a:xfrm>
-            <a:off x="406301" y="870942"/>
-            <a:ext cx="8498026" cy="426541"/>
-          </a:xfrm>
-          <a:prstGeom prst="rect">
-            <a:avLst/>
-          </a:prstGeom>
-          <a:noFill/>
-          <a:ln/>
-        </p:spPr>
-        <p:txBody>
-          <a:bodyPr wrap="square" lIns="0" tIns="0" rIns="0" bIns="0" rtlCol="0" anchor="t"/>
-          <a:lstStyle/>
-          <a:p>
-            <a:pPr algn="l" indent="0" marL="0">
-              <a:lnSpc>
-                <a:spcPts val="1680"/>
-              </a:lnSpc>
-              <a:spcBef>
-                <a:spcPts val="300"/>
-              </a:spcBef>
-              <a:spcAft>
-                <a:spcPts val="300"/>
-              </a:spcAft>
-              <a:buNone/>
-            </a:pPr>
-            <a:r>
-              <a:rPr lang="en-US" sz="1200" dirty="0">
-                <a:solidFill>
-                  <a:srgbClr val="1C2833"/>
-                </a:solidFill>
-                <a:latin typeface="Arial" pitchFamily="34" charset="0"/>
-                <a:ea typeface="Arial" pitchFamily="34" charset="-122"/>
-                <a:cs typeface="Arial" pitchFamily="34" charset="-120"/>
-              </a:rPr>
-              <a:t>– Exit signal: each pair raises hand showing 1, 2, 3, 4, or 5 fingers — how ready they feel for tomorrow. – The teacher notes any pair showing 1 or 2 and plans a 5-minute conference at the start of Day 10.</a:t>
-            </a:r>
-            <a:endParaRPr lang="en-US" sz="1200" dirty="0"/>
-          </a:p>
-        </p:txBody>
-      </p:sp>
-      <p:sp>
-        <p:nvSpPr>
-          <p:cNvPr id="5" name="Text 3"/>
           <p:cNvSpPr/>
           <p:nvPr/>
         </p:nvSpPr>
